--- a/output/wordlabs-price-3day.pptx
+++ b/output/wordlabs-price-3day.pptx
@@ -6040,7 +6040,7 @@
                 <a:ea typeface="Calibri" pitchFamily="34" charset="-122"/>
                 <a:cs typeface="Calibri" pitchFamily="34" charset="-120"/>
               </a:rPr>
-              <a:t>The shopkeeper thought the jacket was </a:t>
+              <a:t>The market stall was </a:t>
             </a:r>
             <a:pPr algn="l" indent="0" marL="0">
               <a:buNone/>
@@ -6102,7 +6102,7 @@
                 <a:ea typeface="Calibri" pitchFamily="34" charset="-122"/>
                 <a:cs typeface="Calibri" pitchFamily="34" charset="-120"/>
               </a:rPr>
-              <a:t> necklace was a real bargain!</a:t>
+              <a:t> memories we made there were worth everything.</a:t>
             </a:r>
             <a:endParaRPr lang="en-US" sz="1800" dirty="0"/>
           </a:p>
@@ -8084,7 +8084,7 @@
                 <a:ea typeface="Calibri" pitchFamily="34" charset="-122"/>
                 <a:cs typeface="Calibri" pitchFamily="34" charset="-120"/>
               </a:rPr>
-              <a:t>past tense / having been done</a:t>
+              <a:t>past tense / has been done</a:t>
             </a:r>
             <a:endParaRPr lang="en-US" sz="850" dirty="0"/>
           </a:p>
@@ -8092,7 +8092,46 @@
       </p:sp>
       <p:sp>
         <p:nvSpPr>
-          <p:cNvPr id="25" name="Shape 23"/>
+          <p:cNvPr id="25" name="Text 23"/>
+          <p:cNvSpPr/>
+          <p:nvPr/>
+        </p:nvSpPr>
+        <p:spPr>
+          <a:xfrm>
+            <a:off x="6519672" y="2752344"/>
+            <a:ext cx="1828800" cy="182880"/>
+          </a:xfrm>
+          <a:prstGeom prst="rect">
+            <a:avLst/>
+          </a:prstGeom>
+          <a:noFill/>
+          <a:ln/>
+        </p:spPr>
+        <p:txBody>
+          <a:bodyPr wrap="square" lIns="0" tIns="0" rIns="0" bIns="0" rtlCol="0" anchor="t"/>
+          <a:lstStyle/>
+          <a:p>
+            <a:pPr algn="ctr" indent="0" marL="0">
+              <a:buNone/>
+            </a:pPr>
+            <a:r>
+              <a:rPr lang="en-US" sz="700" i="1" dirty="0">
+                <a:solidFill>
+                  <a:srgbClr val="94A3B8"/>
+                </a:solidFill>
+                <a:latin typeface="Calibri" pitchFamily="34" charset="0"/>
+                <a:ea typeface="Calibri" pitchFamily="34" charset="-122"/>
+                <a:cs typeface="Calibri" pitchFamily="34" charset="-120"/>
+              </a:rPr>
+              <a:t>'e' dropped before vowel suffix</a:t>
+            </a:r>
+            <a:endParaRPr lang="en-US" sz="700" dirty="0"/>
+          </a:p>
+        </p:txBody>
+      </p:sp>
+      <p:sp>
+        <p:nvSpPr>
+          <p:cNvPr id="26" name="Shape 24"/>
           <p:cNvSpPr/>
           <p:nvPr/>
         </p:nvSpPr>
@@ -8119,7 +8158,7 @@
       </p:sp>
       <p:sp>
         <p:nvSpPr>
-          <p:cNvPr id="26" name="Text 24"/>
+          <p:cNvPr id="27" name="Text 25"/>
           <p:cNvSpPr/>
           <p:nvPr/>
         </p:nvSpPr>
@@ -8158,7 +8197,7 @@
       </p:sp>
       <p:sp>
         <p:nvSpPr>
-          <p:cNvPr id="27" name="Shape 25"/>
+          <p:cNvPr id="28" name="Shape 26"/>
           <p:cNvSpPr/>
           <p:nvPr/>
         </p:nvSpPr>
@@ -8185,7 +8224,7 @@
       </p:sp>
       <p:sp>
         <p:nvSpPr>
-          <p:cNvPr id="28" name="Text 26"/>
+          <p:cNvPr id="29" name="Text 27"/>
           <p:cNvSpPr/>
           <p:nvPr/>
         </p:nvSpPr>
@@ -8224,7 +8263,7 @@
       </p:sp>
       <p:sp>
         <p:nvSpPr>
-          <p:cNvPr id="29" name="Shape 27"/>
+          <p:cNvPr id="30" name="Shape 28"/>
           <p:cNvSpPr/>
           <p:nvPr/>
         </p:nvSpPr>
@@ -8251,7 +8290,7 @@
       </p:sp>
       <p:sp>
         <p:nvSpPr>
-          <p:cNvPr id="30" name="Text 28"/>
+          <p:cNvPr id="31" name="Text 29"/>
           <p:cNvSpPr/>
           <p:nvPr/>
         </p:nvSpPr>
@@ -8290,7 +8329,7 @@
       </p:sp>
       <p:sp>
         <p:nvSpPr>
-          <p:cNvPr id="31" name="Shape 29"/>
+          <p:cNvPr id="32" name="Shape 30"/>
           <p:cNvSpPr/>
           <p:nvPr/>
         </p:nvSpPr>
@@ -8317,7 +8356,7 @@
       </p:sp>
       <p:sp>
         <p:nvSpPr>
-          <p:cNvPr id="32" name="Text 30"/>
+          <p:cNvPr id="33" name="Text 31"/>
           <p:cNvSpPr/>
           <p:nvPr/>
         </p:nvSpPr>
@@ -9181,7 +9220,7 @@
                 <a:ea typeface="Calibri" pitchFamily="34" charset="-122"/>
                 <a:cs typeface="Calibri" pitchFamily="34" charset="-120"/>
               </a:rPr>
-              <a:t>past tense / having been done</a:t>
+              <a:t>past tense / has been done</a:t>
             </a:r>
             <a:endParaRPr lang="en-US" sz="850" dirty="0"/>
           </a:p>
@@ -9189,7 +9228,46 @@
       </p:sp>
       <p:sp>
         <p:nvSpPr>
-          <p:cNvPr id="25" name="Shape 23"/>
+          <p:cNvPr id="25" name="Text 23"/>
+          <p:cNvSpPr/>
+          <p:nvPr/>
+        </p:nvSpPr>
+        <p:spPr>
+          <a:xfrm>
+            <a:off x="6519672" y="2752344"/>
+            <a:ext cx="1828800" cy="182880"/>
+          </a:xfrm>
+          <a:prstGeom prst="rect">
+            <a:avLst/>
+          </a:prstGeom>
+          <a:noFill/>
+          <a:ln/>
+        </p:spPr>
+        <p:txBody>
+          <a:bodyPr wrap="square" lIns="0" tIns="0" rIns="0" bIns="0" rtlCol="0" anchor="t"/>
+          <a:lstStyle/>
+          <a:p>
+            <a:pPr algn="ctr" indent="0" marL="0">
+              <a:buNone/>
+            </a:pPr>
+            <a:r>
+              <a:rPr lang="en-US" sz="700" i="1" dirty="0">
+                <a:solidFill>
+                  <a:srgbClr val="94A3B8"/>
+                </a:solidFill>
+                <a:latin typeface="Calibri" pitchFamily="34" charset="0"/>
+                <a:ea typeface="Calibri" pitchFamily="34" charset="-122"/>
+                <a:cs typeface="Calibri" pitchFamily="34" charset="-120"/>
+              </a:rPr>
+              <a:t>'e' dropped before vowel suffix</a:t>
+            </a:r>
+            <a:endParaRPr lang="en-US" sz="700" dirty="0"/>
+          </a:p>
+        </p:txBody>
+      </p:sp>
+      <p:sp>
+        <p:nvSpPr>
+          <p:cNvPr id="26" name="Shape 24"/>
           <p:cNvSpPr/>
           <p:nvPr/>
         </p:nvSpPr>
@@ -9216,7 +9294,7 @@
       </p:sp>
       <p:sp>
         <p:nvSpPr>
-          <p:cNvPr id="26" name="Text 24"/>
+          <p:cNvPr id="27" name="Text 25"/>
           <p:cNvSpPr/>
           <p:nvPr/>
         </p:nvSpPr>
@@ -9255,7 +9333,7 @@
       </p:sp>
       <p:sp>
         <p:nvSpPr>
-          <p:cNvPr id="27" name="Shape 25"/>
+          <p:cNvPr id="28" name="Shape 26"/>
           <p:cNvSpPr/>
           <p:nvPr/>
         </p:nvSpPr>
@@ -9282,7 +9360,7 @@
       </p:sp>
       <p:sp>
         <p:nvSpPr>
-          <p:cNvPr id="28" name="Shape 26"/>
+          <p:cNvPr id="29" name="Shape 27"/>
           <p:cNvSpPr/>
           <p:nvPr/>
         </p:nvSpPr>
@@ -9309,7 +9387,7 @@
       </p:sp>
       <p:sp>
         <p:nvSpPr>
-          <p:cNvPr id="29" name="Text 27"/>
+          <p:cNvPr id="30" name="Text 28"/>
           <p:cNvSpPr/>
           <p:nvPr/>
         </p:nvSpPr>
@@ -9348,7 +9426,7 @@
       </p:sp>
       <p:sp>
         <p:nvSpPr>
-          <p:cNvPr id="30" name="Text 28"/>
+          <p:cNvPr id="31" name="Text 29"/>
           <p:cNvSpPr/>
           <p:nvPr/>
         </p:nvSpPr>
@@ -9387,7 +9465,7 @@
       </p:sp>
       <p:sp>
         <p:nvSpPr>
-          <p:cNvPr id="31" name="Shape 29"/>
+          <p:cNvPr id="32" name="Shape 30"/>
           <p:cNvSpPr/>
           <p:nvPr/>
         </p:nvSpPr>
@@ -9414,7 +9492,7 @@
       </p:sp>
       <p:sp>
         <p:nvSpPr>
-          <p:cNvPr id="32" name="Text 30"/>
+          <p:cNvPr id="33" name="Text 31"/>
           <p:cNvSpPr/>
           <p:nvPr/>
         </p:nvSpPr>
@@ -9453,7 +9531,7 @@
       </p:sp>
       <p:sp>
         <p:nvSpPr>
-          <p:cNvPr id="33" name="Text 31"/>
+          <p:cNvPr id="34" name="Text 32"/>
           <p:cNvSpPr/>
           <p:nvPr/>
         </p:nvSpPr>
@@ -9492,7 +9570,7 @@
       </p:sp>
       <p:sp>
         <p:nvSpPr>
-          <p:cNvPr id="34" name="Shape 32"/>
+          <p:cNvPr id="35" name="Shape 33"/>
           <p:cNvSpPr/>
           <p:nvPr/>
         </p:nvSpPr>
@@ -9519,7 +9597,7 @@
       </p:sp>
       <p:sp>
         <p:nvSpPr>
-          <p:cNvPr id="35" name="Text 33"/>
+          <p:cNvPr id="36" name="Text 34"/>
           <p:cNvSpPr/>
           <p:nvPr/>
         </p:nvSpPr>
@@ -9558,7 +9636,7 @@
       </p:sp>
       <p:sp>
         <p:nvSpPr>
-          <p:cNvPr id="36" name="Shape 34"/>
+          <p:cNvPr id="37" name="Shape 35"/>
           <p:cNvSpPr/>
           <p:nvPr/>
         </p:nvSpPr>
@@ -9585,7 +9663,7 @@
       </p:sp>
       <p:sp>
         <p:nvSpPr>
-          <p:cNvPr id="37" name="Text 35"/>
+          <p:cNvPr id="38" name="Text 36"/>
           <p:cNvSpPr/>
           <p:nvPr/>
         </p:nvSpPr>
@@ -9624,7 +9702,7 @@
       </p:sp>
       <p:sp>
         <p:nvSpPr>
-          <p:cNvPr id="38" name="Shape 36"/>
+          <p:cNvPr id="39" name="Shape 37"/>
           <p:cNvSpPr/>
           <p:nvPr/>
         </p:nvSpPr>
@@ -9651,7 +9729,7 @@
       </p:sp>
       <p:sp>
         <p:nvSpPr>
-          <p:cNvPr id="39" name="Text 37"/>
+          <p:cNvPr id="40" name="Text 38"/>
           <p:cNvSpPr/>
           <p:nvPr/>
         </p:nvSpPr>
@@ -10515,7 +10593,7 @@
                 <a:ea typeface="Calibri" pitchFamily="34" charset="-122"/>
                 <a:cs typeface="Calibri" pitchFamily="34" charset="-120"/>
               </a:rPr>
-              <a:t>past tense / having been done</a:t>
+              <a:t>past tense / has been done</a:t>
             </a:r>
             <a:endParaRPr lang="en-US" sz="850" dirty="0"/>
           </a:p>
@@ -10523,7 +10601,46 @@
       </p:sp>
       <p:sp>
         <p:nvSpPr>
-          <p:cNvPr id="25" name="Shape 23"/>
+          <p:cNvPr id="25" name="Text 23"/>
+          <p:cNvSpPr/>
+          <p:nvPr/>
+        </p:nvSpPr>
+        <p:spPr>
+          <a:xfrm>
+            <a:off x="6519672" y="2752344"/>
+            <a:ext cx="1828800" cy="182880"/>
+          </a:xfrm>
+          <a:prstGeom prst="rect">
+            <a:avLst/>
+          </a:prstGeom>
+          <a:noFill/>
+          <a:ln/>
+        </p:spPr>
+        <p:txBody>
+          <a:bodyPr wrap="square" lIns="0" tIns="0" rIns="0" bIns="0" rtlCol="0" anchor="t"/>
+          <a:lstStyle/>
+          <a:p>
+            <a:pPr algn="ctr" indent="0" marL="0">
+              <a:buNone/>
+            </a:pPr>
+            <a:r>
+              <a:rPr lang="en-US" sz="700" i="1" dirty="0">
+                <a:solidFill>
+                  <a:srgbClr val="94A3B8"/>
+                </a:solidFill>
+                <a:latin typeface="Calibri" pitchFamily="34" charset="0"/>
+                <a:ea typeface="Calibri" pitchFamily="34" charset="-122"/>
+                <a:cs typeface="Calibri" pitchFamily="34" charset="-120"/>
+              </a:rPr>
+              <a:t>'e' dropped before vowel suffix</a:t>
+            </a:r>
+            <a:endParaRPr lang="en-US" sz="700" dirty="0"/>
+          </a:p>
+        </p:txBody>
+      </p:sp>
+      <p:sp>
+        <p:nvSpPr>
+          <p:cNvPr id="26" name="Shape 24"/>
           <p:cNvSpPr/>
           <p:nvPr/>
         </p:nvSpPr>
@@ -10550,7 +10667,7 @@
       </p:sp>
       <p:sp>
         <p:nvSpPr>
-          <p:cNvPr id="26" name="Text 24"/>
+          <p:cNvPr id="27" name="Text 25"/>
           <p:cNvSpPr/>
           <p:nvPr/>
         </p:nvSpPr>
@@ -10589,7 +10706,7 @@
       </p:sp>
       <p:sp>
         <p:nvSpPr>
-          <p:cNvPr id="27" name="Shape 25"/>
+          <p:cNvPr id="28" name="Shape 26"/>
           <p:cNvSpPr/>
           <p:nvPr/>
         </p:nvSpPr>
@@ -10616,7 +10733,7 @@
       </p:sp>
       <p:sp>
         <p:nvSpPr>
-          <p:cNvPr id="28" name="Shape 26"/>
+          <p:cNvPr id="29" name="Shape 27"/>
           <p:cNvSpPr/>
           <p:nvPr/>
         </p:nvSpPr>
@@ -10643,7 +10760,7 @@
       </p:sp>
       <p:sp>
         <p:nvSpPr>
-          <p:cNvPr id="29" name="Text 27"/>
+          <p:cNvPr id="30" name="Text 28"/>
           <p:cNvSpPr/>
           <p:nvPr/>
         </p:nvSpPr>
@@ -10682,7 +10799,7 @@
       </p:sp>
       <p:sp>
         <p:nvSpPr>
-          <p:cNvPr id="30" name="Text 28"/>
+          <p:cNvPr id="31" name="Text 29"/>
           <p:cNvSpPr/>
           <p:nvPr/>
         </p:nvSpPr>
@@ -10721,7 +10838,7 @@
       </p:sp>
       <p:sp>
         <p:nvSpPr>
-          <p:cNvPr id="31" name="Shape 29"/>
+          <p:cNvPr id="32" name="Shape 30"/>
           <p:cNvSpPr/>
           <p:nvPr/>
         </p:nvSpPr>
@@ -10748,7 +10865,7 @@
       </p:sp>
       <p:sp>
         <p:nvSpPr>
-          <p:cNvPr id="32" name="Text 30"/>
+          <p:cNvPr id="33" name="Text 31"/>
           <p:cNvSpPr/>
           <p:nvPr/>
         </p:nvSpPr>
@@ -10787,7 +10904,7 @@
       </p:sp>
       <p:sp>
         <p:nvSpPr>
-          <p:cNvPr id="33" name="Text 31"/>
+          <p:cNvPr id="34" name="Text 32"/>
           <p:cNvSpPr/>
           <p:nvPr/>
         </p:nvSpPr>
@@ -10826,7 +10943,7 @@
       </p:sp>
       <p:sp>
         <p:nvSpPr>
-          <p:cNvPr id="34" name="Shape 32"/>
+          <p:cNvPr id="35" name="Shape 33"/>
           <p:cNvSpPr/>
           <p:nvPr/>
         </p:nvSpPr>
@@ -10853,7 +10970,7 @@
       </p:sp>
       <p:sp>
         <p:nvSpPr>
-          <p:cNvPr id="35" name="Text 33"/>
+          <p:cNvPr id="36" name="Text 34"/>
           <p:cNvSpPr/>
           <p:nvPr/>
         </p:nvSpPr>
@@ -10892,7 +11009,7 @@
       </p:sp>
       <p:sp>
         <p:nvSpPr>
-          <p:cNvPr id="36" name="Shape 34"/>
+          <p:cNvPr id="37" name="Shape 35"/>
           <p:cNvSpPr/>
           <p:nvPr/>
         </p:nvSpPr>
@@ -10919,7 +11036,7 @@
       </p:sp>
       <p:sp>
         <p:nvSpPr>
-          <p:cNvPr id="37" name="Text 35"/>
+          <p:cNvPr id="38" name="Text 36"/>
           <p:cNvSpPr/>
           <p:nvPr/>
         </p:nvSpPr>
@@ -10958,7 +11075,7 @@
       </p:sp>
       <p:sp>
         <p:nvSpPr>
-          <p:cNvPr id="38" name="Shape 36"/>
+          <p:cNvPr id="39" name="Shape 37"/>
           <p:cNvSpPr/>
           <p:nvPr/>
         </p:nvSpPr>
@@ -10985,7 +11102,7 @@
       </p:sp>
       <p:sp>
         <p:nvSpPr>
-          <p:cNvPr id="39" name="Shape 37"/>
+          <p:cNvPr id="40" name="Shape 38"/>
           <p:cNvSpPr/>
           <p:nvPr/>
         </p:nvSpPr>
@@ -11012,7 +11129,7 @@
       </p:sp>
       <p:sp>
         <p:nvSpPr>
-          <p:cNvPr id="40" name="Text 38"/>
+          <p:cNvPr id="41" name="Text 39"/>
           <p:cNvSpPr/>
           <p:nvPr/>
         </p:nvSpPr>
@@ -11051,7 +11168,7 @@
       </p:sp>
       <p:sp>
         <p:nvSpPr>
-          <p:cNvPr id="41" name="Shape 39"/>
+          <p:cNvPr id="42" name="Shape 40"/>
           <p:cNvSpPr/>
           <p:nvPr/>
         </p:nvSpPr>
@@ -11078,7 +11195,7 @@
       </p:sp>
       <p:sp>
         <p:nvSpPr>
-          <p:cNvPr id="42" name="Text 40"/>
+          <p:cNvPr id="43" name="Text 41"/>
           <p:cNvSpPr/>
           <p:nvPr/>
         </p:nvSpPr>
@@ -11117,7 +11234,7 @@
       </p:sp>
       <p:sp>
         <p:nvSpPr>
-          <p:cNvPr id="43" name="Shape 41"/>
+          <p:cNvPr id="44" name="Shape 42"/>
           <p:cNvSpPr/>
           <p:nvPr/>
         </p:nvSpPr>
@@ -11144,7 +11261,7 @@
       </p:sp>
       <p:sp>
         <p:nvSpPr>
-          <p:cNvPr id="44" name="Text 42"/>
+          <p:cNvPr id="45" name="Text 43"/>
           <p:cNvSpPr/>
           <p:nvPr/>
         </p:nvSpPr>
@@ -11183,7 +11300,7 @@
       </p:sp>
       <p:sp>
         <p:nvSpPr>
-          <p:cNvPr id="45" name="Shape 43"/>
+          <p:cNvPr id="46" name="Shape 44"/>
           <p:cNvSpPr/>
           <p:nvPr/>
         </p:nvSpPr>
@@ -11210,7 +11327,7 @@
       </p:sp>
       <p:sp>
         <p:nvSpPr>
-          <p:cNvPr id="46" name="Text 44"/>
+          <p:cNvPr id="47" name="Text 45"/>
           <p:cNvSpPr/>
           <p:nvPr/>
         </p:nvSpPr>
@@ -11249,7 +11366,7 @@
       </p:sp>
       <p:sp>
         <p:nvSpPr>
-          <p:cNvPr id="47" name="Shape 45"/>
+          <p:cNvPr id="48" name="Shape 46"/>
           <p:cNvSpPr/>
           <p:nvPr/>
         </p:nvSpPr>
@@ -11276,7 +11393,7 @@
       </p:sp>
       <p:sp>
         <p:nvSpPr>
-          <p:cNvPr id="48" name="Text 46"/>
+          <p:cNvPr id="49" name="Text 47"/>
           <p:cNvSpPr/>
           <p:nvPr/>
         </p:nvSpPr>
@@ -11315,7 +11432,7 @@
       </p:sp>
       <p:sp>
         <p:nvSpPr>
-          <p:cNvPr id="49" name="Shape 47"/>
+          <p:cNvPr id="50" name="Shape 48"/>
           <p:cNvSpPr/>
           <p:nvPr/>
         </p:nvSpPr>
@@ -11342,7 +11459,7 @@
       </p:sp>
       <p:sp>
         <p:nvSpPr>
-          <p:cNvPr id="50" name="Text 48"/>
+          <p:cNvPr id="51" name="Text 49"/>
           <p:cNvSpPr/>
           <p:nvPr/>
         </p:nvSpPr>
@@ -11381,7 +11498,7 @@
       </p:sp>
       <p:sp>
         <p:nvSpPr>
-          <p:cNvPr id="51" name="Shape 49"/>
+          <p:cNvPr id="52" name="Shape 50"/>
           <p:cNvSpPr/>
           <p:nvPr/>
         </p:nvSpPr>
@@ -11408,7 +11525,7 @@
       </p:sp>
       <p:sp>
         <p:nvSpPr>
-          <p:cNvPr id="52" name="Text 50"/>
+          <p:cNvPr id="53" name="Text 51"/>
           <p:cNvSpPr/>
           <p:nvPr/>
         </p:nvSpPr>
@@ -11447,7 +11564,7 @@
       </p:sp>
       <p:sp>
         <p:nvSpPr>
-          <p:cNvPr id="53" name="Text 51"/>
+          <p:cNvPr id="54" name="Text 52"/>
           <p:cNvSpPr/>
           <p:nvPr/>
         </p:nvSpPr>
@@ -11486,7 +11603,7 @@
       </p:sp>
       <p:sp>
         <p:nvSpPr>
-          <p:cNvPr id="54" name="Shape 52"/>
+          <p:cNvPr id="55" name="Shape 53"/>
           <p:cNvSpPr/>
           <p:nvPr/>
         </p:nvSpPr>
@@ -11513,7 +11630,7 @@
       </p:sp>
       <p:sp>
         <p:nvSpPr>
-          <p:cNvPr id="55" name="Text 53"/>
+          <p:cNvPr id="56" name="Text 54"/>
           <p:cNvSpPr/>
           <p:nvPr/>
         </p:nvSpPr>
@@ -17225,7 +17342,7 @@
                 <a:ea typeface="Trebuchet MS" pitchFamily="34" charset="-122"/>
                 <a:cs typeface="Trebuchet MS" pitchFamily="34" charset="-120"/>
               </a:rPr>
-              <a:t>1</a:t>
+              <a:t>2</a:t>
             </a:r>
             <a:pPr algn="ctr" indent="0" marL="0">
               <a:buNone/>
@@ -17239,7 +17356,7 @@
                 <a:ea typeface="Trebuchet MS" pitchFamily="34" charset="-122"/>
                 <a:cs typeface="Trebuchet MS" pitchFamily="34" charset="-120"/>
               </a:rPr>
-              <a:t>  punctuation mark</a:t>
+              <a:t>  punctuation marks</a:t>
             </a:r>
             <a:endParaRPr lang="en-US" sz="2800" dirty="0"/>
           </a:p>
@@ -17643,7 +17760,7 @@
                 <a:ea typeface="Calibri" pitchFamily="34" charset="-122"/>
                 <a:cs typeface="Calibri" pitchFamily="34" charset="-120"/>
               </a:rPr>
-              <a:t>After </a:t>
+              <a:t>The </a:t>
             </a:r>
             <a:pPr algn="l" indent="0" marL="0">
               <a:buNone/>
@@ -17660,7 +17777,7 @@
                 <a:ea typeface="Calibri" pitchFamily="34" charset="-122"/>
                 <a:cs typeface="Calibri" pitchFamily="34" charset="-120"/>
               </a:rPr>
-              <a:t>pricing</a:t>
+              <a:t>underpriced</a:t>
             </a:r>
             <a:pPr algn="l" indent="0" marL="0">
               <a:buNone/>
@@ -17674,7 +17791,7 @@
                 <a:ea typeface="Calibri" pitchFamily="34" charset="-122"/>
                 <a:cs typeface="Calibri" pitchFamily="34" charset="-120"/>
               </a:rPr>
-              <a:t> the items carefully, the store found that some goods were </a:t>
+              <a:t> items sold quickly; the shopkeeper began </a:t>
             </a:r>
             <a:pPr algn="l" indent="0" marL="0">
               <a:buNone/>
@@ -17691,7 +17808,7 @@
                 <a:ea typeface="Calibri" pitchFamily="34" charset="-122"/>
                 <a:cs typeface="Calibri" pitchFamily="34" charset="-120"/>
               </a:rPr>
-              <a:t>overpriced</a:t>
+              <a:t>repricing</a:t>
             </a:r>
             <a:pPr algn="l" indent="0" marL="0">
               <a:buNone/>
@@ -17705,7 +17822,7 @@
                 <a:ea typeface="Calibri" pitchFamily="34" charset="-122"/>
                 <a:cs typeface="Calibri" pitchFamily="34" charset="-120"/>
               </a:rPr>
-              <a:t> and others were </a:t>
+              <a:t> everything, and the new </a:t>
             </a:r>
             <a:pPr algn="l" indent="0" marL="0">
               <a:buNone/>
@@ -17722,7 +17839,7 @@
                 <a:ea typeface="Calibri" pitchFamily="34" charset="-122"/>
                 <a:cs typeface="Calibri" pitchFamily="34" charset="-120"/>
               </a:rPr>
-              <a:t>underpriced</a:t>
+              <a:t>pricing</a:t>
             </a:r>
             <a:pPr algn="l" indent="0" marL="0">
               <a:buNone/>
@@ -17736,7 +17853,7 @@
                 <a:ea typeface="Calibri" pitchFamily="34" charset="-122"/>
                 <a:cs typeface="Calibri" pitchFamily="34" charset="-120"/>
               </a:rPr>
-              <a:t>!</a:t>
+              <a:t> system seemed fair.</a:t>
             </a:r>
             <a:endParaRPr lang="en-US" sz="1800" dirty="0"/>
           </a:p>
@@ -17891,7 +18008,7 @@
                 <a:ea typeface="Trebuchet MS" pitchFamily="34" charset="-122"/>
                 <a:cs typeface="Trebuchet MS" pitchFamily="34" charset="-120"/>
               </a:rPr>
-              <a:t>pricing</a:t>
+              <a:t>underpriced</a:t>
             </a:r>
             <a:endParaRPr lang="en-US" sz="1400" dirty="0"/>
           </a:p>
@@ -18019,7 +18136,7 @@
                 <a:ea typeface="Trebuchet MS" pitchFamily="34" charset="-122"/>
                 <a:cs typeface="Trebuchet MS" pitchFamily="34" charset="-120"/>
               </a:rPr>
-              <a:t>overpriced</a:t>
+              <a:t>repricing</a:t>
             </a:r>
             <a:endParaRPr lang="en-US" sz="1400" dirty="0"/>
           </a:p>
@@ -18147,7 +18264,7 @@
                 <a:ea typeface="Trebuchet MS" pitchFamily="34" charset="-122"/>
                 <a:cs typeface="Trebuchet MS" pitchFamily="34" charset="-120"/>
               </a:rPr>
-              <a:t>underpriced</a:t>
+              <a:t>pricing</a:t>
             </a:r>
             <a:endParaRPr lang="en-US" sz="1400" dirty="0"/>
           </a:p>
@@ -18617,7 +18734,7 @@
                 <a:ea typeface="Trebuchet MS" pitchFamily="34" charset="-122"/>
                 <a:cs typeface="Trebuchet MS" pitchFamily="34" charset="-120"/>
               </a:rPr>
-              <a:t>pricing</a:t>
+              <a:t>underpriced</a:t>
             </a:r>
             <a:endParaRPr lang="en-US" sz="2800" dirty="0"/>
           </a:p>
@@ -19444,7 +19561,7 @@
                 <a:ea typeface="Trebuchet MS" pitchFamily="34" charset="-122"/>
                 <a:cs typeface="Trebuchet MS" pitchFamily="34" charset="-120"/>
               </a:rPr>
-              <a:t>pricing</a:t>
+              <a:t>underpriced</a:t>
             </a:r>
             <a:endParaRPr lang="en-US" sz="2800" dirty="0"/>
           </a:p>
@@ -19524,7 +19641,7 @@
         </p:nvSpPr>
         <p:spPr>
           <a:xfrm>
-            <a:off x="2938272" y="2258568"/>
+            <a:off x="2221992" y="2258568"/>
             <a:ext cx="1828800" cy="292608"/>
           </a:xfrm>
           <a:prstGeom prst="rect">
@@ -19533,11 +19650,11 @@
             </a:avLst>
           </a:prstGeom>
           <a:solidFill>
-            <a:srgbClr val="CCFBF1"/>
+            <a:srgbClr val="DDD6FE"/>
           </a:solidFill>
           <a:ln w="19050">
             <a:solidFill>
-              <a:srgbClr val="0D9488"/>
+              <a:srgbClr val="7C3AED"/>
             </a:solidFill>
             <a:prstDash val="solid"/>
           </a:ln>
@@ -19558,7 +19675,7 @@
         </p:nvSpPr>
         <p:spPr>
           <a:xfrm>
-            <a:off x="2938272" y="2258568"/>
+            <a:off x="2221992" y="2258568"/>
             <a:ext cx="1828800" cy="292608"/>
           </a:xfrm>
           <a:prstGeom prst="rect">
@@ -19577,13 +19694,13 @@
             <a:r>
               <a:rPr lang="en-US" sz="1300" b="1" dirty="0">
                 <a:solidFill>
-                  <a:srgbClr val="0F766E"/>
+                  <a:srgbClr val="4C1D95"/>
                 </a:solidFill>
                 <a:latin typeface="Trebuchet MS" pitchFamily="34" charset="0"/>
                 <a:ea typeface="Trebuchet MS" pitchFamily="34" charset="-122"/>
                 <a:cs typeface="Trebuchet MS" pitchFamily="34" charset="-120"/>
               </a:rPr>
-              <a:t>price</a:t>
+              <a:t>under</a:t>
             </a:r>
             <a:endParaRPr lang="en-US" sz="1300" dirty="0"/>
           </a:p>
@@ -19597,7 +19714,7 @@
         </p:nvSpPr>
         <p:spPr>
           <a:xfrm>
-            <a:off x="2938272" y="2569464"/>
+            <a:off x="2221992" y="2569464"/>
             <a:ext cx="1828800" cy="201168"/>
           </a:xfrm>
           <a:prstGeom prst="rect">
@@ -19622,7 +19739,7 @@
                 <a:ea typeface="Calibri" pitchFamily="34" charset="-122"/>
                 <a:cs typeface="Calibri" pitchFamily="34" charset="-120"/>
               </a:rPr>
-              <a:t>value or cost</a:t>
+              <a:t>below / not enough</a:t>
             </a:r>
             <a:endParaRPr lang="en-US" sz="850" dirty="0"/>
           </a:p>
@@ -19630,52 +19747,13 @@
       </p:sp>
       <p:sp>
         <p:nvSpPr>
-          <p:cNvPr id="19" name="Text 17"/>
-          <p:cNvSpPr/>
-          <p:nvPr/>
-        </p:nvSpPr>
-        <p:spPr>
-          <a:xfrm>
-            <a:off x="2938272" y="2752344"/>
-            <a:ext cx="1828800" cy="182880"/>
-          </a:xfrm>
-          <a:prstGeom prst="rect">
-            <a:avLst/>
-          </a:prstGeom>
-          <a:noFill/>
-          <a:ln/>
-        </p:spPr>
-        <p:txBody>
-          <a:bodyPr wrap="square" lIns="0" tIns="0" rIns="0" bIns="0" rtlCol="0" anchor="t"/>
-          <a:lstStyle/>
-          <a:p>
-            <a:pPr algn="ctr" indent="0" marL="0">
-              <a:buNone/>
-            </a:pPr>
-            <a:r>
-              <a:rPr lang="en-US" sz="700" i="1" dirty="0">
-                <a:solidFill>
-                  <a:srgbClr val="94A3B8"/>
-                </a:solidFill>
-                <a:latin typeface="Calibri" pitchFamily="34" charset="0"/>
-                <a:ea typeface="Calibri" pitchFamily="34" charset="-122"/>
-                <a:cs typeface="Calibri" pitchFamily="34" charset="-120"/>
-              </a:rPr>
-              <a:t>'e' dropped before vowel suffix</a:t>
-            </a:r>
-            <a:endParaRPr lang="en-US" sz="700" dirty="0"/>
-          </a:p>
-        </p:txBody>
-      </p:sp>
-      <p:sp>
-        <p:nvSpPr>
-          <p:cNvPr id="20" name="Shape 18"/>
-          <p:cNvSpPr/>
-          <p:nvPr/>
-        </p:nvSpPr>
-        <p:spPr>
-          <a:xfrm>
-            <a:off x="5803392" y="2258568"/>
+          <p:cNvPr id="19" name="Shape 17"/>
+          <p:cNvSpPr/>
+          <p:nvPr/>
+        </p:nvSpPr>
+        <p:spPr>
+          <a:xfrm>
+            <a:off x="4370832" y="2258568"/>
             <a:ext cx="1828800" cy="292608"/>
           </a:xfrm>
           <a:prstGeom prst="rect">
@@ -19684,11 +19762,11 @@
             </a:avLst>
           </a:prstGeom>
           <a:solidFill>
-            <a:srgbClr val="FCE7F3"/>
+            <a:srgbClr val="CCFBF1"/>
           </a:solidFill>
           <a:ln w="19050">
             <a:solidFill>
-              <a:srgbClr val="DB2777"/>
+              <a:srgbClr val="0D9488"/>
             </a:solidFill>
             <a:prstDash val="solid"/>
           </a:ln>
@@ -19703,13 +19781,13 @@
       </p:sp>
       <p:sp>
         <p:nvSpPr>
-          <p:cNvPr id="21" name="Text 19"/>
-          <p:cNvSpPr/>
-          <p:nvPr/>
-        </p:nvSpPr>
-        <p:spPr>
-          <a:xfrm>
-            <a:off x="5803392" y="2258568"/>
+          <p:cNvPr id="20" name="Text 18"/>
+          <p:cNvSpPr/>
+          <p:nvPr/>
+        </p:nvSpPr>
+        <p:spPr>
+          <a:xfrm>
+            <a:off x="4370832" y="2258568"/>
             <a:ext cx="1828800" cy="292608"/>
           </a:xfrm>
           <a:prstGeom prst="rect">
@@ -19728,13 +19806,13 @@
             <a:r>
               <a:rPr lang="en-US" sz="1300" b="1" dirty="0">
                 <a:solidFill>
-                  <a:srgbClr val="9D174D"/>
+                  <a:srgbClr val="0F766E"/>
                 </a:solidFill>
                 <a:latin typeface="Trebuchet MS" pitchFamily="34" charset="0"/>
                 <a:ea typeface="Trebuchet MS" pitchFamily="34" charset="-122"/>
                 <a:cs typeface="Trebuchet MS" pitchFamily="34" charset="-120"/>
               </a:rPr>
-              <a:t>ing</a:t>
+              <a:t>price</a:t>
             </a:r>
             <a:endParaRPr lang="en-US" sz="1300" dirty="0"/>
           </a:p>
@@ -19742,13 +19820,13 @@
       </p:sp>
       <p:sp>
         <p:nvSpPr>
-          <p:cNvPr id="22" name="Text 20"/>
-          <p:cNvSpPr/>
-          <p:nvPr/>
-        </p:nvSpPr>
-        <p:spPr>
-          <a:xfrm>
-            <a:off x="5803392" y="2569464"/>
+          <p:cNvPr id="21" name="Text 19"/>
+          <p:cNvSpPr/>
+          <p:nvPr/>
+        </p:nvSpPr>
+        <p:spPr>
+          <a:xfrm>
+            <a:off x="4370832" y="2569464"/>
             <a:ext cx="1828800" cy="201168"/>
           </a:xfrm>
           <a:prstGeom prst="rect">
@@ -19773,7 +19851,7 @@
                 <a:ea typeface="Calibri" pitchFamily="34" charset="-122"/>
                 <a:cs typeface="Calibri" pitchFamily="34" charset="-120"/>
               </a:rPr>
-              <a:t>ongoing action</a:t>
+              <a:t>value or cost</a:t>
             </a:r>
             <a:endParaRPr lang="en-US" sz="850" dirty="0"/>
           </a:p>
@@ -19781,7 +19859,158 @@
       </p:sp>
       <p:sp>
         <p:nvSpPr>
-          <p:cNvPr id="23" name="Shape 21"/>
+          <p:cNvPr id="22" name="Shape 20"/>
+          <p:cNvSpPr/>
+          <p:nvPr/>
+        </p:nvSpPr>
+        <p:spPr>
+          <a:xfrm>
+            <a:off x="6519672" y="2258568"/>
+            <a:ext cx="1828800" cy="292608"/>
+          </a:xfrm>
+          <a:prstGeom prst="rect">
+            <a:avLst>
+              <a:gd name="adj" fmla="val 25000"/>
+            </a:avLst>
+          </a:prstGeom>
+          <a:solidFill>
+            <a:srgbClr val="FCE7F3"/>
+          </a:solidFill>
+          <a:ln w="19050">
+            <a:solidFill>
+              <a:srgbClr val="DB2777"/>
+            </a:solidFill>
+            <a:prstDash val="solid"/>
+          </a:ln>
+          <a:effectLst>
+            <a:outerShdw sx="100000" sy="100000" kx="0" ky="0" algn="bl" rotWithShape="0" blurRad="101600" dist="38100" dir="8100000">
+              <a:srgbClr val="000000">
+                <a:alpha val="12000"/>
+              </a:srgbClr>
+            </a:outerShdw>
+          </a:effectLst>
+        </p:spPr>
+      </p:sp>
+      <p:sp>
+        <p:nvSpPr>
+          <p:cNvPr id="23" name="Text 21"/>
+          <p:cNvSpPr/>
+          <p:nvPr/>
+        </p:nvSpPr>
+        <p:spPr>
+          <a:xfrm>
+            <a:off x="6519672" y="2258568"/>
+            <a:ext cx="1828800" cy="292608"/>
+          </a:xfrm>
+          <a:prstGeom prst="rect">
+            <a:avLst/>
+          </a:prstGeom>
+          <a:noFill/>
+          <a:ln/>
+        </p:spPr>
+        <p:txBody>
+          <a:bodyPr wrap="square" lIns="0" tIns="0" rIns="0" bIns="0" rtlCol="0" anchor="ctr"/>
+          <a:lstStyle/>
+          <a:p>
+            <a:pPr algn="ctr" indent="0" marL="0">
+              <a:buNone/>
+            </a:pPr>
+            <a:r>
+              <a:rPr lang="en-US" sz="1300" b="1" dirty="0">
+                <a:solidFill>
+                  <a:srgbClr val="9D174D"/>
+                </a:solidFill>
+                <a:latin typeface="Trebuchet MS" pitchFamily="34" charset="0"/>
+                <a:ea typeface="Trebuchet MS" pitchFamily="34" charset="-122"/>
+                <a:cs typeface="Trebuchet MS" pitchFamily="34" charset="-120"/>
+              </a:rPr>
+              <a:t>ed</a:t>
+            </a:r>
+            <a:endParaRPr lang="en-US" sz="1300" dirty="0"/>
+          </a:p>
+        </p:txBody>
+      </p:sp>
+      <p:sp>
+        <p:nvSpPr>
+          <p:cNvPr id="24" name="Text 22"/>
+          <p:cNvSpPr/>
+          <p:nvPr/>
+        </p:nvSpPr>
+        <p:spPr>
+          <a:xfrm>
+            <a:off x="6519672" y="2569464"/>
+            <a:ext cx="1828800" cy="201168"/>
+          </a:xfrm>
+          <a:prstGeom prst="rect">
+            <a:avLst/>
+          </a:prstGeom>
+          <a:noFill/>
+          <a:ln/>
+        </p:spPr>
+        <p:txBody>
+          <a:bodyPr wrap="square" lIns="0" tIns="0" rIns="0" bIns="0" rtlCol="0" anchor="t"/>
+          <a:lstStyle/>
+          <a:p>
+            <a:pPr algn="ctr" indent="0" marL="0">
+              <a:buNone/>
+            </a:pPr>
+            <a:r>
+              <a:rPr lang="en-US" sz="850" dirty="0">
+                <a:solidFill>
+                  <a:srgbClr val="475569"/>
+                </a:solidFill>
+                <a:latin typeface="Calibri" pitchFamily="34" charset="0"/>
+                <a:ea typeface="Calibri" pitchFamily="34" charset="-122"/>
+                <a:cs typeface="Calibri" pitchFamily="34" charset="-120"/>
+              </a:rPr>
+              <a:t>past tense / has been done</a:t>
+            </a:r>
+            <a:endParaRPr lang="en-US" sz="850" dirty="0"/>
+          </a:p>
+        </p:txBody>
+      </p:sp>
+      <p:sp>
+        <p:nvSpPr>
+          <p:cNvPr id="25" name="Text 23"/>
+          <p:cNvSpPr/>
+          <p:nvPr/>
+        </p:nvSpPr>
+        <p:spPr>
+          <a:xfrm>
+            <a:off x="6519672" y="2752344"/>
+            <a:ext cx="1828800" cy="182880"/>
+          </a:xfrm>
+          <a:prstGeom prst="rect">
+            <a:avLst/>
+          </a:prstGeom>
+          <a:noFill/>
+          <a:ln/>
+        </p:spPr>
+        <p:txBody>
+          <a:bodyPr wrap="square" lIns="0" tIns="0" rIns="0" bIns="0" rtlCol="0" anchor="t"/>
+          <a:lstStyle/>
+          <a:p>
+            <a:pPr algn="ctr" indent="0" marL="0">
+              <a:buNone/>
+            </a:pPr>
+            <a:r>
+              <a:rPr lang="en-US" sz="700" i="1" dirty="0">
+                <a:solidFill>
+                  <a:srgbClr val="94A3B8"/>
+                </a:solidFill>
+                <a:latin typeface="Calibri" pitchFamily="34" charset="0"/>
+                <a:ea typeface="Calibri" pitchFamily="34" charset="-122"/>
+                <a:cs typeface="Calibri" pitchFamily="34" charset="-120"/>
+              </a:rPr>
+              <a:t>'e' dropped before vowel suffix</a:t>
+            </a:r>
+            <a:endParaRPr lang="en-US" sz="700" dirty="0"/>
+          </a:p>
+        </p:txBody>
+      </p:sp>
+      <p:sp>
+        <p:nvSpPr>
+          <p:cNvPr id="26" name="Shape 24"/>
           <p:cNvSpPr/>
           <p:nvPr/>
         </p:nvSpPr>
@@ -19808,7 +20037,7 @@
       </p:sp>
       <p:sp>
         <p:nvSpPr>
-          <p:cNvPr id="24" name="Text 22"/>
+          <p:cNvPr id="27" name="Text 25"/>
           <p:cNvSpPr/>
           <p:nvPr/>
         </p:nvSpPr>
@@ -19847,7 +20076,7 @@
       </p:sp>
       <p:sp>
         <p:nvSpPr>
-          <p:cNvPr id="25" name="Shape 23"/>
+          <p:cNvPr id="28" name="Shape 26"/>
           <p:cNvSpPr/>
           <p:nvPr/>
         </p:nvSpPr>
@@ -19874,7 +20103,7 @@
       </p:sp>
       <p:sp>
         <p:nvSpPr>
-          <p:cNvPr id="26" name="Text 24"/>
+          <p:cNvPr id="29" name="Text 27"/>
           <p:cNvSpPr/>
           <p:nvPr/>
         </p:nvSpPr>
@@ -19913,7 +20142,7 @@
       </p:sp>
       <p:sp>
         <p:nvSpPr>
-          <p:cNvPr id="27" name="Shape 25"/>
+          <p:cNvPr id="30" name="Shape 28"/>
           <p:cNvSpPr/>
           <p:nvPr/>
         </p:nvSpPr>
@@ -19940,7 +20169,7 @@
       </p:sp>
       <p:sp>
         <p:nvSpPr>
-          <p:cNvPr id="28" name="Text 26"/>
+          <p:cNvPr id="31" name="Text 29"/>
           <p:cNvSpPr/>
           <p:nvPr/>
         </p:nvSpPr>
@@ -19979,7 +20208,7 @@
       </p:sp>
       <p:sp>
         <p:nvSpPr>
-          <p:cNvPr id="29" name="Shape 27"/>
+          <p:cNvPr id="32" name="Shape 30"/>
           <p:cNvSpPr/>
           <p:nvPr/>
         </p:nvSpPr>
@@ -20006,7 +20235,7 @@
       </p:sp>
       <p:sp>
         <p:nvSpPr>
-          <p:cNvPr id="30" name="Text 28"/>
+          <p:cNvPr id="33" name="Text 31"/>
           <p:cNvSpPr/>
           <p:nvPr/>
         </p:nvSpPr>
@@ -20468,7 +20697,7 @@
                 <a:ea typeface="Trebuchet MS" pitchFamily="34" charset="-122"/>
                 <a:cs typeface="Trebuchet MS" pitchFamily="34" charset="-120"/>
               </a:rPr>
-              <a:t>pricing</a:t>
+              <a:t>underpriced</a:t>
             </a:r>
             <a:endParaRPr lang="en-US" sz="2800" dirty="0"/>
           </a:p>
@@ -20548,7 +20777,7 @@
         </p:nvSpPr>
         <p:spPr>
           <a:xfrm>
-            <a:off x="2938272" y="2258568"/>
+            <a:off x="2221992" y="2258568"/>
             <a:ext cx="1828800" cy="292608"/>
           </a:xfrm>
           <a:prstGeom prst="rect">
@@ -20557,11 +20786,11 @@
             </a:avLst>
           </a:prstGeom>
           <a:solidFill>
-            <a:srgbClr val="CCFBF1"/>
+            <a:srgbClr val="DDD6FE"/>
           </a:solidFill>
           <a:ln w="19050">
             <a:solidFill>
-              <a:srgbClr val="0D9488"/>
+              <a:srgbClr val="7C3AED"/>
             </a:solidFill>
             <a:prstDash val="solid"/>
           </a:ln>
@@ -20582,7 +20811,7 @@
         </p:nvSpPr>
         <p:spPr>
           <a:xfrm>
-            <a:off x="2938272" y="2258568"/>
+            <a:off x="2221992" y="2258568"/>
             <a:ext cx="1828800" cy="292608"/>
           </a:xfrm>
           <a:prstGeom prst="rect">
@@ -20601,13 +20830,13 @@
             <a:r>
               <a:rPr lang="en-US" sz="1300" b="1" dirty="0">
                 <a:solidFill>
-                  <a:srgbClr val="0F766E"/>
+                  <a:srgbClr val="4C1D95"/>
                 </a:solidFill>
                 <a:latin typeface="Trebuchet MS" pitchFamily="34" charset="0"/>
                 <a:ea typeface="Trebuchet MS" pitchFamily="34" charset="-122"/>
                 <a:cs typeface="Trebuchet MS" pitchFamily="34" charset="-120"/>
               </a:rPr>
-              <a:t>price</a:t>
+              <a:t>under</a:t>
             </a:r>
             <a:endParaRPr lang="en-US" sz="1300" dirty="0"/>
           </a:p>
@@ -20621,7 +20850,7 @@
         </p:nvSpPr>
         <p:spPr>
           <a:xfrm>
-            <a:off x="2938272" y="2569464"/>
+            <a:off x="2221992" y="2569464"/>
             <a:ext cx="1828800" cy="201168"/>
           </a:xfrm>
           <a:prstGeom prst="rect">
@@ -20646,7 +20875,7 @@
                 <a:ea typeface="Calibri" pitchFamily="34" charset="-122"/>
                 <a:cs typeface="Calibri" pitchFamily="34" charset="-120"/>
               </a:rPr>
-              <a:t>value or cost</a:t>
+              <a:t>below / not enough</a:t>
             </a:r>
             <a:endParaRPr lang="en-US" sz="850" dirty="0"/>
           </a:p>
@@ -20654,52 +20883,13 @@
       </p:sp>
       <p:sp>
         <p:nvSpPr>
-          <p:cNvPr id="19" name="Text 17"/>
-          <p:cNvSpPr/>
-          <p:nvPr/>
-        </p:nvSpPr>
-        <p:spPr>
-          <a:xfrm>
-            <a:off x="2938272" y="2752344"/>
-            <a:ext cx="1828800" cy="182880"/>
-          </a:xfrm>
-          <a:prstGeom prst="rect">
-            <a:avLst/>
-          </a:prstGeom>
-          <a:noFill/>
-          <a:ln/>
-        </p:spPr>
-        <p:txBody>
-          <a:bodyPr wrap="square" lIns="0" tIns="0" rIns="0" bIns="0" rtlCol="0" anchor="t"/>
-          <a:lstStyle/>
-          <a:p>
-            <a:pPr algn="ctr" indent="0" marL="0">
-              <a:buNone/>
-            </a:pPr>
-            <a:r>
-              <a:rPr lang="en-US" sz="700" i="1" dirty="0">
-                <a:solidFill>
-                  <a:srgbClr val="94A3B8"/>
-                </a:solidFill>
-                <a:latin typeface="Calibri" pitchFamily="34" charset="0"/>
-                <a:ea typeface="Calibri" pitchFamily="34" charset="-122"/>
-                <a:cs typeface="Calibri" pitchFamily="34" charset="-120"/>
-              </a:rPr>
-              <a:t>'e' dropped before vowel suffix</a:t>
-            </a:r>
-            <a:endParaRPr lang="en-US" sz="700" dirty="0"/>
-          </a:p>
-        </p:txBody>
-      </p:sp>
-      <p:sp>
-        <p:nvSpPr>
-          <p:cNvPr id="20" name="Shape 18"/>
-          <p:cNvSpPr/>
-          <p:nvPr/>
-        </p:nvSpPr>
-        <p:spPr>
-          <a:xfrm>
-            <a:off x="5803392" y="2258568"/>
+          <p:cNvPr id="19" name="Shape 17"/>
+          <p:cNvSpPr/>
+          <p:nvPr/>
+        </p:nvSpPr>
+        <p:spPr>
+          <a:xfrm>
+            <a:off x="4370832" y="2258568"/>
             <a:ext cx="1828800" cy="292608"/>
           </a:xfrm>
           <a:prstGeom prst="rect">
@@ -20708,11 +20898,11 @@
             </a:avLst>
           </a:prstGeom>
           <a:solidFill>
-            <a:srgbClr val="FCE7F3"/>
+            <a:srgbClr val="CCFBF1"/>
           </a:solidFill>
           <a:ln w="19050">
             <a:solidFill>
-              <a:srgbClr val="DB2777"/>
+              <a:srgbClr val="0D9488"/>
             </a:solidFill>
             <a:prstDash val="solid"/>
           </a:ln>
@@ -20727,13 +20917,13 @@
       </p:sp>
       <p:sp>
         <p:nvSpPr>
-          <p:cNvPr id="21" name="Text 19"/>
-          <p:cNvSpPr/>
-          <p:nvPr/>
-        </p:nvSpPr>
-        <p:spPr>
-          <a:xfrm>
-            <a:off x="5803392" y="2258568"/>
+          <p:cNvPr id="20" name="Text 18"/>
+          <p:cNvSpPr/>
+          <p:nvPr/>
+        </p:nvSpPr>
+        <p:spPr>
+          <a:xfrm>
+            <a:off x="4370832" y="2258568"/>
             <a:ext cx="1828800" cy="292608"/>
           </a:xfrm>
           <a:prstGeom prst="rect">
@@ -20752,13 +20942,13 @@
             <a:r>
               <a:rPr lang="en-US" sz="1300" b="1" dirty="0">
                 <a:solidFill>
-                  <a:srgbClr val="9D174D"/>
+                  <a:srgbClr val="0F766E"/>
                 </a:solidFill>
                 <a:latin typeface="Trebuchet MS" pitchFamily="34" charset="0"/>
                 <a:ea typeface="Trebuchet MS" pitchFamily="34" charset="-122"/>
                 <a:cs typeface="Trebuchet MS" pitchFamily="34" charset="-120"/>
               </a:rPr>
-              <a:t>ing</a:t>
+              <a:t>price</a:t>
             </a:r>
             <a:endParaRPr lang="en-US" sz="1300" dirty="0"/>
           </a:p>
@@ -20766,13 +20956,13 @@
       </p:sp>
       <p:sp>
         <p:nvSpPr>
-          <p:cNvPr id="22" name="Text 20"/>
-          <p:cNvSpPr/>
-          <p:nvPr/>
-        </p:nvSpPr>
-        <p:spPr>
-          <a:xfrm>
-            <a:off x="5803392" y="2569464"/>
+          <p:cNvPr id="21" name="Text 19"/>
+          <p:cNvSpPr/>
+          <p:nvPr/>
+        </p:nvSpPr>
+        <p:spPr>
+          <a:xfrm>
+            <a:off x="4370832" y="2569464"/>
             <a:ext cx="1828800" cy="201168"/>
           </a:xfrm>
           <a:prstGeom prst="rect">
@@ -20797,7 +20987,7 @@
                 <a:ea typeface="Calibri" pitchFamily="34" charset="-122"/>
                 <a:cs typeface="Calibri" pitchFamily="34" charset="-120"/>
               </a:rPr>
-              <a:t>ongoing action</a:t>
+              <a:t>value or cost</a:t>
             </a:r>
             <a:endParaRPr lang="en-US" sz="850" dirty="0"/>
           </a:p>
@@ -20805,7 +20995,158 @@
       </p:sp>
       <p:sp>
         <p:nvSpPr>
-          <p:cNvPr id="23" name="Shape 21"/>
+          <p:cNvPr id="22" name="Shape 20"/>
+          <p:cNvSpPr/>
+          <p:nvPr/>
+        </p:nvSpPr>
+        <p:spPr>
+          <a:xfrm>
+            <a:off x="6519672" y="2258568"/>
+            <a:ext cx="1828800" cy="292608"/>
+          </a:xfrm>
+          <a:prstGeom prst="rect">
+            <a:avLst>
+              <a:gd name="adj" fmla="val 25000"/>
+            </a:avLst>
+          </a:prstGeom>
+          <a:solidFill>
+            <a:srgbClr val="FCE7F3"/>
+          </a:solidFill>
+          <a:ln w="19050">
+            <a:solidFill>
+              <a:srgbClr val="DB2777"/>
+            </a:solidFill>
+            <a:prstDash val="solid"/>
+          </a:ln>
+          <a:effectLst>
+            <a:outerShdw sx="100000" sy="100000" kx="0" ky="0" algn="bl" rotWithShape="0" blurRad="101600" dist="38100" dir="8100000">
+              <a:srgbClr val="000000">
+                <a:alpha val="12000"/>
+              </a:srgbClr>
+            </a:outerShdw>
+          </a:effectLst>
+        </p:spPr>
+      </p:sp>
+      <p:sp>
+        <p:nvSpPr>
+          <p:cNvPr id="23" name="Text 21"/>
+          <p:cNvSpPr/>
+          <p:nvPr/>
+        </p:nvSpPr>
+        <p:spPr>
+          <a:xfrm>
+            <a:off x="6519672" y="2258568"/>
+            <a:ext cx="1828800" cy="292608"/>
+          </a:xfrm>
+          <a:prstGeom prst="rect">
+            <a:avLst/>
+          </a:prstGeom>
+          <a:noFill/>
+          <a:ln/>
+        </p:spPr>
+        <p:txBody>
+          <a:bodyPr wrap="square" lIns="0" tIns="0" rIns="0" bIns="0" rtlCol="0" anchor="ctr"/>
+          <a:lstStyle/>
+          <a:p>
+            <a:pPr algn="ctr" indent="0" marL="0">
+              <a:buNone/>
+            </a:pPr>
+            <a:r>
+              <a:rPr lang="en-US" sz="1300" b="1" dirty="0">
+                <a:solidFill>
+                  <a:srgbClr val="9D174D"/>
+                </a:solidFill>
+                <a:latin typeface="Trebuchet MS" pitchFamily="34" charset="0"/>
+                <a:ea typeface="Trebuchet MS" pitchFamily="34" charset="-122"/>
+                <a:cs typeface="Trebuchet MS" pitchFamily="34" charset="-120"/>
+              </a:rPr>
+              <a:t>ed</a:t>
+            </a:r>
+            <a:endParaRPr lang="en-US" sz="1300" dirty="0"/>
+          </a:p>
+        </p:txBody>
+      </p:sp>
+      <p:sp>
+        <p:nvSpPr>
+          <p:cNvPr id="24" name="Text 22"/>
+          <p:cNvSpPr/>
+          <p:nvPr/>
+        </p:nvSpPr>
+        <p:spPr>
+          <a:xfrm>
+            <a:off x="6519672" y="2569464"/>
+            <a:ext cx="1828800" cy="201168"/>
+          </a:xfrm>
+          <a:prstGeom prst="rect">
+            <a:avLst/>
+          </a:prstGeom>
+          <a:noFill/>
+          <a:ln/>
+        </p:spPr>
+        <p:txBody>
+          <a:bodyPr wrap="square" lIns="0" tIns="0" rIns="0" bIns="0" rtlCol="0" anchor="t"/>
+          <a:lstStyle/>
+          <a:p>
+            <a:pPr algn="ctr" indent="0" marL="0">
+              <a:buNone/>
+            </a:pPr>
+            <a:r>
+              <a:rPr lang="en-US" sz="850" dirty="0">
+                <a:solidFill>
+                  <a:srgbClr val="475569"/>
+                </a:solidFill>
+                <a:latin typeface="Calibri" pitchFamily="34" charset="0"/>
+                <a:ea typeface="Calibri" pitchFamily="34" charset="-122"/>
+                <a:cs typeface="Calibri" pitchFamily="34" charset="-120"/>
+              </a:rPr>
+              <a:t>past tense / has been done</a:t>
+            </a:r>
+            <a:endParaRPr lang="en-US" sz="850" dirty="0"/>
+          </a:p>
+        </p:txBody>
+      </p:sp>
+      <p:sp>
+        <p:nvSpPr>
+          <p:cNvPr id="25" name="Text 23"/>
+          <p:cNvSpPr/>
+          <p:nvPr/>
+        </p:nvSpPr>
+        <p:spPr>
+          <a:xfrm>
+            <a:off x="6519672" y="2752344"/>
+            <a:ext cx="1828800" cy="182880"/>
+          </a:xfrm>
+          <a:prstGeom prst="rect">
+            <a:avLst/>
+          </a:prstGeom>
+          <a:noFill/>
+          <a:ln/>
+        </p:spPr>
+        <p:txBody>
+          <a:bodyPr wrap="square" lIns="0" tIns="0" rIns="0" bIns="0" rtlCol="0" anchor="t"/>
+          <a:lstStyle/>
+          <a:p>
+            <a:pPr algn="ctr" indent="0" marL="0">
+              <a:buNone/>
+            </a:pPr>
+            <a:r>
+              <a:rPr lang="en-US" sz="700" i="1" dirty="0">
+                <a:solidFill>
+                  <a:srgbClr val="94A3B8"/>
+                </a:solidFill>
+                <a:latin typeface="Calibri" pitchFamily="34" charset="0"/>
+                <a:ea typeface="Calibri" pitchFamily="34" charset="-122"/>
+                <a:cs typeface="Calibri" pitchFamily="34" charset="-120"/>
+              </a:rPr>
+              <a:t>'e' dropped before vowel suffix</a:t>
+            </a:r>
+            <a:endParaRPr lang="en-US" sz="700" dirty="0"/>
+          </a:p>
+        </p:txBody>
+      </p:sp>
+      <p:sp>
+        <p:nvSpPr>
+          <p:cNvPr id="26" name="Shape 24"/>
           <p:cNvSpPr/>
           <p:nvPr/>
         </p:nvSpPr>
@@ -20832,7 +21173,7 @@
       </p:sp>
       <p:sp>
         <p:nvSpPr>
-          <p:cNvPr id="24" name="Text 22"/>
+          <p:cNvPr id="27" name="Text 25"/>
           <p:cNvSpPr/>
           <p:nvPr/>
         </p:nvSpPr>
@@ -20871,7 +21212,7 @@
       </p:sp>
       <p:sp>
         <p:nvSpPr>
-          <p:cNvPr id="25" name="Shape 23"/>
+          <p:cNvPr id="28" name="Shape 26"/>
           <p:cNvSpPr/>
           <p:nvPr/>
         </p:nvSpPr>
@@ -20898,13 +21239,13 @@
       </p:sp>
       <p:sp>
         <p:nvSpPr>
-          <p:cNvPr id="26" name="Shape 24"/>
-          <p:cNvSpPr/>
-          <p:nvPr/>
-        </p:nvSpPr>
-        <p:spPr>
-          <a:xfrm>
-            <a:off x="2999232" y="3364992"/>
+          <p:cNvPr id="29" name="Shape 27"/>
+          <p:cNvSpPr/>
+          <p:nvPr/>
+        </p:nvSpPr>
+        <p:spPr>
+          <a:xfrm>
+            <a:off x="2313432" y="3364992"/>
             <a:ext cx="1645920" cy="475488"/>
           </a:xfrm>
           <a:prstGeom prst="rect">
@@ -20925,13 +21266,13 @@
       </p:sp>
       <p:sp>
         <p:nvSpPr>
-          <p:cNvPr id="27" name="Text 25"/>
-          <p:cNvSpPr/>
-          <p:nvPr/>
-        </p:nvSpPr>
-        <p:spPr>
-          <a:xfrm>
-            <a:off x="2999232" y="3364992"/>
+          <p:cNvPr id="30" name="Text 28"/>
+          <p:cNvSpPr/>
+          <p:nvPr/>
+        </p:nvSpPr>
+        <p:spPr>
+          <a:xfrm>
+            <a:off x="2313432" y="3364992"/>
             <a:ext cx="1645920" cy="475488"/>
           </a:xfrm>
           <a:prstGeom prst="rect">
@@ -20956,7 +21297,7 @@
                 <a:ea typeface="Trebuchet MS" pitchFamily="34" charset="-122"/>
                 <a:cs typeface="Trebuchet MS" pitchFamily="34" charset="-120"/>
               </a:rPr>
-              <a:t>pri</a:t>
+              <a:t>un</a:t>
             </a:r>
             <a:endParaRPr lang="en-US" sz="1400" dirty="0"/>
           </a:p>
@@ -20964,14 +21305,14 @@
       </p:sp>
       <p:sp>
         <p:nvSpPr>
-          <p:cNvPr id="28" name="Text 26"/>
-          <p:cNvSpPr/>
-          <p:nvPr/>
-        </p:nvSpPr>
-        <p:spPr>
-          <a:xfrm>
-            <a:off x="4645152" y="3364992"/>
-            <a:ext cx="1097280" cy="475488"/>
+          <p:cNvPr id="31" name="Text 29"/>
+          <p:cNvSpPr/>
+          <p:nvPr/>
+        </p:nvSpPr>
+        <p:spPr>
+          <a:xfrm>
+            <a:off x="3959352" y="3364992"/>
+            <a:ext cx="411480" cy="475488"/>
           </a:xfrm>
           <a:prstGeom prst="rect">
             <a:avLst/>
@@ -21003,13 +21344,13 @@
       </p:sp>
       <p:sp>
         <p:nvSpPr>
-          <p:cNvPr id="29" name="Shape 27"/>
-          <p:cNvSpPr/>
-          <p:nvPr/>
-        </p:nvSpPr>
-        <p:spPr>
-          <a:xfrm>
-            <a:off x="5742432" y="3364992"/>
+          <p:cNvPr id="32" name="Shape 30"/>
+          <p:cNvSpPr/>
+          <p:nvPr/>
+        </p:nvSpPr>
+        <p:spPr>
+          <a:xfrm>
+            <a:off x="4370832" y="3364992"/>
             <a:ext cx="1645920" cy="475488"/>
           </a:xfrm>
           <a:prstGeom prst="rect">
@@ -21030,13 +21371,13 @@
       </p:sp>
       <p:sp>
         <p:nvSpPr>
-          <p:cNvPr id="30" name="Text 28"/>
-          <p:cNvSpPr/>
-          <p:nvPr/>
-        </p:nvSpPr>
-        <p:spPr>
-          <a:xfrm>
-            <a:off x="5742432" y="3364992"/>
+          <p:cNvPr id="33" name="Text 31"/>
+          <p:cNvSpPr/>
+          <p:nvPr/>
+        </p:nvSpPr>
+        <p:spPr>
+          <a:xfrm>
+            <a:off x="4370832" y="3364992"/>
             <a:ext cx="1645920" cy="475488"/>
           </a:xfrm>
           <a:prstGeom prst="rect">
@@ -21061,7 +21402,7 @@
                 <a:ea typeface="Trebuchet MS" pitchFamily="34" charset="-122"/>
                 <a:cs typeface="Trebuchet MS" pitchFamily="34" charset="-120"/>
               </a:rPr>
-              <a:t>cing</a:t>
+              <a:t>der</a:t>
             </a:r>
             <a:endParaRPr lang="en-US" sz="1400" dirty="0"/>
           </a:p>
@@ -21069,7 +21410,112 @@
       </p:sp>
       <p:sp>
         <p:nvSpPr>
-          <p:cNvPr id="31" name="Shape 29"/>
+          <p:cNvPr id="34" name="Text 32"/>
+          <p:cNvSpPr/>
+          <p:nvPr/>
+        </p:nvSpPr>
+        <p:spPr>
+          <a:xfrm>
+            <a:off x="6016752" y="3364992"/>
+            <a:ext cx="411480" cy="475488"/>
+          </a:xfrm>
+          <a:prstGeom prst="rect">
+            <a:avLst/>
+          </a:prstGeom>
+          <a:noFill/>
+          <a:ln/>
+        </p:spPr>
+        <p:txBody>
+          <a:bodyPr wrap="square" lIns="0" tIns="0" rIns="0" bIns="0" rtlCol="0" anchor="ctr"/>
+          <a:lstStyle/>
+          <a:p>
+            <a:pPr algn="ctr" indent="0" marL="0">
+              <a:buNone/>
+            </a:pPr>
+            <a:r>
+              <a:rPr lang="en-US" sz="1600" b="1" dirty="0">
+                <a:solidFill>
+                  <a:srgbClr val="0D9488"/>
+                </a:solidFill>
+                <a:latin typeface="Trebuchet MS" pitchFamily="34" charset="0"/>
+                <a:ea typeface="Trebuchet MS" pitchFamily="34" charset="-122"/>
+                <a:cs typeface="Trebuchet MS" pitchFamily="34" charset="-120"/>
+              </a:rPr>
+              <a:t>·</a:t>
+            </a:r>
+            <a:endParaRPr lang="en-US" sz="1600" dirty="0"/>
+          </a:p>
+        </p:txBody>
+      </p:sp>
+      <p:sp>
+        <p:nvSpPr>
+          <p:cNvPr id="35" name="Shape 33"/>
+          <p:cNvSpPr/>
+          <p:nvPr/>
+        </p:nvSpPr>
+        <p:spPr>
+          <a:xfrm>
+            <a:off x="6428232" y="3364992"/>
+            <a:ext cx="1645920" cy="475488"/>
+          </a:xfrm>
+          <a:prstGeom prst="rect">
+            <a:avLst>
+              <a:gd name="adj" fmla="val 9615"/>
+            </a:avLst>
+          </a:prstGeom>
+          <a:solidFill>
+            <a:srgbClr val="FFFFFF"/>
+          </a:solidFill>
+          <a:ln w="12700">
+            <a:solidFill>
+              <a:srgbClr val="0D9488"/>
+            </a:solidFill>
+            <a:prstDash val="solid"/>
+          </a:ln>
+        </p:spPr>
+      </p:sp>
+      <p:sp>
+        <p:nvSpPr>
+          <p:cNvPr id="36" name="Text 34"/>
+          <p:cNvSpPr/>
+          <p:nvPr/>
+        </p:nvSpPr>
+        <p:spPr>
+          <a:xfrm>
+            <a:off x="6428232" y="3364992"/>
+            <a:ext cx="1645920" cy="475488"/>
+          </a:xfrm>
+          <a:prstGeom prst="rect">
+            <a:avLst/>
+          </a:prstGeom>
+          <a:noFill/>
+          <a:ln/>
+        </p:spPr>
+        <p:txBody>
+          <a:bodyPr wrap="square" lIns="0" tIns="0" rIns="0" bIns="0" rtlCol="0" anchor="ctr"/>
+          <a:lstStyle/>
+          <a:p>
+            <a:pPr algn="ctr" indent="0" marL="0">
+              <a:buNone/>
+            </a:pPr>
+            <a:r>
+              <a:rPr lang="en-US" sz="1400" b="1" dirty="0">
+                <a:solidFill>
+                  <a:srgbClr val="0D9488"/>
+                </a:solidFill>
+                <a:latin typeface="Trebuchet MS" pitchFamily="34" charset="0"/>
+                <a:ea typeface="Trebuchet MS" pitchFamily="34" charset="-122"/>
+                <a:cs typeface="Trebuchet MS" pitchFamily="34" charset="-120"/>
+              </a:rPr>
+              <a:t>priced</a:t>
+            </a:r>
+            <a:endParaRPr lang="en-US" sz="1400" dirty="0"/>
+          </a:p>
+        </p:txBody>
+      </p:sp>
+      <p:sp>
+        <p:nvSpPr>
+          <p:cNvPr id="37" name="Shape 35"/>
           <p:cNvSpPr/>
           <p:nvPr/>
         </p:nvSpPr>
@@ -21096,7 +21542,7 @@
       </p:sp>
       <p:sp>
         <p:nvSpPr>
-          <p:cNvPr id="32" name="Text 30"/>
+          <p:cNvPr id="38" name="Text 36"/>
           <p:cNvSpPr/>
           <p:nvPr/>
         </p:nvSpPr>
@@ -21135,7 +21581,7 @@
       </p:sp>
       <p:sp>
         <p:nvSpPr>
-          <p:cNvPr id="33" name="Shape 31"/>
+          <p:cNvPr id="39" name="Shape 37"/>
           <p:cNvSpPr/>
           <p:nvPr/>
         </p:nvSpPr>
@@ -21162,7 +21608,7 @@
       </p:sp>
       <p:sp>
         <p:nvSpPr>
-          <p:cNvPr id="34" name="Text 32"/>
+          <p:cNvPr id="40" name="Text 38"/>
           <p:cNvSpPr/>
           <p:nvPr/>
         </p:nvSpPr>
@@ -21624,7 +22070,7 @@
                 <a:ea typeface="Trebuchet MS" pitchFamily="34" charset="-122"/>
                 <a:cs typeface="Trebuchet MS" pitchFamily="34" charset="-120"/>
               </a:rPr>
-              <a:t>pricing</a:t>
+              <a:t>underpriced</a:t>
             </a:r>
             <a:endParaRPr lang="en-US" sz="2800" dirty="0"/>
           </a:p>
@@ -21704,7 +22150,7 @@
         </p:nvSpPr>
         <p:spPr>
           <a:xfrm>
-            <a:off x="2938272" y="2258568"/>
+            <a:off x="2221992" y="2258568"/>
             <a:ext cx="1828800" cy="292608"/>
           </a:xfrm>
           <a:prstGeom prst="rect">
@@ -21713,11 +22159,11 @@
             </a:avLst>
           </a:prstGeom>
           <a:solidFill>
-            <a:srgbClr val="CCFBF1"/>
+            <a:srgbClr val="DDD6FE"/>
           </a:solidFill>
           <a:ln w="19050">
             <a:solidFill>
-              <a:srgbClr val="0D9488"/>
+              <a:srgbClr val="7C3AED"/>
             </a:solidFill>
             <a:prstDash val="solid"/>
           </a:ln>
@@ -21738,7 +22184,7 @@
         </p:nvSpPr>
         <p:spPr>
           <a:xfrm>
-            <a:off x="2938272" y="2258568"/>
+            <a:off x="2221992" y="2258568"/>
             <a:ext cx="1828800" cy="292608"/>
           </a:xfrm>
           <a:prstGeom prst="rect">
@@ -21757,13 +22203,13 @@
             <a:r>
               <a:rPr lang="en-US" sz="1300" b="1" dirty="0">
                 <a:solidFill>
-                  <a:srgbClr val="0F766E"/>
+                  <a:srgbClr val="4C1D95"/>
                 </a:solidFill>
                 <a:latin typeface="Trebuchet MS" pitchFamily="34" charset="0"/>
                 <a:ea typeface="Trebuchet MS" pitchFamily="34" charset="-122"/>
                 <a:cs typeface="Trebuchet MS" pitchFamily="34" charset="-120"/>
               </a:rPr>
-              <a:t>price</a:t>
+              <a:t>under</a:t>
             </a:r>
             <a:endParaRPr lang="en-US" sz="1300" dirty="0"/>
           </a:p>
@@ -21777,7 +22223,7 @@
         </p:nvSpPr>
         <p:spPr>
           <a:xfrm>
-            <a:off x="2938272" y="2569464"/>
+            <a:off x="2221992" y="2569464"/>
             <a:ext cx="1828800" cy="201168"/>
           </a:xfrm>
           <a:prstGeom prst="rect">
@@ -21802,7 +22248,7 @@
                 <a:ea typeface="Calibri" pitchFamily="34" charset="-122"/>
                 <a:cs typeface="Calibri" pitchFamily="34" charset="-120"/>
               </a:rPr>
-              <a:t>value or cost</a:t>
+              <a:t>below / not enough</a:t>
             </a:r>
             <a:endParaRPr lang="en-US" sz="850" dirty="0"/>
           </a:p>
@@ -21810,52 +22256,13 @@
       </p:sp>
       <p:sp>
         <p:nvSpPr>
-          <p:cNvPr id="19" name="Text 17"/>
-          <p:cNvSpPr/>
-          <p:nvPr/>
-        </p:nvSpPr>
-        <p:spPr>
-          <a:xfrm>
-            <a:off x="2938272" y="2752344"/>
-            <a:ext cx="1828800" cy="182880"/>
-          </a:xfrm>
-          <a:prstGeom prst="rect">
-            <a:avLst/>
-          </a:prstGeom>
-          <a:noFill/>
-          <a:ln/>
-        </p:spPr>
-        <p:txBody>
-          <a:bodyPr wrap="square" lIns="0" tIns="0" rIns="0" bIns="0" rtlCol="0" anchor="t"/>
-          <a:lstStyle/>
-          <a:p>
-            <a:pPr algn="ctr" indent="0" marL="0">
-              <a:buNone/>
-            </a:pPr>
-            <a:r>
-              <a:rPr lang="en-US" sz="700" i="1" dirty="0">
-                <a:solidFill>
-                  <a:srgbClr val="94A3B8"/>
-                </a:solidFill>
-                <a:latin typeface="Calibri" pitchFamily="34" charset="0"/>
-                <a:ea typeface="Calibri" pitchFamily="34" charset="-122"/>
-                <a:cs typeface="Calibri" pitchFamily="34" charset="-120"/>
-              </a:rPr>
-              <a:t>'e' dropped before vowel suffix</a:t>
-            </a:r>
-            <a:endParaRPr lang="en-US" sz="700" dirty="0"/>
-          </a:p>
-        </p:txBody>
-      </p:sp>
-      <p:sp>
-        <p:nvSpPr>
-          <p:cNvPr id="20" name="Shape 18"/>
-          <p:cNvSpPr/>
-          <p:nvPr/>
-        </p:nvSpPr>
-        <p:spPr>
-          <a:xfrm>
-            <a:off x="5803392" y="2258568"/>
+          <p:cNvPr id="19" name="Shape 17"/>
+          <p:cNvSpPr/>
+          <p:nvPr/>
+        </p:nvSpPr>
+        <p:spPr>
+          <a:xfrm>
+            <a:off x="4370832" y="2258568"/>
             <a:ext cx="1828800" cy="292608"/>
           </a:xfrm>
           <a:prstGeom prst="rect">
@@ -21864,11 +22271,11 @@
             </a:avLst>
           </a:prstGeom>
           <a:solidFill>
-            <a:srgbClr val="FCE7F3"/>
+            <a:srgbClr val="CCFBF1"/>
           </a:solidFill>
           <a:ln w="19050">
             <a:solidFill>
-              <a:srgbClr val="DB2777"/>
+              <a:srgbClr val="0D9488"/>
             </a:solidFill>
             <a:prstDash val="solid"/>
           </a:ln>
@@ -21883,13 +22290,13 @@
       </p:sp>
       <p:sp>
         <p:nvSpPr>
-          <p:cNvPr id="21" name="Text 19"/>
-          <p:cNvSpPr/>
-          <p:nvPr/>
-        </p:nvSpPr>
-        <p:spPr>
-          <a:xfrm>
-            <a:off x="5803392" y="2258568"/>
+          <p:cNvPr id="20" name="Text 18"/>
+          <p:cNvSpPr/>
+          <p:nvPr/>
+        </p:nvSpPr>
+        <p:spPr>
+          <a:xfrm>
+            <a:off x="4370832" y="2258568"/>
             <a:ext cx="1828800" cy="292608"/>
           </a:xfrm>
           <a:prstGeom prst="rect">
@@ -21908,13 +22315,13 @@
             <a:r>
               <a:rPr lang="en-US" sz="1300" b="1" dirty="0">
                 <a:solidFill>
-                  <a:srgbClr val="9D174D"/>
+                  <a:srgbClr val="0F766E"/>
                 </a:solidFill>
                 <a:latin typeface="Trebuchet MS" pitchFamily="34" charset="0"/>
                 <a:ea typeface="Trebuchet MS" pitchFamily="34" charset="-122"/>
                 <a:cs typeface="Trebuchet MS" pitchFamily="34" charset="-120"/>
               </a:rPr>
-              <a:t>ing</a:t>
+              <a:t>price</a:t>
             </a:r>
             <a:endParaRPr lang="en-US" sz="1300" dirty="0"/>
           </a:p>
@@ -21922,13 +22329,13 @@
       </p:sp>
       <p:sp>
         <p:nvSpPr>
-          <p:cNvPr id="22" name="Text 20"/>
-          <p:cNvSpPr/>
-          <p:nvPr/>
-        </p:nvSpPr>
-        <p:spPr>
-          <a:xfrm>
-            <a:off x="5803392" y="2569464"/>
+          <p:cNvPr id="21" name="Text 19"/>
+          <p:cNvSpPr/>
+          <p:nvPr/>
+        </p:nvSpPr>
+        <p:spPr>
+          <a:xfrm>
+            <a:off x="4370832" y="2569464"/>
             <a:ext cx="1828800" cy="201168"/>
           </a:xfrm>
           <a:prstGeom prst="rect">
@@ -21953,7 +22360,7 @@
                 <a:ea typeface="Calibri" pitchFamily="34" charset="-122"/>
                 <a:cs typeface="Calibri" pitchFamily="34" charset="-120"/>
               </a:rPr>
-              <a:t>ongoing action</a:t>
+              <a:t>value or cost</a:t>
             </a:r>
             <a:endParaRPr lang="en-US" sz="850" dirty="0"/>
           </a:p>
@@ -21961,7 +22368,158 @@
       </p:sp>
       <p:sp>
         <p:nvSpPr>
-          <p:cNvPr id="23" name="Shape 21"/>
+          <p:cNvPr id="22" name="Shape 20"/>
+          <p:cNvSpPr/>
+          <p:nvPr/>
+        </p:nvSpPr>
+        <p:spPr>
+          <a:xfrm>
+            <a:off x="6519672" y="2258568"/>
+            <a:ext cx="1828800" cy="292608"/>
+          </a:xfrm>
+          <a:prstGeom prst="rect">
+            <a:avLst>
+              <a:gd name="adj" fmla="val 25000"/>
+            </a:avLst>
+          </a:prstGeom>
+          <a:solidFill>
+            <a:srgbClr val="FCE7F3"/>
+          </a:solidFill>
+          <a:ln w="19050">
+            <a:solidFill>
+              <a:srgbClr val="DB2777"/>
+            </a:solidFill>
+            <a:prstDash val="solid"/>
+          </a:ln>
+          <a:effectLst>
+            <a:outerShdw sx="100000" sy="100000" kx="0" ky="0" algn="bl" rotWithShape="0" blurRad="101600" dist="38100" dir="8100000">
+              <a:srgbClr val="000000">
+                <a:alpha val="12000"/>
+              </a:srgbClr>
+            </a:outerShdw>
+          </a:effectLst>
+        </p:spPr>
+      </p:sp>
+      <p:sp>
+        <p:nvSpPr>
+          <p:cNvPr id="23" name="Text 21"/>
+          <p:cNvSpPr/>
+          <p:nvPr/>
+        </p:nvSpPr>
+        <p:spPr>
+          <a:xfrm>
+            <a:off x="6519672" y="2258568"/>
+            <a:ext cx="1828800" cy="292608"/>
+          </a:xfrm>
+          <a:prstGeom prst="rect">
+            <a:avLst/>
+          </a:prstGeom>
+          <a:noFill/>
+          <a:ln/>
+        </p:spPr>
+        <p:txBody>
+          <a:bodyPr wrap="square" lIns="0" tIns="0" rIns="0" bIns="0" rtlCol="0" anchor="ctr"/>
+          <a:lstStyle/>
+          <a:p>
+            <a:pPr algn="ctr" indent="0" marL="0">
+              <a:buNone/>
+            </a:pPr>
+            <a:r>
+              <a:rPr lang="en-US" sz="1300" b="1" dirty="0">
+                <a:solidFill>
+                  <a:srgbClr val="9D174D"/>
+                </a:solidFill>
+                <a:latin typeface="Trebuchet MS" pitchFamily="34" charset="0"/>
+                <a:ea typeface="Trebuchet MS" pitchFamily="34" charset="-122"/>
+                <a:cs typeface="Trebuchet MS" pitchFamily="34" charset="-120"/>
+              </a:rPr>
+              <a:t>ed</a:t>
+            </a:r>
+            <a:endParaRPr lang="en-US" sz="1300" dirty="0"/>
+          </a:p>
+        </p:txBody>
+      </p:sp>
+      <p:sp>
+        <p:nvSpPr>
+          <p:cNvPr id="24" name="Text 22"/>
+          <p:cNvSpPr/>
+          <p:nvPr/>
+        </p:nvSpPr>
+        <p:spPr>
+          <a:xfrm>
+            <a:off x="6519672" y="2569464"/>
+            <a:ext cx="1828800" cy="201168"/>
+          </a:xfrm>
+          <a:prstGeom prst="rect">
+            <a:avLst/>
+          </a:prstGeom>
+          <a:noFill/>
+          <a:ln/>
+        </p:spPr>
+        <p:txBody>
+          <a:bodyPr wrap="square" lIns="0" tIns="0" rIns="0" bIns="0" rtlCol="0" anchor="t"/>
+          <a:lstStyle/>
+          <a:p>
+            <a:pPr algn="ctr" indent="0" marL="0">
+              <a:buNone/>
+            </a:pPr>
+            <a:r>
+              <a:rPr lang="en-US" sz="850" dirty="0">
+                <a:solidFill>
+                  <a:srgbClr val="475569"/>
+                </a:solidFill>
+                <a:latin typeface="Calibri" pitchFamily="34" charset="0"/>
+                <a:ea typeface="Calibri" pitchFamily="34" charset="-122"/>
+                <a:cs typeface="Calibri" pitchFamily="34" charset="-120"/>
+              </a:rPr>
+              <a:t>past tense / has been done</a:t>
+            </a:r>
+            <a:endParaRPr lang="en-US" sz="850" dirty="0"/>
+          </a:p>
+        </p:txBody>
+      </p:sp>
+      <p:sp>
+        <p:nvSpPr>
+          <p:cNvPr id="25" name="Text 23"/>
+          <p:cNvSpPr/>
+          <p:nvPr/>
+        </p:nvSpPr>
+        <p:spPr>
+          <a:xfrm>
+            <a:off x="6519672" y="2752344"/>
+            <a:ext cx="1828800" cy="182880"/>
+          </a:xfrm>
+          <a:prstGeom prst="rect">
+            <a:avLst/>
+          </a:prstGeom>
+          <a:noFill/>
+          <a:ln/>
+        </p:spPr>
+        <p:txBody>
+          <a:bodyPr wrap="square" lIns="0" tIns="0" rIns="0" bIns="0" rtlCol="0" anchor="t"/>
+          <a:lstStyle/>
+          <a:p>
+            <a:pPr algn="ctr" indent="0" marL="0">
+              <a:buNone/>
+            </a:pPr>
+            <a:r>
+              <a:rPr lang="en-US" sz="700" i="1" dirty="0">
+                <a:solidFill>
+                  <a:srgbClr val="94A3B8"/>
+                </a:solidFill>
+                <a:latin typeface="Calibri" pitchFamily="34" charset="0"/>
+                <a:ea typeface="Calibri" pitchFamily="34" charset="-122"/>
+                <a:cs typeface="Calibri" pitchFamily="34" charset="-120"/>
+              </a:rPr>
+              <a:t>'e' dropped before vowel suffix</a:t>
+            </a:r>
+            <a:endParaRPr lang="en-US" sz="700" dirty="0"/>
+          </a:p>
+        </p:txBody>
+      </p:sp>
+      <p:sp>
+        <p:nvSpPr>
+          <p:cNvPr id="26" name="Shape 24"/>
           <p:cNvSpPr/>
           <p:nvPr/>
         </p:nvSpPr>
@@ -21988,7 +22546,7 @@
       </p:sp>
       <p:sp>
         <p:nvSpPr>
-          <p:cNvPr id="24" name="Text 22"/>
+          <p:cNvPr id="27" name="Text 25"/>
           <p:cNvSpPr/>
           <p:nvPr/>
         </p:nvSpPr>
@@ -22027,7 +22585,7 @@
       </p:sp>
       <p:sp>
         <p:nvSpPr>
-          <p:cNvPr id="25" name="Shape 23"/>
+          <p:cNvPr id="28" name="Shape 26"/>
           <p:cNvSpPr/>
           <p:nvPr/>
         </p:nvSpPr>
@@ -22054,13 +22612,13 @@
       </p:sp>
       <p:sp>
         <p:nvSpPr>
-          <p:cNvPr id="26" name="Shape 24"/>
-          <p:cNvSpPr/>
-          <p:nvPr/>
-        </p:nvSpPr>
-        <p:spPr>
-          <a:xfrm>
-            <a:off x="2999232" y="3364992"/>
+          <p:cNvPr id="29" name="Shape 27"/>
+          <p:cNvSpPr/>
+          <p:nvPr/>
+        </p:nvSpPr>
+        <p:spPr>
+          <a:xfrm>
+            <a:off x="2313432" y="3364992"/>
             <a:ext cx="1645920" cy="475488"/>
           </a:xfrm>
           <a:prstGeom prst="rect">
@@ -22081,13 +22639,13 @@
       </p:sp>
       <p:sp>
         <p:nvSpPr>
-          <p:cNvPr id="27" name="Text 25"/>
-          <p:cNvSpPr/>
-          <p:nvPr/>
-        </p:nvSpPr>
-        <p:spPr>
-          <a:xfrm>
-            <a:off x="2999232" y="3364992"/>
+          <p:cNvPr id="30" name="Text 28"/>
+          <p:cNvSpPr/>
+          <p:nvPr/>
+        </p:nvSpPr>
+        <p:spPr>
+          <a:xfrm>
+            <a:off x="2313432" y="3364992"/>
             <a:ext cx="1645920" cy="475488"/>
           </a:xfrm>
           <a:prstGeom prst="rect">
@@ -22112,7 +22670,7 @@
                 <a:ea typeface="Trebuchet MS" pitchFamily="34" charset="-122"/>
                 <a:cs typeface="Trebuchet MS" pitchFamily="34" charset="-120"/>
               </a:rPr>
-              <a:t>pri</a:t>
+              <a:t>un</a:t>
             </a:r>
             <a:endParaRPr lang="en-US" sz="1400" dirty="0"/>
           </a:p>
@@ -22120,14 +22678,14 @@
       </p:sp>
       <p:sp>
         <p:nvSpPr>
-          <p:cNvPr id="28" name="Text 26"/>
-          <p:cNvSpPr/>
-          <p:nvPr/>
-        </p:nvSpPr>
-        <p:spPr>
-          <a:xfrm>
-            <a:off x="4645152" y="3364992"/>
-            <a:ext cx="1097280" cy="475488"/>
+          <p:cNvPr id="31" name="Text 29"/>
+          <p:cNvSpPr/>
+          <p:nvPr/>
+        </p:nvSpPr>
+        <p:spPr>
+          <a:xfrm>
+            <a:off x="3959352" y="3364992"/>
+            <a:ext cx="411480" cy="475488"/>
           </a:xfrm>
           <a:prstGeom prst="rect">
             <a:avLst/>
@@ -22159,13 +22717,13 @@
       </p:sp>
       <p:sp>
         <p:nvSpPr>
-          <p:cNvPr id="29" name="Shape 27"/>
-          <p:cNvSpPr/>
-          <p:nvPr/>
-        </p:nvSpPr>
-        <p:spPr>
-          <a:xfrm>
-            <a:off x="5742432" y="3364992"/>
+          <p:cNvPr id="32" name="Shape 30"/>
+          <p:cNvSpPr/>
+          <p:nvPr/>
+        </p:nvSpPr>
+        <p:spPr>
+          <a:xfrm>
+            <a:off x="4370832" y="3364992"/>
             <a:ext cx="1645920" cy="475488"/>
           </a:xfrm>
           <a:prstGeom prst="rect">
@@ -22186,13 +22744,13 @@
       </p:sp>
       <p:sp>
         <p:nvSpPr>
-          <p:cNvPr id="30" name="Text 28"/>
-          <p:cNvSpPr/>
-          <p:nvPr/>
-        </p:nvSpPr>
-        <p:spPr>
-          <a:xfrm>
-            <a:off x="5742432" y="3364992"/>
+          <p:cNvPr id="33" name="Text 31"/>
+          <p:cNvSpPr/>
+          <p:nvPr/>
+        </p:nvSpPr>
+        <p:spPr>
+          <a:xfrm>
+            <a:off x="4370832" y="3364992"/>
             <a:ext cx="1645920" cy="475488"/>
           </a:xfrm>
           <a:prstGeom prst="rect">
@@ -22217,7 +22775,7 @@
                 <a:ea typeface="Trebuchet MS" pitchFamily="34" charset="-122"/>
                 <a:cs typeface="Trebuchet MS" pitchFamily="34" charset="-120"/>
               </a:rPr>
-              <a:t>cing</a:t>
+              <a:t>der</a:t>
             </a:r>
             <a:endParaRPr lang="en-US" sz="1400" dirty="0"/>
           </a:p>
@@ -22225,7 +22783,112 @@
       </p:sp>
       <p:sp>
         <p:nvSpPr>
-          <p:cNvPr id="31" name="Shape 29"/>
+          <p:cNvPr id="34" name="Text 32"/>
+          <p:cNvSpPr/>
+          <p:nvPr/>
+        </p:nvSpPr>
+        <p:spPr>
+          <a:xfrm>
+            <a:off x="6016752" y="3364992"/>
+            <a:ext cx="411480" cy="475488"/>
+          </a:xfrm>
+          <a:prstGeom prst="rect">
+            <a:avLst/>
+          </a:prstGeom>
+          <a:noFill/>
+          <a:ln/>
+        </p:spPr>
+        <p:txBody>
+          <a:bodyPr wrap="square" lIns="0" tIns="0" rIns="0" bIns="0" rtlCol="0" anchor="ctr"/>
+          <a:lstStyle/>
+          <a:p>
+            <a:pPr algn="ctr" indent="0" marL="0">
+              <a:buNone/>
+            </a:pPr>
+            <a:r>
+              <a:rPr lang="en-US" sz="1600" b="1" dirty="0">
+                <a:solidFill>
+                  <a:srgbClr val="0D9488"/>
+                </a:solidFill>
+                <a:latin typeface="Trebuchet MS" pitchFamily="34" charset="0"/>
+                <a:ea typeface="Trebuchet MS" pitchFamily="34" charset="-122"/>
+                <a:cs typeface="Trebuchet MS" pitchFamily="34" charset="-120"/>
+              </a:rPr>
+              <a:t>·</a:t>
+            </a:r>
+            <a:endParaRPr lang="en-US" sz="1600" dirty="0"/>
+          </a:p>
+        </p:txBody>
+      </p:sp>
+      <p:sp>
+        <p:nvSpPr>
+          <p:cNvPr id="35" name="Shape 33"/>
+          <p:cNvSpPr/>
+          <p:nvPr/>
+        </p:nvSpPr>
+        <p:spPr>
+          <a:xfrm>
+            <a:off x="6428232" y="3364992"/>
+            <a:ext cx="1645920" cy="475488"/>
+          </a:xfrm>
+          <a:prstGeom prst="rect">
+            <a:avLst>
+              <a:gd name="adj" fmla="val 9615"/>
+            </a:avLst>
+          </a:prstGeom>
+          <a:solidFill>
+            <a:srgbClr val="FFFFFF"/>
+          </a:solidFill>
+          <a:ln w="12700">
+            <a:solidFill>
+              <a:srgbClr val="0D9488"/>
+            </a:solidFill>
+            <a:prstDash val="solid"/>
+          </a:ln>
+        </p:spPr>
+      </p:sp>
+      <p:sp>
+        <p:nvSpPr>
+          <p:cNvPr id="36" name="Text 34"/>
+          <p:cNvSpPr/>
+          <p:nvPr/>
+        </p:nvSpPr>
+        <p:spPr>
+          <a:xfrm>
+            <a:off x="6428232" y="3364992"/>
+            <a:ext cx="1645920" cy="475488"/>
+          </a:xfrm>
+          <a:prstGeom prst="rect">
+            <a:avLst/>
+          </a:prstGeom>
+          <a:noFill/>
+          <a:ln/>
+        </p:spPr>
+        <p:txBody>
+          <a:bodyPr wrap="square" lIns="0" tIns="0" rIns="0" bIns="0" rtlCol="0" anchor="ctr"/>
+          <a:lstStyle/>
+          <a:p>
+            <a:pPr algn="ctr" indent="0" marL="0">
+              <a:buNone/>
+            </a:pPr>
+            <a:r>
+              <a:rPr lang="en-US" sz="1400" b="1" dirty="0">
+                <a:solidFill>
+                  <a:srgbClr val="0D9488"/>
+                </a:solidFill>
+                <a:latin typeface="Trebuchet MS" pitchFamily="34" charset="0"/>
+                <a:ea typeface="Trebuchet MS" pitchFamily="34" charset="-122"/>
+                <a:cs typeface="Trebuchet MS" pitchFamily="34" charset="-120"/>
+              </a:rPr>
+              <a:t>priced</a:t>
+            </a:r>
+            <a:endParaRPr lang="en-US" sz="1400" dirty="0"/>
+          </a:p>
+        </p:txBody>
+      </p:sp>
+      <p:sp>
+        <p:nvSpPr>
+          <p:cNvPr id="37" name="Shape 35"/>
           <p:cNvSpPr/>
           <p:nvPr/>
         </p:nvSpPr>
@@ -22252,7 +22915,7 @@
       </p:sp>
       <p:sp>
         <p:nvSpPr>
-          <p:cNvPr id="32" name="Text 30"/>
+          <p:cNvPr id="38" name="Text 36"/>
           <p:cNvSpPr/>
           <p:nvPr/>
         </p:nvSpPr>
@@ -22291,7 +22954,7 @@
       </p:sp>
       <p:sp>
         <p:nvSpPr>
-          <p:cNvPr id="33" name="Shape 31"/>
+          <p:cNvPr id="39" name="Shape 37"/>
           <p:cNvSpPr/>
           <p:nvPr/>
         </p:nvSpPr>
@@ -22318,14 +22981,14 @@
       </p:sp>
       <p:sp>
         <p:nvSpPr>
-          <p:cNvPr id="34" name="Shape 32"/>
-          <p:cNvSpPr/>
-          <p:nvPr/>
-        </p:nvSpPr>
-        <p:spPr>
-          <a:xfrm>
-            <a:off x="2427732" y="4169664"/>
-            <a:ext cx="685800" cy="384048"/>
+          <p:cNvPr id="40" name="Shape 38"/>
+          <p:cNvSpPr/>
+          <p:nvPr/>
+        </p:nvSpPr>
+        <p:spPr>
+          <a:xfrm>
+            <a:off x="1951330" y="4169664"/>
+            <a:ext cx="676656" cy="384048"/>
           </a:xfrm>
           <a:prstGeom prst="rect">
             <a:avLst>
@@ -22345,14 +23008,14 @@
       </p:sp>
       <p:sp>
         <p:nvSpPr>
-          <p:cNvPr id="35" name="Text 33"/>
-          <p:cNvSpPr/>
-          <p:nvPr/>
-        </p:nvSpPr>
-        <p:spPr>
-          <a:xfrm>
-            <a:off x="2427732" y="4169664"/>
-            <a:ext cx="685800" cy="384048"/>
+          <p:cNvPr id="41" name="Text 39"/>
+          <p:cNvSpPr/>
+          <p:nvPr/>
+        </p:nvSpPr>
+        <p:spPr>
+          <a:xfrm>
+            <a:off x="1951330" y="4169664"/>
+            <a:ext cx="676656" cy="384048"/>
           </a:xfrm>
           <a:prstGeom prst="rect">
             <a:avLst/>
@@ -22376,7 +23039,7 @@
                 <a:ea typeface="Trebuchet MS" pitchFamily="34" charset="-122"/>
                 <a:cs typeface="Trebuchet MS" pitchFamily="34" charset="-120"/>
               </a:rPr>
-              <a:t>p</a:t>
+              <a:t>u</a:t>
             </a:r>
             <a:endParaRPr lang="en-US" sz="900" dirty="0"/>
           </a:p>
@@ -22384,14 +23047,14 @@
       </p:sp>
       <p:sp>
         <p:nvSpPr>
-          <p:cNvPr id="36" name="Shape 34"/>
-          <p:cNvSpPr/>
-          <p:nvPr/>
-        </p:nvSpPr>
-        <p:spPr>
-          <a:xfrm>
-            <a:off x="3639312" y="4169664"/>
-            <a:ext cx="685800" cy="384048"/>
+          <p:cNvPr id="42" name="Shape 40"/>
+          <p:cNvSpPr/>
+          <p:nvPr/>
+        </p:nvSpPr>
+        <p:spPr>
+          <a:xfrm>
+            <a:off x="2677363" y="4169664"/>
+            <a:ext cx="676656" cy="384048"/>
           </a:xfrm>
           <a:prstGeom prst="rect">
             <a:avLst>
@@ -22411,14 +23074,14 @@
       </p:sp>
       <p:sp>
         <p:nvSpPr>
-          <p:cNvPr id="37" name="Text 35"/>
-          <p:cNvSpPr/>
-          <p:nvPr/>
-        </p:nvSpPr>
-        <p:spPr>
-          <a:xfrm>
-            <a:off x="3639312" y="4169664"/>
-            <a:ext cx="685800" cy="384048"/>
+          <p:cNvPr id="43" name="Text 41"/>
+          <p:cNvSpPr/>
+          <p:nvPr/>
+        </p:nvSpPr>
+        <p:spPr>
+          <a:xfrm>
+            <a:off x="2677363" y="4169664"/>
+            <a:ext cx="676656" cy="384048"/>
           </a:xfrm>
           <a:prstGeom prst="rect">
             <a:avLst/>
@@ -22442,7 +23105,7 @@
                 <a:ea typeface="Trebuchet MS" pitchFamily="34" charset="-122"/>
                 <a:cs typeface="Trebuchet MS" pitchFamily="34" charset="-120"/>
               </a:rPr>
-              <a:t>r</a:t>
+              <a:t>n</a:t>
             </a:r>
             <a:endParaRPr lang="en-US" sz="900" dirty="0"/>
           </a:p>
@@ -22450,14 +23113,14 @@
       </p:sp>
       <p:sp>
         <p:nvSpPr>
-          <p:cNvPr id="38" name="Shape 36"/>
-          <p:cNvSpPr/>
-          <p:nvPr/>
-        </p:nvSpPr>
-        <p:spPr>
-          <a:xfrm>
-            <a:off x="4850892" y="4169664"/>
-            <a:ext cx="685800" cy="384048"/>
+          <p:cNvPr id="44" name="Shape 42"/>
+          <p:cNvSpPr/>
+          <p:nvPr/>
+        </p:nvSpPr>
+        <p:spPr>
+          <a:xfrm>
+            <a:off x="3403397" y="4169664"/>
+            <a:ext cx="676656" cy="384048"/>
           </a:xfrm>
           <a:prstGeom prst="rect">
             <a:avLst>
@@ -22477,14 +23140,14 @@
       </p:sp>
       <p:sp>
         <p:nvSpPr>
-          <p:cNvPr id="39" name="Text 37"/>
-          <p:cNvSpPr/>
-          <p:nvPr/>
-        </p:nvSpPr>
-        <p:spPr>
-          <a:xfrm>
-            <a:off x="4850892" y="4169664"/>
-            <a:ext cx="685800" cy="384048"/>
+          <p:cNvPr id="45" name="Text 43"/>
+          <p:cNvSpPr/>
+          <p:nvPr/>
+        </p:nvSpPr>
+        <p:spPr>
+          <a:xfrm>
+            <a:off x="3403397" y="4169664"/>
+            <a:ext cx="676656" cy="384048"/>
           </a:xfrm>
           <a:prstGeom prst="rect">
             <a:avLst/>
@@ -22508,7 +23171,7 @@
                 <a:ea typeface="Trebuchet MS" pitchFamily="34" charset="-122"/>
                 <a:cs typeface="Trebuchet MS" pitchFamily="34" charset="-120"/>
               </a:rPr>
-              <a:t>i</a:t>
+              <a:t>d</a:t>
             </a:r>
             <a:endParaRPr lang="en-US" sz="900" dirty="0"/>
           </a:p>
@@ -22516,14 +23179,14 @@
       </p:sp>
       <p:sp>
         <p:nvSpPr>
-          <p:cNvPr id="40" name="Shape 38"/>
-          <p:cNvSpPr/>
-          <p:nvPr/>
-        </p:nvSpPr>
-        <p:spPr>
-          <a:xfrm>
-            <a:off x="6062472" y="4169664"/>
-            <a:ext cx="685800" cy="384048"/>
+          <p:cNvPr id="46" name="Shape 44"/>
+          <p:cNvSpPr/>
+          <p:nvPr/>
+        </p:nvSpPr>
+        <p:spPr>
+          <a:xfrm>
+            <a:off x="4129430" y="4169664"/>
+            <a:ext cx="676656" cy="384048"/>
           </a:xfrm>
           <a:prstGeom prst="rect">
             <a:avLst>
@@ -22543,14 +23206,14 @@
       </p:sp>
       <p:sp>
         <p:nvSpPr>
-          <p:cNvPr id="41" name="Text 39"/>
-          <p:cNvSpPr/>
-          <p:nvPr/>
-        </p:nvSpPr>
-        <p:spPr>
-          <a:xfrm>
-            <a:off x="6062472" y="4169664"/>
-            <a:ext cx="685800" cy="384048"/>
+          <p:cNvPr id="47" name="Text 45"/>
+          <p:cNvSpPr/>
+          <p:nvPr/>
+        </p:nvSpPr>
+        <p:spPr>
+          <a:xfrm>
+            <a:off x="4129430" y="4169664"/>
+            <a:ext cx="676656" cy="384048"/>
           </a:xfrm>
           <a:prstGeom prst="rect">
             <a:avLst/>
@@ -22574,7 +23237,7 @@
                 <a:ea typeface="Trebuchet MS" pitchFamily="34" charset="-122"/>
                 <a:cs typeface="Trebuchet MS" pitchFamily="34" charset="-120"/>
               </a:rPr>
-              <a:t>c</a:t>
+              <a:t>er</a:t>
             </a:r>
             <a:endParaRPr lang="en-US" sz="900" dirty="0"/>
           </a:p>
@@ -22582,14 +23245,278 @@
       </p:sp>
       <p:sp>
         <p:nvSpPr>
-          <p:cNvPr id="42" name="Text 40"/>
-          <p:cNvSpPr/>
-          <p:nvPr/>
-        </p:nvSpPr>
-        <p:spPr>
-          <a:xfrm>
-            <a:off x="6062472" y="4572000"/>
-            <a:ext cx="685800" cy="219456"/>
+          <p:cNvPr id="48" name="Shape 46"/>
+          <p:cNvSpPr/>
+          <p:nvPr/>
+        </p:nvSpPr>
+        <p:spPr>
+          <a:xfrm>
+            <a:off x="4855464" y="4169664"/>
+            <a:ext cx="676656" cy="384048"/>
+          </a:xfrm>
+          <a:prstGeom prst="rect">
+            <a:avLst>
+              <a:gd name="adj" fmla="val 9524"/>
+            </a:avLst>
+          </a:prstGeom>
+          <a:solidFill>
+            <a:srgbClr val="FFFFFF"/>
+          </a:solidFill>
+          <a:ln w="12700">
+            <a:solidFill>
+              <a:srgbClr val="DB2777"/>
+            </a:solidFill>
+            <a:prstDash val="solid"/>
+          </a:ln>
+        </p:spPr>
+      </p:sp>
+      <p:sp>
+        <p:nvSpPr>
+          <p:cNvPr id="49" name="Text 47"/>
+          <p:cNvSpPr/>
+          <p:nvPr/>
+        </p:nvSpPr>
+        <p:spPr>
+          <a:xfrm>
+            <a:off x="4855464" y="4169664"/>
+            <a:ext cx="676656" cy="384048"/>
+          </a:xfrm>
+          <a:prstGeom prst="rect">
+            <a:avLst/>
+          </a:prstGeom>
+          <a:noFill/>
+          <a:ln/>
+        </p:spPr>
+        <p:txBody>
+          <a:bodyPr wrap="square" lIns="0" tIns="0" rIns="0" bIns="0" rtlCol="0" anchor="ctr"/>
+          <a:lstStyle/>
+          <a:p>
+            <a:pPr algn="ctr" indent="0" marL="0">
+              <a:buNone/>
+            </a:pPr>
+            <a:r>
+              <a:rPr lang="en-US" sz="900" b="1" dirty="0">
+                <a:solidFill>
+                  <a:srgbClr val="9D174D"/>
+                </a:solidFill>
+                <a:latin typeface="Trebuchet MS" pitchFamily="34" charset="0"/>
+                <a:ea typeface="Trebuchet MS" pitchFamily="34" charset="-122"/>
+                <a:cs typeface="Trebuchet MS" pitchFamily="34" charset="-120"/>
+              </a:rPr>
+              <a:t>p</a:t>
+            </a:r>
+            <a:endParaRPr lang="en-US" sz="900" dirty="0"/>
+          </a:p>
+        </p:txBody>
+      </p:sp>
+      <p:sp>
+        <p:nvSpPr>
+          <p:cNvPr id="50" name="Shape 48"/>
+          <p:cNvSpPr/>
+          <p:nvPr/>
+        </p:nvSpPr>
+        <p:spPr>
+          <a:xfrm>
+            <a:off x="5581498" y="4169664"/>
+            <a:ext cx="676656" cy="384048"/>
+          </a:xfrm>
+          <a:prstGeom prst="rect">
+            <a:avLst>
+              <a:gd name="adj" fmla="val 9524"/>
+            </a:avLst>
+          </a:prstGeom>
+          <a:solidFill>
+            <a:srgbClr val="FFFFFF"/>
+          </a:solidFill>
+          <a:ln w="12700">
+            <a:solidFill>
+              <a:srgbClr val="DB2777"/>
+            </a:solidFill>
+            <a:prstDash val="solid"/>
+          </a:ln>
+        </p:spPr>
+      </p:sp>
+      <p:sp>
+        <p:nvSpPr>
+          <p:cNvPr id="51" name="Text 49"/>
+          <p:cNvSpPr/>
+          <p:nvPr/>
+        </p:nvSpPr>
+        <p:spPr>
+          <a:xfrm>
+            <a:off x="5581498" y="4169664"/>
+            <a:ext cx="676656" cy="384048"/>
+          </a:xfrm>
+          <a:prstGeom prst="rect">
+            <a:avLst/>
+          </a:prstGeom>
+          <a:noFill/>
+          <a:ln/>
+        </p:spPr>
+        <p:txBody>
+          <a:bodyPr wrap="square" lIns="0" tIns="0" rIns="0" bIns="0" rtlCol="0" anchor="ctr"/>
+          <a:lstStyle/>
+          <a:p>
+            <a:pPr algn="ctr" indent="0" marL="0">
+              <a:buNone/>
+            </a:pPr>
+            <a:r>
+              <a:rPr lang="en-US" sz="900" b="1" dirty="0">
+                <a:solidFill>
+                  <a:srgbClr val="9D174D"/>
+                </a:solidFill>
+                <a:latin typeface="Trebuchet MS" pitchFamily="34" charset="0"/>
+                <a:ea typeface="Trebuchet MS" pitchFamily="34" charset="-122"/>
+                <a:cs typeface="Trebuchet MS" pitchFamily="34" charset="-120"/>
+              </a:rPr>
+              <a:t>r</a:t>
+            </a:r>
+            <a:endParaRPr lang="en-US" sz="900" dirty="0"/>
+          </a:p>
+        </p:txBody>
+      </p:sp>
+      <p:sp>
+        <p:nvSpPr>
+          <p:cNvPr id="52" name="Shape 50"/>
+          <p:cNvSpPr/>
+          <p:nvPr/>
+        </p:nvSpPr>
+        <p:spPr>
+          <a:xfrm>
+            <a:off x="6307531" y="4169664"/>
+            <a:ext cx="676656" cy="384048"/>
+          </a:xfrm>
+          <a:prstGeom prst="rect">
+            <a:avLst>
+              <a:gd name="adj" fmla="val 9524"/>
+            </a:avLst>
+          </a:prstGeom>
+          <a:solidFill>
+            <a:srgbClr val="FFFFFF"/>
+          </a:solidFill>
+          <a:ln w="12700">
+            <a:solidFill>
+              <a:srgbClr val="DB2777"/>
+            </a:solidFill>
+            <a:prstDash val="solid"/>
+          </a:ln>
+        </p:spPr>
+      </p:sp>
+      <p:sp>
+        <p:nvSpPr>
+          <p:cNvPr id="53" name="Text 51"/>
+          <p:cNvSpPr/>
+          <p:nvPr/>
+        </p:nvSpPr>
+        <p:spPr>
+          <a:xfrm>
+            <a:off x="6307531" y="4169664"/>
+            <a:ext cx="676656" cy="384048"/>
+          </a:xfrm>
+          <a:prstGeom prst="rect">
+            <a:avLst/>
+          </a:prstGeom>
+          <a:noFill/>
+          <a:ln/>
+        </p:spPr>
+        <p:txBody>
+          <a:bodyPr wrap="square" lIns="0" tIns="0" rIns="0" bIns="0" rtlCol="0" anchor="ctr"/>
+          <a:lstStyle/>
+          <a:p>
+            <a:pPr algn="ctr" indent="0" marL="0">
+              <a:buNone/>
+            </a:pPr>
+            <a:r>
+              <a:rPr lang="en-US" sz="900" b="1" dirty="0">
+                <a:solidFill>
+                  <a:srgbClr val="9D174D"/>
+                </a:solidFill>
+                <a:latin typeface="Trebuchet MS" pitchFamily="34" charset="0"/>
+                <a:ea typeface="Trebuchet MS" pitchFamily="34" charset="-122"/>
+                <a:cs typeface="Trebuchet MS" pitchFamily="34" charset="-120"/>
+              </a:rPr>
+              <a:t>i</a:t>
+            </a:r>
+            <a:endParaRPr lang="en-US" sz="900" dirty="0"/>
+          </a:p>
+        </p:txBody>
+      </p:sp>
+      <p:sp>
+        <p:nvSpPr>
+          <p:cNvPr id="54" name="Shape 52"/>
+          <p:cNvSpPr/>
+          <p:nvPr/>
+        </p:nvSpPr>
+        <p:spPr>
+          <a:xfrm>
+            <a:off x="7033565" y="4169664"/>
+            <a:ext cx="676656" cy="384048"/>
+          </a:xfrm>
+          <a:prstGeom prst="rect">
+            <a:avLst>
+              <a:gd name="adj" fmla="val 9524"/>
+            </a:avLst>
+          </a:prstGeom>
+          <a:solidFill>
+            <a:srgbClr val="FFFFFF"/>
+          </a:solidFill>
+          <a:ln w="12700">
+            <a:solidFill>
+              <a:srgbClr val="DB2777"/>
+            </a:solidFill>
+            <a:prstDash val="solid"/>
+          </a:ln>
+        </p:spPr>
+      </p:sp>
+      <p:sp>
+        <p:nvSpPr>
+          <p:cNvPr id="55" name="Text 53"/>
+          <p:cNvSpPr/>
+          <p:nvPr/>
+        </p:nvSpPr>
+        <p:spPr>
+          <a:xfrm>
+            <a:off x="7033565" y="4169664"/>
+            <a:ext cx="676656" cy="384048"/>
+          </a:xfrm>
+          <a:prstGeom prst="rect">
+            <a:avLst/>
+          </a:prstGeom>
+          <a:noFill/>
+          <a:ln/>
+        </p:spPr>
+        <p:txBody>
+          <a:bodyPr wrap="square" lIns="0" tIns="0" rIns="0" bIns="0" rtlCol="0" anchor="ctr"/>
+          <a:lstStyle/>
+          <a:p>
+            <a:pPr algn="ctr" indent="0" marL="0">
+              <a:buNone/>
+            </a:pPr>
+            <a:r>
+              <a:rPr lang="en-US" sz="900" b="1" dirty="0">
+                <a:solidFill>
+                  <a:srgbClr val="9D174D"/>
+                </a:solidFill>
+                <a:latin typeface="Trebuchet MS" pitchFamily="34" charset="0"/>
+                <a:ea typeface="Trebuchet MS" pitchFamily="34" charset="-122"/>
+                <a:cs typeface="Trebuchet MS" pitchFamily="34" charset="-120"/>
+              </a:rPr>
+              <a:t>ce</a:t>
+            </a:r>
+            <a:endParaRPr lang="en-US" sz="900" dirty="0"/>
+          </a:p>
+        </p:txBody>
+      </p:sp>
+      <p:sp>
+        <p:nvSpPr>
+          <p:cNvPr id="56" name="Text 54"/>
+          <p:cNvSpPr/>
+          <p:nvPr/>
+        </p:nvSpPr>
+        <p:spPr>
+          <a:xfrm>
+            <a:off x="7033565" y="4572000"/>
+            <a:ext cx="676656" cy="219456"/>
           </a:xfrm>
           <a:prstGeom prst="rect">
             <a:avLst/>
@@ -22621,14 +23548,14 @@
       </p:sp>
       <p:sp>
         <p:nvSpPr>
-          <p:cNvPr id="43" name="Shape 41"/>
-          <p:cNvSpPr/>
-          <p:nvPr/>
-        </p:nvSpPr>
-        <p:spPr>
-          <a:xfrm>
-            <a:off x="7274052" y="4169664"/>
-            <a:ext cx="685800" cy="384048"/>
+          <p:cNvPr id="57" name="Shape 55"/>
+          <p:cNvSpPr/>
+          <p:nvPr/>
+        </p:nvSpPr>
+        <p:spPr>
+          <a:xfrm>
+            <a:off x="7759598" y="4169664"/>
+            <a:ext cx="676656" cy="384048"/>
           </a:xfrm>
           <a:prstGeom prst="rect">
             <a:avLst>
@@ -22648,14 +23575,14 @@
       </p:sp>
       <p:sp>
         <p:nvSpPr>
-          <p:cNvPr id="44" name="Text 42"/>
-          <p:cNvSpPr/>
-          <p:nvPr/>
-        </p:nvSpPr>
-        <p:spPr>
-          <a:xfrm>
-            <a:off x="7274052" y="4169664"/>
-            <a:ext cx="685800" cy="384048"/>
+          <p:cNvPr id="58" name="Text 56"/>
+          <p:cNvSpPr/>
+          <p:nvPr/>
+        </p:nvSpPr>
+        <p:spPr>
+          <a:xfrm>
+            <a:off x="7759598" y="4169664"/>
+            <a:ext cx="676656" cy="384048"/>
           </a:xfrm>
           <a:prstGeom prst="rect">
             <a:avLst/>
@@ -22679,7 +23606,7 @@
                 <a:ea typeface="Trebuchet MS" pitchFamily="34" charset="-122"/>
                 <a:cs typeface="Trebuchet MS" pitchFamily="34" charset="-120"/>
               </a:rPr>
-              <a:t>ing</a:t>
+              <a:t>d</a:t>
             </a:r>
             <a:endParaRPr lang="en-US" sz="900" dirty="0"/>
           </a:p>
@@ -23110,7 +24037,7 @@
                 <a:ea typeface="Trebuchet MS" pitchFamily="34" charset="-122"/>
                 <a:cs typeface="Trebuchet MS" pitchFamily="34" charset="-120"/>
               </a:rPr>
-              <a:t>overpriced</a:t>
+              <a:t>repricing</a:t>
             </a:r>
             <a:endParaRPr lang="en-US" sz="2800" dirty="0"/>
           </a:p>
@@ -23937,7 +24864,7 @@
                 <a:ea typeface="Trebuchet MS" pitchFamily="34" charset="-122"/>
                 <a:cs typeface="Trebuchet MS" pitchFamily="34" charset="-120"/>
               </a:rPr>
-              <a:t>overpriced</a:t>
+              <a:t>repricing</a:t>
             </a:r>
             <a:endParaRPr lang="en-US" sz="2800" dirty="0"/>
           </a:p>
@@ -24076,7 +25003,7 @@
                 <a:ea typeface="Trebuchet MS" pitchFamily="34" charset="-122"/>
                 <a:cs typeface="Trebuchet MS" pitchFamily="34" charset="-120"/>
               </a:rPr>
-              <a:t>over</a:t>
+              <a:t>re</a:t>
             </a:r>
             <a:endParaRPr lang="en-US" sz="1300" dirty="0"/>
           </a:p>
@@ -24115,7 +25042,7 @@
                 <a:ea typeface="Calibri" pitchFamily="34" charset="-122"/>
                 <a:cs typeface="Calibri" pitchFamily="34" charset="-120"/>
               </a:rPr>
-              <a:t>too much / above</a:t>
+              <a:t>again</a:t>
             </a:r>
             <a:endParaRPr lang="en-US" sz="850" dirty="0"/>
           </a:p>
@@ -24300,7 +25227,7 @@
                 <a:ea typeface="Trebuchet MS" pitchFamily="34" charset="-122"/>
                 <a:cs typeface="Trebuchet MS" pitchFamily="34" charset="-120"/>
               </a:rPr>
-              <a:t>ed</a:t>
+              <a:t>ing</a:t>
             </a:r>
             <a:endParaRPr lang="en-US" sz="1300" dirty="0"/>
           </a:p>
@@ -24339,7 +25266,7 @@
                 <a:ea typeface="Calibri" pitchFamily="34" charset="-122"/>
                 <a:cs typeface="Calibri" pitchFamily="34" charset="-120"/>
               </a:rPr>
-              <a:t>past tense / having been done</a:t>
+              <a:t>ongoing action</a:t>
             </a:r>
             <a:endParaRPr lang="en-US" sz="850" dirty="0"/>
           </a:p>
@@ -24347,7 +25274,46 @@
       </p:sp>
       <p:sp>
         <p:nvSpPr>
-          <p:cNvPr id="25" name="Shape 23"/>
+          <p:cNvPr id="25" name="Text 23"/>
+          <p:cNvSpPr/>
+          <p:nvPr/>
+        </p:nvSpPr>
+        <p:spPr>
+          <a:xfrm>
+            <a:off x="6519672" y="2752344"/>
+            <a:ext cx="1828800" cy="182880"/>
+          </a:xfrm>
+          <a:prstGeom prst="rect">
+            <a:avLst/>
+          </a:prstGeom>
+          <a:noFill/>
+          <a:ln/>
+        </p:spPr>
+        <p:txBody>
+          <a:bodyPr wrap="square" lIns="0" tIns="0" rIns="0" bIns="0" rtlCol="0" anchor="t"/>
+          <a:lstStyle/>
+          <a:p>
+            <a:pPr algn="ctr" indent="0" marL="0">
+              <a:buNone/>
+            </a:pPr>
+            <a:r>
+              <a:rPr lang="en-US" sz="700" i="1" dirty="0">
+                <a:solidFill>
+                  <a:srgbClr val="94A3B8"/>
+                </a:solidFill>
+                <a:latin typeface="Calibri" pitchFamily="34" charset="0"/>
+                <a:ea typeface="Calibri" pitchFamily="34" charset="-122"/>
+                <a:cs typeface="Calibri" pitchFamily="34" charset="-120"/>
+              </a:rPr>
+              <a:t>'e' dropped before vowel suffix</a:t>
+            </a:r>
+            <a:endParaRPr lang="en-US" sz="700" dirty="0"/>
+          </a:p>
+        </p:txBody>
+      </p:sp>
+      <p:sp>
+        <p:nvSpPr>
+          <p:cNvPr id="26" name="Shape 24"/>
           <p:cNvSpPr/>
           <p:nvPr/>
         </p:nvSpPr>
@@ -24374,7 +25340,7 @@
       </p:sp>
       <p:sp>
         <p:nvSpPr>
-          <p:cNvPr id="26" name="Text 24"/>
+          <p:cNvPr id="27" name="Text 25"/>
           <p:cNvSpPr/>
           <p:nvPr/>
         </p:nvSpPr>
@@ -24413,7 +25379,7 @@
       </p:sp>
       <p:sp>
         <p:nvSpPr>
-          <p:cNvPr id="27" name="Shape 25"/>
+          <p:cNvPr id="28" name="Shape 26"/>
           <p:cNvSpPr/>
           <p:nvPr/>
         </p:nvSpPr>
@@ -24440,7 +25406,7 @@
       </p:sp>
       <p:sp>
         <p:nvSpPr>
-          <p:cNvPr id="28" name="Text 26"/>
+          <p:cNvPr id="29" name="Text 27"/>
           <p:cNvSpPr/>
           <p:nvPr/>
         </p:nvSpPr>
@@ -24479,7 +25445,7 @@
       </p:sp>
       <p:sp>
         <p:nvSpPr>
-          <p:cNvPr id="29" name="Shape 27"/>
+          <p:cNvPr id="30" name="Shape 28"/>
           <p:cNvSpPr/>
           <p:nvPr/>
         </p:nvSpPr>
@@ -24506,7 +25472,7 @@
       </p:sp>
       <p:sp>
         <p:nvSpPr>
-          <p:cNvPr id="30" name="Text 28"/>
+          <p:cNvPr id="31" name="Text 29"/>
           <p:cNvSpPr/>
           <p:nvPr/>
         </p:nvSpPr>
@@ -24545,7 +25511,7 @@
       </p:sp>
       <p:sp>
         <p:nvSpPr>
-          <p:cNvPr id="31" name="Shape 29"/>
+          <p:cNvPr id="32" name="Shape 30"/>
           <p:cNvSpPr/>
           <p:nvPr/>
         </p:nvSpPr>
@@ -24572,7 +25538,7 @@
       </p:sp>
       <p:sp>
         <p:nvSpPr>
-          <p:cNvPr id="32" name="Text 30"/>
+          <p:cNvPr id="33" name="Text 31"/>
           <p:cNvSpPr/>
           <p:nvPr/>
         </p:nvSpPr>
@@ -25753,7 +26719,7 @@
                 <a:ea typeface="Trebuchet MS" pitchFamily="34" charset="-122"/>
                 <a:cs typeface="Trebuchet MS" pitchFamily="34" charset="-120"/>
               </a:rPr>
-              <a:t>overpriced</a:t>
+              <a:t>repricing</a:t>
             </a:r>
             <a:endParaRPr lang="en-US" sz="2800" dirty="0"/>
           </a:p>
@@ -25892,7 +26858,7 @@
                 <a:ea typeface="Trebuchet MS" pitchFamily="34" charset="-122"/>
                 <a:cs typeface="Trebuchet MS" pitchFamily="34" charset="-120"/>
               </a:rPr>
-              <a:t>over</a:t>
+              <a:t>re</a:t>
             </a:r>
             <a:endParaRPr lang="en-US" sz="1300" dirty="0"/>
           </a:p>
@@ -25931,7 +26897,7 @@
                 <a:ea typeface="Calibri" pitchFamily="34" charset="-122"/>
                 <a:cs typeface="Calibri" pitchFamily="34" charset="-120"/>
               </a:rPr>
-              <a:t>too much / above</a:t>
+              <a:t>again</a:t>
             </a:r>
             <a:endParaRPr lang="en-US" sz="850" dirty="0"/>
           </a:p>
@@ -26116,7 +27082,7 @@
                 <a:ea typeface="Trebuchet MS" pitchFamily="34" charset="-122"/>
                 <a:cs typeface="Trebuchet MS" pitchFamily="34" charset="-120"/>
               </a:rPr>
-              <a:t>ed</a:t>
+              <a:t>ing</a:t>
             </a:r>
             <a:endParaRPr lang="en-US" sz="1300" dirty="0"/>
           </a:p>
@@ -26155,7 +27121,7 @@
                 <a:ea typeface="Calibri" pitchFamily="34" charset="-122"/>
                 <a:cs typeface="Calibri" pitchFamily="34" charset="-120"/>
               </a:rPr>
-              <a:t>past tense / having been done</a:t>
+              <a:t>ongoing action</a:t>
             </a:r>
             <a:endParaRPr lang="en-US" sz="850" dirty="0"/>
           </a:p>
@@ -26163,7 +27129,46 @@
       </p:sp>
       <p:sp>
         <p:nvSpPr>
-          <p:cNvPr id="25" name="Shape 23"/>
+          <p:cNvPr id="25" name="Text 23"/>
+          <p:cNvSpPr/>
+          <p:nvPr/>
+        </p:nvSpPr>
+        <p:spPr>
+          <a:xfrm>
+            <a:off x="6519672" y="2752344"/>
+            <a:ext cx="1828800" cy="182880"/>
+          </a:xfrm>
+          <a:prstGeom prst="rect">
+            <a:avLst/>
+          </a:prstGeom>
+          <a:noFill/>
+          <a:ln/>
+        </p:spPr>
+        <p:txBody>
+          <a:bodyPr wrap="square" lIns="0" tIns="0" rIns="0" bIns="0" rtlCol="0" anchor="t"/>
+          <a:lstStyle/>
+          <a:p>
+            <a:pPr algn="ctr" indent="0" marL="0">
+              <a:buNone/>
+            </a:pPr>
+            <a:r>
+              <a:rPr lang="en-US" sz="700" i="1" dirty="0">
+                <a:solidFill>
+                  <a:srgbClr val="94A3B8"/>
+                </a:solidFill>
+                <a:latin typeface="Calibri" pitchFamily="34" charset="0"/>
+                <a:ea typeface="Calibri" pitchFamily="34" charset="-122"/>
+                <a:cs typeface="Calibri" pitchFamily="34" charset="-120"/>
+              </a:rPr>
+              <a:t>'e' dropped before vowel suffix</a:t>
+            </a:r>
+            <a:endParaRPr lang="en-US" sz="700" dirty="0"/>
+          </a:p>
+        </p:txBody>
+      </p:sp>
+      <p:sp>
+        <p:nvSpPr>
+          <p:cNvPr id="26" name="Shape 24"/>
           <p:cNvSpPr/>
           <p:nvPr/>
         </p:nvSpPr>
@@ -26190,7 +27195,7 @@
       </p:sp>
       <p:sp>
         <p:nvSpPr>
-          <p:cNvPr id="26" name="Text 24"/>
+          <p:cNvPr id="27" name="Text 25"/>
           <p:cNvSpPr/>
           <p:nvPr/>
         </p:nvSpPr>
@@ -26229,7 +27234,7 @@
       </p:sp>
       <p:sp>
         <p:nvSpPr>
-          <p:cNvPr id="27" name="Shape 25"/>
+          <p:cNvPr id="28" name="Shape 26"/>
           <p:cNvSpPr/>
           <p:nvPr/>
         </p:nvSpPr>
@@ -26256,7 +27261,7 @@
       </p:sp>
       <p:sp>
         <p:nvSpPr>
-          <p:cNvPr id="28" name="Shape 26"/>
+          <p:cNvPr id="29" name="Shape 27"/>
           <p:cNvSpPr/>
           <p:nvPr/>
         </p:nvSpPr>
@@ -26283,7 +27288,7 @@
       </p:sp>
       <p:sp>
         <p:nvSpPr>
-          <p:cNvPr id="29" name="Text 27"/>
+          <p:cNvPr id="30" name="Text 28"/>
           <p:cNvSpPr/>
           <p:nvPr/>
         </p:nvSpPr>
@@ -26314,7 +27319,7 @@
                 <a:ea typeface="Trebuchet MS" pitchFamily="34" charset="-122"/>
                 <a:cs typeface="Trebuchet MS" pitchFamily="34" charset="-120"/>
               </a:rPr>
-              <a:t>o</a:t>
+              <a:t>re</a:t>
             </a:r>
             <a:endParaRPr lang="en-US" sz="1400" dirty="0"/>
           </a:p>
@@ -26322,7 +27327,7 @@
       </p:sp>
       <p:sp>
         <p:nvSpPr>
-          <p:cNvPr id="30" name="Text 28"/>
+          <p:cNvPr id="31" name="Text 29"/>
           <p:cNvSpPr/>
           <p:nvPr/>
         </p:nvSpPr>
@@ -26361,7 +27366,7 @@
       </p:sp>
       <p:sp>
         <p:nvSpPr>
-          <p:cNvPr id="31" name="Shape 29"/>
+          <p:cNvPr id="32" name="Shape 30"/>
           <p:cNvSpPr/>
           <p:nvPr/>
         </p:nvSpPr>
@@ -26388,7 +27393,7 @@
       </p:sp>
       <p:sp>
         <p:nvSpPr>
-          <p:cNvPr id="32" name="Text 30"/>
+          <p:cNvPr id="33" name="Text 31"/>
           <p:cNvSpPr/>
           <p:nvPr/>
         </p:nvSpPr>
@@ -26419,7 +27424,7 @@
                 <a:ea typeface="Trebuchet MS" pitchFamily="34" charset="-122"/>
                 <a:cs typeface="Trebuchet MS" pitchFamily="34" charset="-120"/>
               </a:rPr>
-              <a:t>ver</a:t>
+              <a:t>pri</a:t>
             </a:r>
             <a:endParaRPr lang="en-US" sz="1400" dirty="0"/>
           </a:p>
@@ -26427,7 +27432,7 @@
       </p:sp>
       <p:sp>
         <p:nvSpPr>
-          <p:cNvPr id="33" name="Text 31"/>
+          <p:cNvPr id="34" name="Text 32"/>
           <p:cNvSpPr/>
           <p:nvPr/>
         </p:nvSpPr>
@@ -26466,7 +27471,7 @@
       </p:sp>
       <p:sp>
         <p:nvSpPr>
-          <p:cNvPr id="34" name="Shape 32"/>
+          <p:cNvPr id="35" name="Shape 33"/>
           <p:cNvSpPr/>
           <p:nvPr/>
         </p:nvSpPr>
@@ -26493,7 +27498,7 @@
       </p:sp>
       <p:sp>
         <p:nvSpPr>
-          <p:cNvPr id="35" name="Text 33"/>
+          <p:cNvPr id="36" name="Text 34"/>
           <p:cNvSpPr/>
           <p:nvPr/>
         </p:nvSpPr>
@@ -26524,7 +27529,7 @@
                 <a:ea typeface="Trebuchet MS" pitchFamily="34" charset="-122"/>
                 <a:cs typeface="Trebuchet MS" pitchFamily="34" charset="-120"/>
               </a:rPr>
-              <a:t>priced</a:t>
+              <a:t>cing</a:t>
             </a:r>
             <a:endParaRPr lang="en-US" sz="1400" dirty="0"/>
           </a:p>
@@ -26532,7 +27537,7 @@
       </p:sp>
       <p:sp>
         <p:nvSpPr>
-          <p:cNvPr id="36" name="Shape 34"/>
+          <p:cNvPr id="37" name="Shape 35"/>
           <p:cNvSpPr/>
           <p:nvPr/>
         </p:nvSpPr>
@@ -26559,7 +27564,7 @@
       </p:sp>
       <p:sp>
         <p:nvSpPr>
-          <p:cNvPr id="37" name="Text 35"/>
+          <p:cNvPr id="38" name="Text 36"/>
           <p:cNvSpPr/>
           <p:nvPr/>
         </p:nvSpPr>
@@ -26598,7 +27603,7 @@
       </p:sp>
       <p:sp>
         <p:nvSpPr>
-          <p:cNvPr id="38" name="Shape 36"/>
+          <p:cNvPr id="39" name="Shape 37"/>
           <p:cNvSpPr/>
           <p:nvPr/>
         </p:nvSpPr>
@@ -26625,7 +27630,7 @@
       </p:sp>
       <p:sp>
         <p:nvSpPr>
-          <p:cNvPr id="39" name="Text 37"/>
+          <p:cNvPr id="40" name="Text 38"/>
           <p:cNvSpPr/>
           <p:nvPr/>
         </p:nvSpPr>
@@ -27087,7 +28092,7 @@
                 <a:ea typeface="Trebuchet MS" pitchFamily="34" charset="-122"/>
                 <a:cs typeface="Trebuchet MS" pitchFamily="34" charset="-120"/>
               </a:rPr>
-              <a:t>overpriced</a:t>
+              <a:t>repricing</a:t>
             </a:r>
             <a:endParaRPr lang="en-US" sz="2800" dirty="0"/>
           </a:p>
@@ -27226,7 +28231,7 @@
                 <a:ea typeface="Trebuchet MS" pitchFamily="34" charset="-122"/>
                 <a:cs typeface="Trebuchet MS" pitchFamily="34" charset="-120"/>
               </a:rPr>
-              <a:t>over</a:t>
+              <a:t>re</a:t>
             </a:r>
             <a:endParaRPr lang="en-US" sz="1300" dirty="0"/>
           </a:p>
@@ -27265,7 +28270,7 @@
                 <a:ea typeface="Calibri" pitchFamily="34" charset="-122"/>
                 <a:cs typeface="Calibri" pitchFamily="34" charset="-120"/>
               </a:rPr>
-              <a:t>too much / above</a:t>
+              <a:t>again</a:t>
             </a:r>
             <a:endParaRPr lang="en-US" sz="850" dirty="0"/>
           </a:p>
@@ -27450,7 +28455,7 @@
                 <a:ea typeface="Trebuchet MS" pitchFamily="34" charset="-122"/>
                 <a:cs typeface="Trebuchet MS" pitchFamily="34" charset="-120"/>
               </a:rPr>
-              <a:t>ed</a:t>
+              <a:t>ing</a:t>
             </a:r>
             <a:endParaRPr lang="en-US" sz="1300" dirty="0"/>
           </a:p>
@@ -27489,7 +28494,7 @@
                 <a:ea typeface="Calibri" pitchFamily="34" charset="-122"/>
                 <a:cs typeface="Calibri" pitchFamily="34" charset="-120"/>
               </a:rPr>
-              <a:t>past tense / having been done</a:t>
+              <a:t>ongoing action</a:t>
             </a:r>
             <a:endParaRPr lang="en-US" sz="850" dirty="0"/>
           </a:p>
@@ -27497,7 +28502,46 @@
       </p:sp>
       <p:sp>
         <p:nvSpPr>
-          <p:cNvPr id="25" name="Shape 23"/>
+          <p:cNvPr id="25" name="Text 23"/>
+          <p:cNvSpPr/>
+          <p:nvPr/>
+        </p:nvSpPr>
+        <p:spPr>
+          <a:xfrm>
+            <a:off x="6519672" y="2752344"/>
+            <a:ext cx="1828800" cy="182880"/>
+          </a:xfrm>
+          <a:prstGeom prst="rect">
+            <a:avLst/>
+          </a:prstGeom>
+          <a:noFill/>
+          <a:ln/>
+        </p:spPr>
+        <p:txBody>
+          <a:bodyPr wrap="square" lIns="0" tIns="0" rIns="0" bIns="0" rtlCol="0" anchor="t"/>
+          <a:lstStyle/>
+          <a:p>
+            <a:pPr algn="ctr" indent="0" marL="0">
+              <a:buNone/>
+            </a:pPr>
+            <a:r>
+              <a:rPr lang="en-US" sz="700" i="1" dirty="0">
+                <a:solidFill>
+                  <a:srgbClr val="94A3B8"/>
+                </a:solidFill>
+                <a:latin typeface="Calibri" pitchFamily="34" charset="0"/>
+                <a:ea typeface="Calibri" pitchFamily="34" charset="-122"/>
+                <a:cs typeface="Calibri" pitchFamily="34" charset="-120"/>
+              </a:rPr>
+              <a:t>'e' dropped before vowel suffix</a:t>
+            </a:r>
+            <a:endParaRPr lang="en-US" sz="700" dirty="0"/>
+          </a:p>
+        </p:txBody>
+      </p:sp>
+      <p:sp>
+        <p:nvSpPr>
+          <p:cNvPr id="26" name="Shape 24"/>
           <p:cNvSpPr/>
           <p:nvPr/>
         </p:nvSpPr>
@@ -27524,7 +28568,7 @@
       </p:sp>
       <p:sp>
         <p:nvSpPr>
-          <p:cNvPr id="26" name="Text 24"/>
+          <p:cNvPr id="27" name="Text 25"/>
           <p:cNvSpPr/>
           <p:nvPr/>
         </p:nvSpPr>
@@ -27563,7 +28607,7 @@
       </p:sp>
       <p:sp>
         <p:nvSpPr>
-          <p:cNvPr id="27" name="Shape 25"/>
+          <p:cNvPr id="28" name="Shape 26"/>
           <p:cNvSpPr/>
           <p:nvPr/>
         </p:nvSpPr>
@@ -27590,7 +28634,7 @@
       </p:sp>
       <p:sp>
         <p:nvSpPr>
-          <p:cNvPr id="28" name="Shape 26"/>
+          <p:cNvPr id="29" name="Shape 27"/>
           <p:cNvSpPr/>
           <p:nvPr/>
         </p:nvSpPr>
@@ -27617,7 +28661,7 @@
       </p:sp>
       <p:sp>
         <p:nvSpPr>
-          <p:cNvPr id="29" name="Text 27"/>
+          <p:cNvPr id="30" name="Text 28"/>
           <p:cNvSpPr/>
           <p:nvPr/>
         </p:nvSpPr>
@@ -27648,7 +28692,7 @@
                 <a:ea typeface="Trebuchet MS" pitchFamily="34" charset="-122"/>
                 <a:cs typeface="Trebuchet MS" pitchFamily="34" charset="-120"/>
               </a:rPr>
-              <a:t>o</a:t>
+              <a:t>re</a:t>
             </a:r>
             <a:endParaRPr lang="en-US" sz="1400" dirty="0"/>
           </a:p>
@@ -27656,7 +28700,7 @@
       </p:sp>
       <p:sp>
         <p:nvSpPr>
-          <p:cNvPr id="30" name="Text 28"/>
+          <p:cNvPr id="31" name="Text 29"/>
           <p:cNvSpPr/>
           <p:nvPr/>
         </p:nvSpPr>
@@ -27695,7 +28739,7 @@
       </p:sp>
       <p:sp>
         <p:nvSpPr>
-          <p:cNvPr id="31" name="Shape 29"/>
+          <p:cNvPr id="32" name="Shape 30"/>
           <p:cNvSpPr/>
           <p:nvPr/>
         </p:nvSpPr>
@@ -27722,7 +28766,7 @@
       </p:sp>
       <p:sp>
         <p:nvSpPr>
-          <p:cNvPr id="32" name="Text 30"/>
+          <p:cNvPr id="33" name="Text 31"/>
           <p:cNvSpPr/>
           <p:nvPr/>
         </p:nvSpPr>
@@ -27753,7 +28797,7 @@
                 <a:ea typeface="Trebuchet MS" pitchFamily="34" charset="-122"/>
                 <a:cs typeface="Trebuchet MS" pitchFamily="34" charset="-120"/>
               </a:rPr>
-              <a:t>ver</a:t>
+              <a:t>pri</a:t>
             </a:r>
             <a:endParaRPr lang="en-US" sz="1400" dirty="0"/>
           </a:p>
@@ -27761,7 +28805,7 @@
       </p:sp>
       <p:sp>
         <p:nvSpPr>
-          <p:cNvPr id="33" name="Text 31"/>
+          <p:cNvPr id="34" name="Text 32"/>
           <p:cNvSpPr/>
           <p:nvPr/>
         </p:nvSpPr>
@@ -27800,7 +28844,7 @@
       </p:sp>
       <p:sp>
         <p:nvSpPr>
-          <p:cNvPr id="34" name="Shape 32"/>
+          <p:cNvPr id="35" name="Shape 33"/>
           <p:cNvSpPr/>
           <p:nvPr/>
         </p:nvSpPr>
@@ -27827,7 +28871,7 @@
       </p:sp>
       <p:sp>
         <p:nvSpPr>
-          <p:cNvPr id="35" name="Text 33"/>
+          <p:cNvPr id="36" name="Text 34"/>
           <p:cNvSpPr/>
           <p:nvPr/>
         </p:nvSpPr>
@@ -27858,7 +28902,7 @@
                 <a:ea typeface="Trebuchet MS" pitchFamily="34" charset="-122"/>
                 <a:cs typeface="Trebuchet MS" pitchFamily="34" charset="-120"/>
               </a:rPr>
-              <a:t>priced</a:t>
+              <a:t>cing</a:t>
             </a:r>
             <a:endParaRPr lang="en-US" sz="1400" dirty="0"/>
           </a:p>
@@ -27866,7 +28910,7 @@
       </p:sp>
       <p:sp>
         <p:nvSpPr>
-          <p:cNvPr id="36" name="Shape 34"/>
+          <p:cNvPr id="37" name="Shape 35"/>
           <p:cNvSpPr/>
           <p:nvPr/>
         </p:nvSpPr>
@@ -27893,7 +28937,7 @@
       </p:sp>
       <p:sp>
         <p:nvSpPr>
-          <p:cNvPr id="37" name="Text 35"/>
+          <p:cNvPr id="38" name="Text 36"/>
           <p:cNvSpPr/>
           <p:nvPr/>
         </p:nvSpPr>
@@ -27932,7 +28976,7 @@
       </p:sp>
       <p:sp>
         <p:nvSpPr>
-          <p:cNvPr id="38" name="Shape 36"/>
+          <p:cNvPr id="39" name="Shape 37"/>
           <p:cNvSpPr/>
           <p:nvPr/>
         </p:nvSpPr>
@@ -27959,7 +29003,7 @@
       </p:sp>
       <p:sp>
         <p:nvSpPr>
-          <p:cNvPr id="39" name="Shape 37"/>
+          <p:cNvPr id="40" name="Shape 38"/>
           <p:cNvSpPr/>
           <p:nvPr/>
         </p:nvSpPr>
@@ -27986,7 +29030,7 @@
       </p:sp>
       <p:sp>
         <p:nvSpPr>
-          <p:cNvPr id="40" name="Text 38"/>
+          <p:cNvPr id="41" name="Text 39"/>
           <p:cNvSpPr/>
           <p:nvPr/>
         </p:nvSpPr>
@@ -28017,7 +29061,7 @@
                 <a:ea typeface="Trebuchet MS" pitchFamily="34" charset="-122"/>
                 <a:cs typeface="Trebuchet MS" pitchFamily="34" charset="-120"/>
               </a:rPr>
-              <a:t>o</a:t>
+              <a:t>r</a:t>
             </a:r>
             <a:endParaRPr lang="en-US" sz="900" dirty="0"/>
           </a:p>
@@ -28025,7 +29069,7 @@
       </p:sp>
       <p:sp>
         <p:nvSpPr>
-          <p:cNvPr id="41" name="Shape 39"/>
+          <p:cNvPr id="42" name="Shape 40"/>
           <p:cNvSpPr/>
           <p:nvPr/>
         </p:nvSpPr>
@@ -28052,7 +29096,7 @@
       </p:sp>
       <p:sp>
         <p:nvSpPr>
-          <p:cNvPr id="42" name="Text 40"/>
+          <p:cNvPr id="43" name="Text 41"/>
           <p:cNvSpPr/>
           <p:nvPr/>
         </p:nvSpPr>
@@ -28083,7 +29127,7 @@
                 <a:ea typeface="Trebuchet MS" pitchFamily="34" charset="-122"/>
                 <a:cs typeface="Trebuchet MS" pitchFamily="34" charset="-120"/>
               </a:rPr>
-              <a:t>v</a:t>
+              <a:t>e</a:t>
             </a:r>
             <a:endParaRPr lang="en-US" sz="900" dirty="0"/>
           </a:p>
@@ -28091,7 +29135,7 @@
       </p:sp>
       <p:sp>
         <p:nvSpPr>
-          <p:cNvPr id="43" name="Shape 41"/>
+          <p:cNvPr id="44" name="Shape 42"/>
           <p:cNvSpPr/>
           <p:nvPr/>
         </p:nvSpPr>
@@ -28118,7 +29162,7 @@
       </p:sp>
       <p:sp>
         <p:nvSpPr>
-          <p:cNvPr id="44" name="Text 42"/>
+          <p:cNvPr id="45" name="Text 43"/>
           <p:cNvSpPr/>
           <p:nvPr/>
         </p:nvSpPr>
@@ -28149,7 +29193,7 @@
                 <a:ea typeface="Trebuchet MS" pitchFamily="34" charset="-122"/>
                 <a:cs typeface="Trebuchet MS" pitchFamily="34" charset="-120"/>
               </a:rPr>
-              <a:t>er</a:t>
+              <a:t>p</a:t>
             </a:r>
             <a:endParaRPr lang="en-US" sz="900" dirty="0"/>
           </a:p>
@@ -28157,7 +29201,7 @@
       </p:sp>
       <p:sp>
         <p:nvSpPr>
-          <p:cNvPr id="45" name="Shape 43"/>
+          <p:cNvPr id="46" name="Shape 44"/>
           <p:cNvSpPr/>
           <p:nvPr/>
         </p:nvSpPr>
@@ -28184,7 +29228,7 @@
       </p:sp>
       <p:sp>
         <p:nvSpPr>
-          <p:cNvPr id="46" name="Text 44"/>
+          <p:cNvPr id="47" name="Text 45"/>
           <p:cNvSpPr/>
           <p:nvPr/>
         </p:nvSpPr>
@@ -28215,7 +29259,7 @@
                 <a:ea typeface="Trebuchet MS" pitchFamily="34" charset="-122"/>
                 <a:cs typeface="Trebuchet MS" pitchFamily="34" charset="-120"/>
               </a:rPr>
-              <a:t>p</a:t>
+              <a:t>r</a:t>
             </a:r>
             <a:endParaRPr lang="en-US" sz="900" dirty="0"/>
           </a:p>
@@ -28223,7 +29267,7 @@
       </p:sp>
       <p:sp>
         <p:nvSpPr>
-          <p:cNvPr id="47" name="Shape 45"/>
+          <p:cNvPr id="48" name="Shape 46"/>
           <p:cNvSpPr/>
           <p:nvPr/>
         </p:nvSpPr>
@@ -28250,7 +29294,7 @@
       </p:sp>
       <p:sp>
         <p:nvSpPr>
-          <p:cNvPr id="48" name="Text 46"/>
+          <p:cNvPr id="49" name="Text 47"/>
           <p:cNvSpPr/>
           <p:nvPr/>
         </p:nvSpPr>
@@ -28281,7 +29325,7 @@
                 <a:ea typeface="Trebuchet MS" pitchFamily="34" charset="-122"/>
                 <a:cs typeface="Trebuchet MS" pitchFamily="34" charset="-120"/>
               </a:rPr>
-              <a:t>r</a:t>
+              <a:t>i</a:t>
             </a:r>
             <a:endParaRPr lang="en-US" sz="900" dirty="0"/>
           </a:p>
@@ -28289,7 +29333,7 @@
       </p:sp>
       <p:sp>
         <p:nvSpPr>
-          <p:cNvPr id="49" name="Shape 47"/>
+          <p:cNvPr id="50" name="Shape 48"/>
           <p:cNvSpPr/>
           <p:nvPr/>
         </p:nvSpPr>
@@ -28316,7 +29360,7 @@
       </p:sp>
       <p:sp>
         <p:nvSpPr>
-          <p:cNvPr id="50" name="Text 48"/>
+          <p:cNvPr id="51" name="Text 49"/>
           <p:cNvSpPr/>
           <p:nvPr/>
         </p:nvSpPr>
@@ -28347,7 +29391,7 @@
                 <a:ea typeface="Trebuchet MS" pitchFamily="34" charset="-122"/>
                 <a:cs typeface="Trebuchet MS" pitchFamily="34" charset="-120"/>
               </a:rPr>
-              <a:t>i</a:t>
+              <a:t>c</a:t>
             </a:r>
             <a:endParaRPr lang="en-US" sz="900" dirty="0"/>
           </a:p>
@@ -28355,7 +29399,46 @@
       </p:sp>
       <p:sp>
         <p:nvSpPr>
-          <p:cNvPr id="51" name="Shape 49"/>
+          <p:cNvPr id="52" name="Text 50"/>
+          <p:cNvSpPr/>
+          <p:nvPr/>
+        </p:nvSpPr>
+        <p:spPr>
+          <a:xfrm>
+            <a:off x="6062472" y="4572000"/>
+            <a:ext cx="685800" cy="219456"/>
+          </a:xfrm>
+          <a:prstGeom prst="rect">
+            <a:avLst/>
+          </a:prstGeom>
+          <a:noFill/>
+          <a:ln/>
+        </p:spPr>
+        <p:txBody>
+          <a:bodyPr wrap="square" lIns="0" tIns="0" rIns="0" bIns="0" rtlCol="0" anchor="t"/>
+          <a:lstStyle/>
+          <a:p>
+            <a:pPr algn="ctr" indent="0" marL="0">
+              <a:buNone/>
+            </a:pPr>
+            <a:r>
+              <a:rPr lang="en-US" sz="750" i="1" dirty="0">
+                <a:solidFill>
+                  <a:srgbClr val="94A3B8"/>
+                </a:solidFill>
+                <a:latin typeface="Calibri" pitchFamily="34" charset="0"/>
+                <a:ea typeface="Calibri" pitchFamily="34" charset="-122"/>
+                <a:cs typeface="Calibri" pitchFamily="34" charset="-120"/>
+              </a:rPr>
+              <a:t>/s/</a:t>
+            </a:r>
+            <a:endParaRPr lang="en-US" sz="750" dirty="0"/>
+          </a:p>
+        </p:txBody>
+      </p:sp>
+      <p:sp>
+        <p:nvSpPr>
+          <p:cNvPr id="53" name="Shape 51"/>
           <p:cNvSpPr/>
           <p:nvPr/>
         </p:nvSpPr>
@@ -28382,7 +29465,7 @@
       </p:sp>
       <p:sp>
         <p:nvSpPr>
-          <p:cNvPr id="52" name="Text 50"/>
+          <p:cNvPr id="54" name="Text 52"/>
           <p:cNvSpPr/>
           <p:nvPr/>
         </p:nvSpPr>
@@ -28413,7 +29496,7 @@
                 <a:ea typeface="Trebuchet MS" pitchFamily="34" charset="-122"/>
                 <a:cs typeface="Trebuchet MS" pitchFamily="34" charset="-120"/>
               </a:rPr>
-              <a:t>ce</a:t>
+              <a:t>i</a:t>
             </a:r>
             <a:endParaRPr lang="en-US" sz="900" dirty="0"/>
           </a:p>
@@ -28421,46 +29504,7 @@
       </p:sp>
       <p:sp>
         <p:nvSpPr>
-          <p:cNvPr id="53" name="Text 51"/>
-          <p:cNvSpPr/>
-          <p:nvPr/>
-        </p:nvSpPr>
-        <p:spPr>
-          <a:xfrm>
-            <a:off x="6870192" y="4572000"/>
-            <a:ext cx="685800" cy="219456"/>
-          </a:xfrm>
-          <a:prstGeom prst="rect">
-            <a:avLst/>
-          </a:prstGeom>
-          <a:noFill/>
-          <a:ln/>
-        </p:spPr>
-        <p:txBody>
-          <a:bodyPr wrap="square" lIns="0" tIns="0" rIns="0" bIns="0" rtlCol="0" anchor="t"/>
-          <a:lstStyle/>
-          <a:p>
-            <a:pPr algn="ctr" indent="0" marL="0">
-              <a:buNone/>
-            </a:pPr>
-            <a:r>
-              <a:rPr lang="en-US" sz="750" i="1" dirty="0">
-                <a:solidFill>
-                  <a:srgbClr val="94A3B8"/>
-                </a:solidFill>
-                <a:latin typeface="Calibri" pitchFamily="34" charset="0"/>
-                <a:ea typeface="Calibri" pitchFamily="34" charset="-122"/>
-                <a:cs typeface="Calibri" pitchFamily="34" charset="-120"/>
-              </a:rPr>
-              <a:t>/s/</a:t>
-            </a:r>
-            <a:endParaRPr lang="en-US" sz="750" dirty="0"/>
-          </a:p>
-        </p:txBody>
-      </p:sp>
-      <p:sp>
-        <p:nvSpPr>
-          <p:cNvPr id="54" name="Shape 52"/>
+          <p:cNvPr id="55" name="Shape 53"/>
           <p:cNvSpPr/>
           <p:nvPr/>
         </p:nvSpPr>
@@ -28487,7 +29531,7 @@
       </p:sp>
       <p:sp>
         <p:nvSpPr>
-          <p:cNvPr id="55" name="Text 53"/>
+          <p:cNvPr id="56" name="Text 54"/>
           <p:cNvSpPr/>
           <p:nvPr/>
         </p:nvSpPr>
@@ -28518,7 +29562,7 @@
                 <a:ea typeface="Trebuchet MS" pitchFamily="34" charset="-122"/>
                 <a:cs typeface="Trebuchet MS" pitchFamily="34" charset="-120"/>
               </a:rPr>
-              <a:t>d</a:t>
+              <a:t>ng</a:t>
             </a:r>
             <a:endParaRPr lang="en-US" sz="900" dirty="0"/>
           </a:p>
@@ -28949,7 +29993,7 @@
                 <a:ea typeface="Trebuchet MS" pitchFamily="34" charset="-122"/>
                 <a:cs typeface="Trebuchet MS" pitchFamily="34" charset="-120"/>
               </a:rPr>
-              <a:t>underpriced</a:t>
+              <a:t>pricing</a:t>
             </a:r>
             <a:endParaRPr lang="en-US" sz="2800" dirty="0"/>
           </a:p>
@@ -29776,7 +30820,7 @@
                 <a:ea typeface="Trebuchet MS" pitchFamily="34" charset="-122"/>
                 <a:cs typeface="Trebuchet MS" pitchFamily="34" charset="-120"/>
               </a:rPr>
-              <a:t>underpriced</a:t>
+              <a:t>pricing</a:t>
             </a:r>
             <a:endParaRPr lang="en-US" sz="2800" dirty="0"/>
           </a:p>
@@ -29856,7 +30900,7 @@
         </p:nvSpPr>
         <p:spPr>
           <a:xfrm>
-            <a:off x="2221992" y="2258568"/>
+            <a:off x="2938272" y="2258568"/>
             <a:ext cx="1828800" cy="292608"/>
           </a:xfrm>
           <a:prstGeom prst="rect">
@@ -29865,11 +30909,11 @@
             </a:avLst>
           </a:prstGeom>
           <a:solidFill>
-            <a:srgbClr val="DDD6FE"/>
+            <a:srgbClr val="CCFBF1"/>
           </a:solidFill>
           <a:ln w="19050">
             <a:solidFill>
-              <a:srgbClr val="7C3AED"/>
+              <a:srgbClr val="0D9488"/>
             </a:solidFill>
             <a:prstDash val="solid"/>
           </a:ln>
@@ -29890,7 +30934,7 @@
         </p:nvSpPr>
         <p:spPr>
           <a:xfrm>
-            <a:off x="2221992" y="2258568"/>
+            <a:off x="2938272" y="2258568"/>
             <a:ext cx="1828800" cy="292608"/>
           </a:xfrm>
           <a:prstGeom prst="rect">
@@ -29909,13 +30953,13 @@
             <a:r>
               <a:rPr lang="en-US" sz="1300" b="1" dirty="0">
                 <a:solidFill>
-                  <a:srgbClr val="4C1D95"/>
+                  <a:srgbClr val="0F766E"/>
                 </a:solidFill>
                 <a:latin typeface="Trebuchet MS" pitchFamily="34" charset="0"/>
                 <a:ea typeface="Trebuchet MS" pitchFamily="34" charset="-122"/>
                 <a:cs typeface="Trebuchet MS" pitchFamily="34" charset="-120"/>
               </a:rPr>
-              <a:t>under</a:t>
+              <a:t>price</a:t>
             </a:r>
             <a:endParaRPr lang="en-US" sz="1300" dirty="0"/>
           </a:p>
@@ -29929,7 +30973,7 @@
         </p:nvSpPr>
         <p:spPr>
           <a:xfrm>
-            <a:off x="2221992" y="2569464"/>
+            <a:off x="2938272" y="2569464"/>
             <a:ext cx="1828800" cy="201168"/>
           </a:xfrm>
           <a:prstGeom prst="rect">
@@ -29954,7 +30998,7 @@
                 <a:ea typeface="Calibri" pitchFamily="34" charset="-122"/>
                 <a:cs typeface="Calibri" pitchFamily="34" charset="-120"/>
               </a:rPr>
-              <a:t>below / too little</a:t>
+              <a:t>value or cost</a:t>
             </a:r>
             <a:endParaRPr lang="en-US" sz="850" dirty="0"/>
           </a:p>
@@ -29968,7 +31012,7 @@
         </p:nvSpPr>
         <p:spPr>
           <a:xfrm>
-            <a:off x="4370832" y="2258568"/>
+            <a:off x="5803392" y="2258568"/>
             <a:ext cx="1828800" cy="292608"/>
           </a:xfrm>
           <a:prstGeom prst="rect">
@@ -29977,11 +31021,11 @@
             </a:avLst>
           </a:prstGeom>
           <a:solidFill>
-            <a:srgbClr val="CCFBF1"/>
+            <a:srgbClr val="FCE7F3"/>
           </a:solidFill>
           <a:ln w="19050">
             <a:solidFill>
-              <a:srgbClr val="0D9488"/>
+              <a:srgbClr val="DB2777"/>
             </a:solidFill>
             <a:prstDash val="solid"/>
           </a:ln>
@@ -30002,7 +31046,7 @@
         </p:nvSpPr>
         <p:spPr>
           <a:xfrm>
-            <a:off x="4370832" y="2258568"/>
+            <a:off x="5803392" y="2258568"/>
             <a:ext cx="1828800" cy="292608"/>
           </a:xfrm>
           <a:prstGeom prst="rect">
@@ -30021,13 +31065,13 @@
             <a:r>
               <a:rPr lang="en-US" sz="1300" b="1" dirty="0">
                 <a:solidFill>
-                  <a:srgbClr val="0F766E"/>
+                  <a:srgbClr val="9D174D"/>
                 </a:solidFill>
                 <a:latin typeface="Trebuchet MS" pitchFamily="34" charset="0"/>
                 <a:ea typeface="Trebuchet MS" pitchFamily="34" charset="-122"/>
                 <a:cs typeface="Trebuchet MS" pitchFamily="34" charset="-120"/>
               </a:rPr>
-              <a:t>price</a:t>
+              <a:t>ing</a:t>
             </a:r>
             <a:endParaRPr lang="en-US" sz="1300" dirty="0"/>
           </a:p>
@@ -30041,7 +31085,7 @@
         </p:nvSpPr>
         <p:spPr>
           <a:xfrm>
-            <a:off x="4370832" y="2569464"/>
+            <a:off x="5803392" y="2569464"/>
             <a:ext cx="1828800" cy="201168"/>
           </a:xfrm>
           <a:prstGeom prst="rect">
@@ -30066,7 +31110,7 @@
                 <a:ea typeface="Calibri" pitchFamily="34" charset="-122"/>
                 <a:cs typeface="Calibri" pitchFamily="34" charset="-120"/>
               </a:rPr>
-              <a:t>value or cost</a:t>
+              <a:t>ongoing action</a:t>
             </a:r>
             <a:endParaRPr lang="en-US" sz="850" dirty="0"/>
           </a:p>
@@ -30074,48 +31118,80 @@
       </p:sp>
       <p:sp>
         <p:nvSpPr>
-          <p:cNvPr id="22" name="Shape 20"/>
-          <p:cNvSpPr/>
-          <p:nvPr/>
-        </p:nvSpPr>
-        <p:spPr>
-          <a:xfrm>
-            <a:off x="6519672" y="2258568"/>
-            <a:ext cx="1828800" cy="292608"/>
+          <p:cNvPr id="22" name="Text 20"/>
+          <p:cNvSpPr/>
+          <p:nvPr/>
+        </p:nvSpPr>
+        <p:spPr>
+          <a:xfrm>
+            <a:off x="5803392" y="2752344"/>
+            <a:ext cx="1828800" cy="182880"/>
+          </a:xfrm>
+          <a:prstGeom prst="rect">
+            <a:avLst/>
+          </a:prstGeom>
+          <a:noFill/>
+          <a:ln/>
+        </p:spPr>
+        <p:txBody>
+          <a:bodyPr wrap="square" lIns="0" tIns="0" rIns="0" bIns="0" rtlCol="0" anchor="t"/>
+          <a:lstStyle/>
+          <a:p>
+            <a:pPr algn="ctr" indent="0" marL="0">
+              <a:buNone/>
+            </a:pPr>
+            <a:r>
+              <a:rPr lang="en-US" sz="700" i="1" dirty="0">
+                <a:solidFill>
+                  <a:srgbClr val="94A3B8"/>
+                </a:solidFill>
+                <a:latin typeface="Calibri" pitchFamily="34" charset="0"/>
+                <a:ea typeface="Calibri" pitchFamily="34" charset="-122"/>
+                <a:cs typeface="Calibri" pitchFamily="34" charset="-120"/>
+              </a:rPr>
+              <a:t>'e' dropped before vowel suffix</a:t>
+            </a:r>
+            <a:endParaRPr lang="en-US" sz="700" dirty="0"/>
+          </a:p>
+        </p:txBody>
+      </p:sp>
+      <p:sp>
+        <p:nvSpPr>
+          <p:cNvPr id="23" name="Shape 21"/>
+          <p:cNvSpPr/>
+          <p:nvPr/>
+        </p:nvSpPr>
+        <p:spPr>
+          <a:xfrm>
+            <a:off x="365760" y="3273552"/>
+            <a:ext cx="1371600" cy="658368"/>
           </a:xfrm>
           <a:prstGeom prst="rect">
             <a:avLst>
-              <a:gd name="adj" fmla="val 25000"/>
+              <a:gd name="adj" fmla="val 8333"/>
             </a:avLst>
           </a:prstGeom>
           <a:solidFill>
-            <a:srgbClr val="FCE7F3"/>
-          </a:solidFill>
-          <a:ln w="19050">
-            <a:solidFill>
-              <a:srgbClr val="DB2777"/>
-            </a:solidFill>
-            <a:prstDash val="solid"/>
-          </a:ln>
-          <a:effectLst>
-            <a:outerShdw sx="100000" sy="100000" kx="0" ky="0" algn="bl" rotWithShape="0" blurRad="101600" dist="38100" dir="8100000">
-              <a:srgbClr val="000000">
-                <a:alpha val="12000"/>
-              </a:srgbClr>
-            </a:outerShdw>
-          </a:effectLst>
-        </p:spPr>
-      </p:sp>
-      <p:sp>
-        <p:nvSpPr>
-          <p:cNvPr id="23" name="Text 21"/>
-          <p:cNvSpPr/>
-          <p:nvPr/>
-        </p:nvSpPr>
-        <p:spPr>
-          <a:xfrm>
-            <a:off x="6519672" y="2258568"/>
-            <a:ext cx="1828800" cy="292608"/>
+            <a:srgbClr val="E2E8F0"/>
+          </a:solidFill>
+          <a:ln w="12700">
+            <a:solidFill>
+              <a:srgbClr val="E2E8F0"/>
+            </a:solidFill>
+            <a:prstDash val="solid"/>
+          </a:ln>
+        </p:spPr>
+      </p:sp>
+      <p:sp>
+        <p:nvSpPr>
+          <p:cNvPr id="24" name="Text 22"/>
+          <p:cNvSpPr/>
+          <p:nvPr/>
+        </p:nvSpPr>
+        <p:spPr>
+          <a:xfrm>
+            <a:off x="365760" y="3273552"/>
+            <a:ext cx="1371600" cy="658368"/>
           </a:xfrm>
           <a:prstGeom prst="rect">
             <a:avLst/>
@@ -30131,73 +31207,100 @@
               <a:buNone/>
             </a:pPr>
             <a:r>
-              <a:rPr lang="en-US" sz="1300" b="1" dirty="0">
-                <a:solidFill>
-                  <a:srgbClr val="9D174D"/>
+              <a:rPr lang="en-US" sz="1100" b="1" dirty="0">
+                <a:solidFill>
+                  <a:srgbClr val="475569"/>
                 </a:solidFill>
                 <a:latin typeface="Trebuchet MS" pitchFamily="34" charset="0"/>
                 <a:ea typeface="Trebuchet MS" pitchFamily="34" charset="-122"/>
                 <a:cs typeface="Trebuchet MS" pitchFamily="34" charset="-120"/>
               </a:rPr>
-              <a:t>ed</a:t>
-            </a:r>
-            <a:endParaRPr lang="en-US" sz="1300" dirty="0"/>
-          </a:p>
-        </p:txBody>
-      </p:sp>
-      <p:sp>
-        <p:nvSpPr>
-          <p:cNvPr id="24" name="Text 22"/>
-          <p:cNvSpPr/>
-          <p:nvPr/>
-        </p:nvSpPr>
-        <p:spPr>
-          <a:xfrm>
-            <a:off x="6519672" y="2569464"/>
-            <a:ext cx="1828800" cy="201168"/>
-          </a:xfrm>
-          <a:prstGeom prst="rect">
-            <a:avLst/>
-          </a:prstGeom>
-          <a:noFill/>
-          <a:ln/>
-        </p:spPr>
-        <p:txBody>
-          <a:bodyPr wrap="square" lIns="0" tIns="0" rIns="0" bIns="0" rtlCol="0" anchor="t"/>
-          <a:lstStyle/>
-          <a:p>
-            <a:pPr algn="ctr" indent="0" marL="0">
-              <a:buNone/>
-            </a:pPr>
-            <a:r>
-              <a:rPr lang="en-US" sz="850" dirty="0">
-                <a:solidFill>
-                  <a:srgbClr val="475569"/>
+              <a:t>Syllables</a:t>
+            </a:r>
+            <a:endParaRPr lang="en-US" sz="1100" dirty="0"/>
+          </a:p>
+        </p:txBody>
+      </p:sp>
+      <p:sp>
+        <p:nvSpPr>
+          <p:cNvPr id="25" name="Shape 23"/>
+          <p:cNvSpPr/>
+          <p:nvPr/>
+        </p:nvSpPr>
+        <p:spPr>
+          <a:xfrm>
+            <a:off x="1874520" y="3273552"/>
+            <a:ext cx="6903720" cy="658368"/>
+          </a:xfrm>
+          <a:prstGeom prst="rect">
+            <a:avLst>
+              <a:gd name="adj" fmla="val 8333"/>
+            </a:avLst>
+          </a:prstGeom>
+          <a:solidFill>
+            <a:srgbClr val="F8FAFC"/>
+          </a:solidFill>
+          <a:ln w="12700">
+            <a:solidFill>
+              <a:srgbClr val="E2E8F0"/>
+            </a:solidFill>
+            <a:prstDash val="dash"/>
+          </a:ln>
+        </p:spPr>
+      </p:sp>
+      <p:sp>
+        <p:nvSpPr>
+          <p:cNvPr id="26" name="Text 24"/>
+          <p:cNvSpPr/>
+          <p:nvPr/>
+        </p:nvSpPr>
+        <p:spPr>
+          <a:xfrm>
+            <a:off x="1874520" y="3273552"/>
+            <a:ext cx="6903720" cy="658368"/>
+          </a:xfrm>
+          <a:prstGeom prst="rect">
+            <a:avLst/>
+          </a:prstGeom>
+          <a:noFill/>
+          <a:ln/>
+        </p:spPr>
+        <p:txBody>
+          <a:bodyPr wrap="square" rtlCol="0" anchor="ctr"/>
+          <a:lstStyle/>
+          <a:p>
+            <a:pPr algn="ctr" indent="0" marL="0">
+              <a:buNone/>
+            </a:pPr>
+            <a:r>
+              <a:rPr lang="en-US" sz="1100" i="1" dirty="0">
+                <a:solidFill>
+                  <a:srgbClr val="CBD5E1"/>
                 </a:solidFill>
                 <a:latin typeface="Calibri" pitchFamily="34" charset="0"/>
                 <a:ea typeface="Calibri" pitchFamily="34" charset="-122"/>
                 <a:cs typeface="Calibri" pitchFamily="34" charset="-120"/>
               </a:rPr>
-              <a:t>past tense / having been done</a:t>
-            </a:r>
-            <a:endParaRPr lang="en-US" sz="850" dirty="0"/>
-          </a:p>
-        </p:txBody>
-      </p:sp>
-      <p:sp>
-        <p:nvSpPr>
-          <p:cNvPr id="25" name="Shape 23"/>
-          <p:cNvSpPr/>
-          <p:nvPr/>
-        </p:nvSpPr>
-        <p:spPr>
-          <a:xfrm>
-            <a:off x="365760" y="3273552"/>
-            <a:ext cx="1371600" cy="658368"/>
+              <a:t>Write here...</a:t>
+            </a:r>
+            <a:endParaRPr lang="en-US" sz="1100" dirty="0"/>
+          </a:p>
+        </p:txBody>
+      </p:sp>
+      <p:sp>
+        <p:nvSpPr>
+          <p:cNvPr id="27" name="Shape 25"/>
+          <p:cNvSpPr/>
+          <p:nvPr/>
+        </p:nvSpPr>
+        <p:spPr>
+          <a:xfrm>
+            <a:off x="365760" y="4096512"/>
+            <a:ext cx="1371600" cy="804672"/>
           </a:xfrm>
           <a:prstGeom prst="rect">
             <a:avLst>
-              <a:gd name="adj" fmla="val 8333"/>
+              <a:gd name="adj" fmla="val 6818"/>
             </a:avLst>
           </a:prstGeom>
           <a:solidFill>
@@ -30213,14 +31316,14 @@
       </p:sp>
       <p:sp>
         <p:nvSpPr>
-          <p:cNvPr id="26" name="Text 24"/>
-          <p:cNvSpPr/>
-          <p:nvPr/>
-        </p:nvSpPr>
-        <p:spPr>
-          <a:xfrm>
-            <a:off x="365760" y="3273552"/>
-            <a:ext cx="1371600" cy="658368"/>
+          <p:cNvPr id="28" name="Text 26"/>
+          <p:cNvSpPr/>
+          <p:nvPr/>
+        </p:nvSpPr>
+        <p:spPr>
+          <a:xfrm>
+            <a:off x="365760" y="4096512"/>
+            <a:ext cx="1371600" cy="804672"/>
           </a:xfrm>
           <a:prstGeom prst="rect">
             <a:avLst/>
@@ -30244,7 +31347,7 @@
                 <a:ea typeface="Trebuchet MS" pitchFamily="34" charset="-122"/>
                 <a:cs typeface="Trebuchet MS" pitchFamily="34" charset="-120"/>
               </a:rPr>
-              <a:t>Syllables</a:t>
+              <a:t>Phonemes</a:t>
             </a:r>
             <a:endParaRPr lang="en-US" sz="1100" dirty="0"/>
           </a:p>
@@ -30252,80 +31355,14 @@
       </p:sp>
       <p:sp>
         <p:nvSpPr>
-          <p:cNvPr id="27" name="Shape 25"/>
-          <p:cNvSpPr/>
-          <p:nvPr/>
-        </p:nvSpPr>
-        <p:spPr>
-          <a:xfrm>
-            <a:off x="1874520" y="3273552"/>
-            <a:ext cx="6903720" cy="658368"/>
-          </a:xfrm>
-          <a:prstGeom prst="rect">
-            <a:avLst>
-              <a:gd name="adj" fmla="val 8333"/>
-            </a:avLst>
-          </a:prstGeom>
-          <a:solidFill>
-            <a:srgbClr val="F8FAFC"/>
-          </a:solidFill>
-          <a:ln w="12700">
-            <a:solidFill>
-              <a:srgbClr val="E2E8F0"/>
-            </a:solidFill>
-            <a:prstDash val="dash"/>
-          </a:ln>
-        </p:spPr>
-      </p:sp>
-      <p:sp>
-        <p:nvSpPr>
-          <p:cNvPr id="28" name="Text 26"/>
-          <p:cNvSpPr/>
-          <p:nvPr/>
-        </p:nvSpPr>
-        <p:spPr>
-          <a:xfrm>
-            <a:off x="1874520" y="3273552"/>
-            <a:ext cx="6903720" cy="658368"/>
-          </a:xfrm>
-          <a:prstGeom prst="rect">
-            <a:avLst/>
-          </a:prstGeom>
-          <a:noFill/>
-          <a:ln/>
-        </p:spPr>
-        <p:txBody>
-          <a:bodyPr wrap="square" rtlCol="0" anchor="ctr"/>
-          <a:lstStyle/>
-          <a:p>
-            <a:pPr algn="ctr" indent="0" marL="0">
-              <a:buNone/>
-            </a:pPr>
-            <a:r>
-              <a:rPr lang="en-US" sz="1100" i="1" dirty="0">
-                <a:solidFill>
-                  <a:srgbClr val="CBD5E1"/>
-                </a:solidFill>
-                <a:latin typeface="Calibri" pitchFamily="34" charset="0"/>
-                <a:ea typeface="Calibri" pitchFamily="34" charset="-122"/>
-                <a:cs typeface="Calibri" pitchFamily="34" charset="-120"/>
-              </a:rPr>
-              <a:t>Write here...</a:t>
-            </a:r>
-            <a:endParaRPr lang="en-US" sz="1100" dirty="0"/>
-          </a:p>
-        </p:txBody>
-      </p:sp>
-      <p:sp>
-        <p:nvSpPr>
           <p:cNvPr id="29" name="Shape 27"/>
           <p:cNvSpPr/>
           <p:nvPr/>
         </p:nvSpPr>
         <p:spPr>
           <a:xfrm>
-            <a:off x="365760" y="4096512"/>
-            <a:ext cx="1371600" cy="804672"/>
+            <a:off x="1874520" y="4096512"/>
+            <a:ext cx="6903720" cy="804672"/>
           </a:xfrm>
           <a:prstGeom prst="rect">
             <a:avLst>
@@ -30333,85 +31370,19 @@
             </a:avLst>
           </a:prstGeom>
           <a:solidFill>
-            <a:srgbClr val="E2E8F0"/>
+            <a:srgbClr val="F8FAFC"/>
           </a:solidFill>
           <a:ln w="12700">
             <a:solidFill>
               <a:srgbClr val="E2E8F0"/>
             </a:solidFill>
-            <a:prstDash val="solid"/>
+            <a:prstDash val="dash"/>
           </a:ln>
         </p:spPr>
       </p:sp>
       <p:sp>
         <p:nvSpPr>
           <p:cNvPr id="30" name="Text 28"/>
-          <p:cNvSpPr/>
-          <p:nvPr/>
-        </p:nvSpPr>
-        <p:spPr>
-          <a:xfrm>
-            <a:off x="365760" y="4096512"/>
-            <a:ext cx="1371600" cy="804672"/>
-          </a:xfrm>
-          <a:prstGeom prst="rect">
-            <a:avLst/>
-          </a:prstGeom>
-          <a:noFill/>
-          <a:ln/>
-        </p:spPr>
-        <p:txBody>
-          <a:bodyPr wrap="square" lIns="0" tIns="0" rIns="0" bIns="0" rtlCol="0" anchor="ctr"/>
-          <a:lstStyle/>
-          <a:p>
-            <a:pPr algn="ctr" indent="0" marL="0">
-              <a:buNone/>
-            </a:pPr>
-            <a:r>
-              <a:rPr lang="en-US" sz="1100" b="1" dirty="0">
-                <a:solidFill>
-                  <a:srgbClr val="475569"/>
-                </a:solidFill>
-                <a:latin typeface="Trebuchet MS" pitchFamily="34" charset="0"/>
-                <a:ea typeface="Trebuchet MS" pitchFamily="34" charset="-122"/>
-                <a:cs typeface="Trebuchet MS" pitchFamily="34" charset="-120"/>
-              </a:rPr>
-              <a:t>Phonemes</a:t>
-            </a:r>
-            <a:endParaRPr lang="en-US" sz="1100" dirty="0"/>
-          </a:p>
-        </p:txBody>
-      </p:sp>
-      <p:sp>
-        <p:nvSpPr>
-          <p:cNvPr id="31" name="Shape 29"/>
-          <p:cNvSpPr/>
-          <p:nvPr/>
-        </p:nvSpPr>
-        <p:spPr>
-          <a:xfrm>
-            <a:off x="1874520" y="4096512"/>
-            <a:ext cx="6903720" cy="804672"/>
-          </a:xfrm>
-          <a:prstGeom prst="rect">
-            <a:avLst>
-              <a:gd name="adj" fmla="val 6818"/>
-            </a:avLst>
-          </a:prstGeom>
-          <a:solidFill>
-            <a:srgbClr val="F8FAFC"/>
-          </a:solidFill>
-          <a:ln w="12700">
-            <a:solidFill>
-              <a:srgbClr val="E2E8F0"/>
-            </a:solidFill>
-            <a:prstDash val="dash"/>
-          </a:ln>
-        </p:spPr>
-      </p:sp>
-      <p:sp>
-        <p:nvSpPr>
-          <p:cNvPr id="32" name="Text 30"/>
           <p:cNvSpPr/>
           <p:nvPr/>
         </p:nvSpPr>
@@ -30873,7 +31844,7 @@
                 <a:ea typeface="Trebuchet MS" pitchFamily="34" charset="-122"/>
                 <a:cs typeface="Trebuchet MS" pitchFamily="34" charset="-120"/>
               </a:rPr>
-              <a:t>underpriced</a:t>
+              <a:t>pricing</a:t>
             </a:r>
             <a:endParaRPr lang="en-US" sz="2800" dirty="0"/>
           </a:p>
@@ -30953,7 +31924,7 @@
         </p:nvSpPr>
         <p:spPr>
           <a:xfrm>
-            <a:off x="2221992" y="2258568"/>
+            <a:off x="2938272" y="2258568"/>
             <a:ext cx="1828800" cy="292608"/>
           </a:xfrm>
           <a:prstGeom prst="rect">
@@ -30962,11 +31933,11 @@
             </a:avLst>
           </a:prstGeom>
           <a:solidFill>
-            <a:srgbClr val="DDD6FE"/>
+            <a:srgbClr val="CCFBF1"/>
           </a:solidFill>
           <a:ln w="19050">
             <a:solidFill>
-              <a:srgbClr val="7C3AED"/>
+              <a:srgbClr val="0D9488"/>
             </a:solidFill>
             <a:prstDash val="solid"/>
           </a:ln>
@@ -30987,7 +31958,7 @@
         </p:nvSpPr>
         <p:spPr>
           <a:xfrm>
-            <a:off x="2221992" y="2258568"/>
+            <a:off x="2938272" y="2258568"/>
             <a:ext cx="1828800" cy="292608"/>
           </a:xfrm>
           <a:prstGeom prst="rect">
@@ -31006,13 +31977,13 @@
             <a:r>
               <a:rPr lang="en-US" sz="1300" b="1" dirty="0">
                 <a:solidFill>
-                  <a:srgbClr val="4C1D95"/>
+                  <a:srgbClr val="0F766E"/>
                 </a:solidFill>
                 <a:latin typeface="Trebuchet MS" pitchFamily="34" charset="0"/>
                 <a:ea typeface="Trebuchet MS" pitchFamily="34" charset="-122"/>
                 <a:cs typeface="Trebuchet MS" pitchFamily="34" charset="-120"/>
               </a:rPr>
-              <a:t>under</a:t>
+              <a:t>price</a:t>
             </a:r>
             <a:endParaRPr lang="en-US" sz="1300" dirty="0"/>
           </a:p>
@@ -31026,7 +31997,7 @@
         </p:nvSpPr>
         <p:spPr>
           <a:xfrm>
-            <a:off x="2221992" y="2569464"/>
+            <a:off x="2938272" y="2569464"/>
             <a:ext cx="1828800" cy="201168"/>
           </a:xfrm>
           <a:prstGeom prst="rect">
@@ -31051,7 +32022,7 @@
                 <a:ea typeface="Calibri" pitchFamily="34" charset="-122"/>
                 <a:cs typeface="Calibri" pitchFamily="34" charset="-120"/>
               </a:rPr>
-              <a:t>below / too little</a:t>
+              <a:t>value or cost</a:t>
             </a:r>
             <a:endParaRPr lang="en-US" sz="850" dirty="0"/>
           </a:p>
@@ -31065,7 +32036,7 @@
         </p:nvSpPr>
         <p:spPr>
           <a:xfrm>
-            <a:off x="4370832" y="2258568"/>
+            <a:off x="5803392" y="2258568"/>
             <a:ext cx="1828800" cy="292608"/>
           </a:xfrm>
           <a:prstGeom prst="rect">
@@ -31074,11 +32045,11 @@
             </a:avLst>
           </a:prstGeom>
           <a:solidFill>
-            <a:srgbClr val="CCFBF1"/>
+            <a:srgbClr val="FCE7F3"/>
           </a:solidFill>
           <a:ln w="19050">
             <a:solidFill>
-              <a:srgbClr val="0D9488"/>
+              <a:srgbClr val="DB2777"/>
             </a:solidFill>
             <a:prstDash val="solid"/>
           </a:ln>
@@ -31099,7 +32070,7 @@
         </p:nvSpPr>
         <p:spPr>
           <a:xfrm>
-            <a:off x="4370832" y="2258568"/>
+            <a:off x="5803392" y="2258568"/>
             <a:ext cx="1828800" cy="292608"/>
           </a:xfrm>
           <a:prstGeom prst="rect">
@@ -31118,13 +32089,13 @@
             <a:r>
               <a:rPr lang="en-US" sz="1300" b="1" dirty="0">
                 <a:solidFill>
-                  <a:srgbClr val="0F766E"/>
+                  <a:srgbClr val="9D174D"/>
                 </a:solidFill>
                 <a:latin typeface="Trebuchet MS" pitchFamily="34" charset="0"/>
                 <a:ea typeface="Trebuchet MS" pitchFamily="34" charset="-122"/>
                 <a:cs typeface="Trebuchet MS" pitchFamily="34" charset="-120"/>
               </a:rPr>
-              <a:t>price</a:t>
+              <a:t>ing</a:t>
             </a:r>
             <a:endParaRPr lang="en-US" sz="1300" dirty="0"/>
           </a:p>
@@ -31138,7 +32109,7 @@
         </p:nvSpPr>
         <p:spPr>
           <a:xfrm>
-            <a:off x="4370832" y="2569464"/>
+            <a:off x="5803392" y="2569464"/>
             <a:ext cx="1828800" cy="201168"/>
           </a:xfrm>
           <a:prstGeom prst="rect">
@@ -31163,7 +32134,7 @@
                 <a:ea typeface="Calibri" pitchFamily="34" charset="-122"/>
                 <a:cs typeface="Calibri" pitchFamily="34" charset="-120"/>
               </a:rPr>
-              <a:t>value or cost</a:t>
+              <a:t>ongoing action</a:t>
             </a:r>
             <a:endParaRPr lang="en-US" sz="850" dirty="0"/>
           </a:p>
@@ -31171,48 +32142,80 @@
       </p:sp>
       <p:sp>
         <p:nvSpPr>
-          <p:cNvPr id="22" name="Shape 20"/>
-          <p:cNvSpPr/>
-          <p:nvPr/>
-        </p:nvSpPr>
-        <p:spPr>
-          <a:xfrm>
-            <a:off x="6519672" y="2258568"/>
-            <a:ext cx="1828800" cy="292608"/>
+          <p:cNvPr id="22" name="Text 20"/>
+          <p:cNvSpPr/>
+          <p:nvPr/>
+        </p:nvSpPr>
+        <p:spPr>
+          <a:xfrm>
+            <a:off x="5803392" y="2752344"/>
+            <a:ext cx="1828800" cy="182880"/>
+          </a:xfrm>
+          <a:prstGeom prst="rect">
+            <a:avLst/>
+          </a:prstGeom>
+          <a:noFill/>
+          <a:ln/>
+        </p:spPr>
+        <p:txBody>
+          <a:bodyPr wrap="square" lIns="0" tIns="0" rIns="0" bIns="0" rtlCol="0" anchor="t"/>
+          <a:lstStyle/>
+          <a:p>
+            <a:pPr algn="ctr" indent="0" marL="0">
+              <a:buNone/>
+            </a:pPr>
+            <a:r>
+              <a:rPr lang="en-US" sz="700" i="1" dirty="0">
+                <a:solidFill>
+                  <a:srgbClr val="94A3B8"/>
+                </a:solidFill>
+                <a:latin typeface="Calibri" pitchFamily="34" charset="0"/>
+                <a:ea typeface="Calibri" pitchFamily="34" charset="-122"/>
+                <a:cs typeface="Calibri" pitchFamily="34" charset="-120"/>
+              </a:rPr>
+              <a:t>'e' dropped before vowel suffix</a:t>
+            </a:r>
+            <a:endParaRPr lang="en-US" sz="700" dirty="0"/>
+          </a:p>
+        </p:txBody>
+      </p:sp>
+      <p:sp>
+        <p:nvSpPr>
+          <p:cNvPr id="23" name="Shape 21"/>
+          <p:cNvSpPr/>
+          <p:nvPr/>
+        </p:nvSpPr>
+        <p:spPr>
+          <a:xfrm>
+            <a:off x="365760" y="3273552"/>
+            <a:ext cx="1371600" cy="658368"/>
           </a:xfrm>
           <a:prstGeom prst="rect">
             <a:avLst>
-              <a:gd name="adj" fmla="val 25000"/>
+              <a:gd name="adj" fmla="val 8333"/>
             </a:avLst>
           </a:prstGeom>
           <a:solidFill>
-            <a:srgbClr val="FCE7F3"/>
-          </a:solidFill>
-          <a:ln w="19050">
-            <a:solidFill>
-              <a:srgbClr val="DB2777"/>
-            </a:solidFill>
-            <a:prstDash val="solid"/>
-          </a:ln>
-          <a:effectLst>
-            <a:outerShdw sx="100000" sy="100000" kx="0" ky="0" algn="bl" rotWithShape="0" blurRad="101600" dist="38100" dir="8100000">
-              <a:srgbClr val="000000">
-                <a:alpha val="12000"/>
-              </a:srgbClr>
-            </a:outerShdw>
-          </a:effectLst>
-        </p:spPr>
-      </p:sp>
-      <p:sp>
-        <p:nvSpPr>
-          <p:cNvPr id="23" name="Text 21"/>
-          <p:cNvSpPr/>
-          <p:nvPr/>
-        </p:nvSpPr>
-        <p:spPr>
-          <a:xfrm>
-            <a:off x="6519672" y="2258568"/>
-            <a:ext cx="1828800" cy="292608"/>
+            <a:srgbClr val="E2E8F0"/>
+          </a:solidFill>
+          <a:ln w="12700">
+            <a:solidFill>
+              <a:srgbClr val="E2E8F0"/>
+            </a:solidFill>
+            <a:prstDash val="solid"/>
+          </a:ln>
+        </p:spPr>
+      </p:sp>
+      <p:sp>
+        <p:nvSpPr>
+          <p:cNvPr id="24" name="Text 22"/>
+          <p:cNvSpPr/>
+          <p:nvPr/>
+        </p:nvSpPr>
+        <p:spPr>
+          <a:xfrm>
+            <a:off x="365760" y="3273552"/>
+            <a:ext cx="1371600" cy="658368"/>
           </a:xfrm>
           <a:prstGeom prst="rect">
             <a:avLst/>
@@ -31228,56 +32231,17 @@
               <a:buNone/>
             </a:pPr>
             <a:r>
-              <a:rPr lang="en-US" sz="1300" b="1" dirty="0">
-                <a:solidFill>
-                  <a:srgbClr val="9D174D"/>
+              <a:rPr lang="en-US" sz="1100" b="1" dirty="0">
+                <a:solidFill>
+                  <a:srgbClr val="475569"/>
                 </a:solidFill>
                 <a:latin typeface="Trebuchet MS" pitchFamily="34" charset="0"/>
                 <a:ea typeface="Trebuchet MS" pitchFamily="34" charset="-122"/>
                 <a:cs typeface="Trebuchet MS" pitchFamily="34" charset="-120"/>
               </a:rPr>
-              <a:t>ed</a:t>
-            </a:r>
-            <a:endParaRPr lang="en-US" sz="1300" dirty="0"/>
-          </a:p>
-        </p:txBody>
-      </p:sp>
-      <p:sp>
-        <p:nvSpPr>
-          <p:cNvPr id="24" name="Text 22"/>
-          <p:cNvSpPr/>
-          <p:nvPr/>
-        </p:nvSpPr>
-        <p:spPr>
-          <a:xfrm>
-            <a:off x="6519672" y="2569464"/>
-            <a:ext cx="1828800" cy="201168"/>
-          </a:xfrm>
-          <a:prstGeom prst="rect">
-            <a:avLst/>
-          </a:prstGeom>
-          <a:noFill/>
-          <a:ln/>
-        </p:spPr>
-        <p:txBody>
-          <a:bodyPr wrap="square" lIns="0" tIns="0" rIns="0" bIns="0" rtlCol="0" anchor="t"/>
-          <a:lstStyle/>
-          <a:p>
-            <a:pPr algn="ctr" indent="0" marL="0">
-              <a:buNone/>
-            </a:pPr>
-            <a:r>
-              <a:rPr lang="en-US" sz="850" dirty="0">
-                <a:solidFill>
-                  <a:srgbClr val="475569"/>
-                </a:solidFill>
-                <a:latin typeface="Calibri" pitchFamily="34" charset="0"/>
-                <a:ea typeface="Calibri" pitchFamily="34" charset="-122"/>
-                <a:cs typeface="Calibri" pitchFamily="34" charset="-120"/>
-              </a:rPr>
-              <a:t>past tense / having been done</a:t>
-            </a:r>
-            <a:endParaRPr lang="en-US" sz="850" dirty="0"/>
+              <a:t>Syllables</a:t>
+            </a:r>
+            <a:endParaRPr lang="en-US" sz="1100" dirty="0"/>
           </a:p>
         </p:txBody>
       </p:sp>
@@ -31289,8 +32253,8 @@
         </p:nvSpPr>
         <p:spPr>
           <a:xfrm>
-            <a:off x="365760" y="3273552"/>
-            <a:ext cx="1371600" cy="658368"/>
+            <a:off x="1874520" y="3273552"/>
+            <a:ext cx="6903720" cy="658368"/>
           </a:xfrm>
           <a:prstGeom prst="rect">
             <a:avLst>
@@ -31298,26 +32262,53 @@
             </a:avLst>
           </a:prstGeom>
           <a:solidFill>
-            <a:srgbClr val="E2E8F0"/>
-          </a:solidFill>
-          <a:ln w="12700">
-            <a:solidFill>
-              <a:srgbClr val="E2E8F0"/>
-            </a:solidFill>
-            <a:prstDash val="solid"/>
-          </a:ln>
-        </p:spPr>
-      </p:sp>
-      <p:sp>
-        <p:nvSpPr>
-          <p:cNvPr id="26" name="Text 24"/>
-          <p:cNvSpPr/>
-          <p:nvPr/>
-        </p:nvSpPr>
-        <p:spPr>
-          <a:xfrm>
-            <a:off x="365760" y="3273552"/>
-            <a:ext cx="1371600" cy="658368"/>
+            <a:srgbClr val="CCFBF1"/>
+          </a:solidFill>
+          <a:ln w="12700">
+            <a:solidFill>
+              <a:srgbClr val="0D9488"/>
+            </a:solidFill>
+            <a:prstDash val="solid"/>
+          </a:ln>
+        </p:spPr>
+      </p:sp>
+      <p:sp>
+        <p:nvSpPr>
+          <p:cNvPr id="26" name="Shape 24"/>
+          <p:cNvSpPr/>
+          <p:nvPr/>
+        </p:nvSpPr>
+        <p:spPr>
+          <a:xfrm>
+            <a:off x="2999232" y="3364992"/>
+            <a:ext cx="1645920" cy="475488"/>
+          </a:xfrm>
+          <a:prstGeom prst="rect">
+            <a:avLst>
+              <a:gd name="adj" fmla="val 9615"/>
+            </a:avLst>
+          </a:prstGeom>
+          <a:solidFill>
+            <a:srgbClr val="FFFFFF"/>
+          </a:solidFill>
+          <a:ln w="12700">
+            <a:solidFill>
+              <a:srgbClr val="0D9488"/>
+            </a:solidFill>
+            <a:prstDash val="solid"/>
+          </a:ln>
+        </p:spPr>
+      </p:sp>
+      <p:sp>
+        <p:nvSpPr>
+          <p:cNvPr id="27" name="Text 25"/>
+          <p:cNvSpPr/>
+          <p:nvPr/>
+        </p:nvSpPr>
+        <p:spPr>
+          <a:xfrm>
+            <a:off x="2999232" y="3364992"/>
+            <a:ext cx="1645920" cy="475488"/>
           </a:xfrm>
           <a:prstGeom prst="rect">
             <a:avLst/>
@@ -31333,56 +32324,68 @@
               <a:buNone/>
             </a:pPr>
             <a:r>
-              <a:rPr lang="en-US" sz="1100" b="1" dirty="0">
-                <a:solidFill>
-                  <a:srgbClr val="475569"/>
+              <a:rPr lang="en-US" sz="1400" b="1" dirty="0">
+                <a:solidFill>
+                  <a:srgbClr val="0D9488"/>
                 </a:solidFill>
                 <a:latin typeface="Trebuchet MS" pitchFamily="34" charset="0"/>
                 <a:ea typeface="Trebuchet MS" pitchFamily="34" charset="-122"/>
                 <a:cs typeface="Trebuchet MS" pitchFamily="34" charset="-120"/>
               </a:rPr>
-              <a:t>Syllables</a:t>
-            </a:r>
-            <a:endParaRPr lang="en-US" sz="1100" dirty="0"/>
-          </a:p>
-        </p:txBody>
-      </p:sp>
-      <p:sp>
-        <p:nvSpPr>
-          <p:cNvPr id="27" name="Shape 25"/>
-          <p:cNvSpPr/>
-          <p:nvPr/>
-        </p:nvSpPr>
-        <p:spPr>
-          <a:xfrm>
-            <a:off x="1874520" y="3273552"/>
-            <a:ext cx="6903720" cy="658368"/>
-          </a:xfrm>
-          <a:prstGeom prst="rect">
-            <a:avLst>
-              <a:gd name="adj" fmla="val 8333"/>
-            </a:avLst>
-          </a:prstGeom>
-          <a:solidFill>
-            <a:srgbClr val="CCFBF1"/>
-          </a:solidFill>
-          <a:ln w="12700">
-            <a:solidFill>
-              <a:srgbClr val="0D9488"/>
-            </a:solidFill>
-            <a:prstDash val="solid"/>
-          </a:ln>
-        </p:spPr>
-      </p:sp>
-      <p:sp>
-        <p:nvSpPr>
-          <p:cNvPr id="28" name="Shape 26"/>
-          <p:cNvSpPr/>
-          <p:nvPr/>
-        </p:nvSpPr>
-        <p:spPr>
-          <a:xfrm>
-            <a:off x="2313432" y="3364992"/>
+              <a:t>pri</a:t>
+            </a:r>
+            <a:endParaRPr lang="en-US" sz="1400" dirty="0"/>
+          </a:p>
+        </p:txBody>
+      </p:sp>
+      <p:sp>
+        <p:nvSpPr>
+          <p:cNvPr id="28" name="Text 26"/>
+          <p:cNvSpPr/>
+          <p:nvPr/>
+        </p:nvSpPr>
+        <p:spPr>
+          <a:xfrm>
+            <a:off x="4645152" y="3364992"/>
+            <a:ext cx="1097280" cy="475488"/>
+          </a:xfrm>
+          <a:prstGeom prst="rect">
+            <a:avLst/>
+          </a:prstGeom>
+          <a:noFill/>
+          <a:ln/>
+        </p:spPr>
+        <p:txBody>
+          <a:bodyPr wrap="square" lIns="0" tIns="0" rIns="0" bIns="0" rtlCol="0" anchor="ctr"/>
+          <a:lstStyle/>
+          <a:p>
+            <a:pPr algn="ctr" indent="0" marL="0">
+              <a:buNone/>
+            </a:pPr>
+            <a:r>
+              <a:rPr lang="en-US" sz="1600" b="1" dirty="0">
+                <a:solidFill>
+                  <a:srgbClr val="0D9488"/>
+                </a:solidFill>
+                <a:latin typeface="Trebuchet MS" pitchFamily="34" charset="0"/>
+                <a:ea typeface="Trebuchet MS" pitchFamily="34" charset="-122"/>
+                <a:cs typeface="Trebuchet MS" pitchFamily="34" charset="-120"/>
+              </a:rPr>
+              <a:t>·</a:t>
+            </a:r>
+            <a:endParaRPr lang="en-US" sz="1600" dirty="0"/>
+          </a:p>
+        </p:txBody>
+      </p:sp>
+      <p:sp>
+        <p:nvSpPr>
+          <p:cNvPr id="29" name="Shape 27"/>
+          <p:cNvSpPr/>
+          <p:nvPr/>
+        </p:nvSpPr>
+        <p:spPr>
+          <a:xfrm>
+            <a:off x="5742432" y="3364992"/>
             <a:ext cx="1645920" cy="475488"/>
           </a:xfrm>
           <a:prstGeom prst="rect">
@@ -31403,13 +32406,13 @@
       </p:sp>
       <p:sp>
         <p:nvSpPr>
-          <p:cNvPr id="29" name="Text 27"/>
-          <p:cNvSpPr/>
-          <p:nvPr/>
-        </p:nvSpPr>
-        <p:spPr>
-          <a:xfrm>
-            <a:off x="2313432" y="3364992"/>
+          <p:cNvPr id="30" name="Text 28"/>
+          <p:cNvSpPr/>
+          <p:nvPr/>
+        </p:nvSpPr>
+        <p:spPr>
+          <a:xfrm>
+            <a:off x="5742432" y="3364992"/>
             <a:ext cx="1645920" cy="475488"/>
           </a:xfrm>
           <a:prstGeom prst="rect">
@@ -31434,7 +32437,7 @@
                 <a:ea typeface="Trebuchet MS" pitchFamily="34" charset="-122"/>
                 <a:cs typeface="Trebuchet MS" pitchFamily="34" charset="-120"/>
               </a:rPr>
-              <a:t>un</a:t>
+              <a:t>cing</a:t>
             </a:r>
             <a:endParaRPr lang="en-US" sz="1400" dirty="0"/>
           </a:p>
@@ -31442,14 +32445,41 @@
       </p:sp>
       <p:sp>
         <p:nvSpPr>
-          <p:cNvPr id="30" name="Text 28"/>
-          <p:cNvSpPr/>
-          <p:nvPr/>
-        </p:nvSpPr>
-        <p:spPr>
-          <a:xfrm>
-            <a:off x="3959352" y="3364992"/>
-            <a:ext cx="411480" cy="475488"/>
+          <p:cNvPr id="31" name="Shape 29"/>
+          <p:cNvSpPr/>
+          <p:nvPr/>
+        </p:nvSpPr>
+        <p:spPr>
+          <a:xfrm>
+            <a:off x="365760" y="4096512"/>
+            <a:ext cx="1371600" cy="804672"/>
+          </a:xfrm>
+          <a:prstGeom prst="rect">
+            <a:avLst>
+              <a:gd name="adj" fmla="val 6818"/>
+            </a:avLst>
+          </a:prstGeom>
+          <a:solidFill>
+            <a:srgbClr val="E2E8F0"/>
+          </a:solidFill>
+          <a:ln w="12700">
+            <a:solidFill>
+              <a:srgbClr val="E2E8F0"/>
+            </a:solidFill>
+            <a:prstDash val="solid"/>
+          </a:ln>
+        </p:spPr>
+      </p:sp>
+      <p:sp>
+        <p:nvSpPr>
+          <p:cNvPr id="32" name="Text 30"/>
+          <p:cNvSpPr/>
+          <p:nvPr/>
+        </p:nvSpPr>
+        <p:spPr>
+          <a:xfrm>
+            <a:off x="365760" y="4096512"/>
+            <a:ext cx="1371600" cy="804672"/>
           </a:xfrm>
           <a:prstGeom prst="rect">
             <a:avLst/>
@@ -31465,201 +32495,30 @@
               <a:buNone/>
             </a:pPr>
             <a:r>
-              <a:rPr lang="en-US" sz="1600" b="1" dirty="0">
-                <a:solidFill>
-                  <a:srgbClr val="0D9488"/>
+              <a:rPr lang="en-US" sz="1100" b="1" dirty="0">
+                <a:solidFill>
+                  <a:srgbClr val="475569"/>
                 </a:solidFill>
                 <a:latin typeface="Trebuchet MS" pitchFamily="34" charset="0"/>
                 <a:ea typeface="Trebuchet MS" pitchFamily="34" charset="-122"/>
                 <a:cs typeface="Trebuchet MS" pitchFamily="34" charset="-120"/>
               </a:rPr>
-              <a:t>·</a:t>
-            </a:r>
-            <a:endParaRPr lang="en-US" sz="1600" dirty="0"/>
-          </a:p>
-        </p:txBody>
-      </p:sp>
-      <p:sp>
-        <p:nvSpPr>
-          <p:cNvPr id="31" name="Shape 29"/>
-          <p:cNvSpPr/>
-          <p:nvPr/>
-        </p:nvSpPr>
-        <p:spPr>
-          <a:xfrm>
-            <a:off x="4370832" y="3364992"/>
-            <a:ext cx="1645920" cy="475488"/>
-          </a:xfrm>
-          <a:prstGeom prst="rect">
-            <a:avLst>
-              <a:gd name="adj" fmla="val 9615"/>
-            </a:avLst>
-          </a:prstGeom>
-          <a:solidFill>
-            <a:srgbClr val="FFFFFF"/>
-          </a:solidFill>
-          <a:ln w="12700">
-            <a:solidFill>
-              <a:srgbClr val="0D9488"/>
-            </a:solidFill>
-            <a:prstDash val="solid"/>
-          </a:ln>
-        </p:spPr>
-      </p:sp>
-      <p:sp>
-        <p:nvSpPr>
-          <p:cNvPr id="32" name="Text 30"/>
-          <p:cNvSpPr/>
-          <p:nvPr/>
-        </p:nvSpPr>
-        <p:spPr>
-          <a:xfrm>
-            <a:off x="4370832" y="3364992"/>
-            <a:ext cx="1645920" cy="475488"/>
-          </a:xfrm>
-          <a:prstGeom prst="rect">
-            <a:avLst/>
-          </a:prstGeom>
-          <a:noFill/>
-          <a:ln/>
-        </p:spPr>
-        <p:txBody>
-          <a:bodyPr wrap="square" lIns="0" tIns="0" rIns="0" bIns="0" rtlCol="0" anchor="ctr"/>
-          <a:lstStyle/>
-          <a:p>
-            <a:pPr algn="ctr" indent="0" marL="0">
-              <a:buNone/>
-            </a:pPr>
-            <a:r>
-              <a:rPr lang="en-US" sz="1400" b="1" dirty="0">
-                <a:solidFill>
-                  <a:srgbClr val="0D9488"/>
-                </a:solidFill>
-                <a:latin typeface="Trebuchet MS" pitchFamily="34" charset="0"/>
-                <a:ea typeface="Trebuchet MS" pitchFamily="34" charset="-122"/>
-                <a:cs typeface="Trebuchet MS" pitchFamily="34" charset="-120"/>
-              </a:rPr>
-              <a:t>der</a:t>
-            </a:r>
-            <a:endParaRPr lang="en-US" sz="1400" dirty="0"/>
-          </a:p>
-        </p:txBody>
-      </p:sp>
-      <p:sp>
-        <p:nvSpPr>
-          <p:cNvPr id="33" name="Text 31"/>
-          <p:cNvSpPr/>
-          <p:nvPr/>
-        </p:nvSpPr>
-        <p:spPr>
-          <a:xfrm>
-            <a:off x="6016752" y="3364992"/>
-            <a:ext cx="411480" cy="475488"/>
-          </a:xfrm>
-          <a:prstGeom prst="rect">
-            <a:avLst/>
-          </a:prstGeom>
-          <a:noFill/>
-          <a:ln/>
-        </p:spPr>
-        <p:txBody>
-          <a:bodyPr wrap="square" lIns="0" tIns="0" rIns="0" bIns="0" rtlCol="0" anchor="ctr"/>
-          <a:lstStyle/>
-          <a:p>
-            <a:pPr algn="ctr" indent="0" marL="0">
-              <a:buNone/>
-            </a:pPr>
-            <a:r>
-              <a:rPr lang="en-US" sz="1600" b="1" dirty="0">
-                <a:solidFill>
-                  <a:srgbClr val="0D9488"/>
-                </a:solidFill>
-                <a:latin typeface="Trebuchet MS" pitchFamily="34" charset="0"/>
-                <a:ea typeface="Trebuchet MS" pitchFamily="34" charset="-122"/>
-                <a:cs typeface="Trebuchet MS" pitchFamily="34" charset="-120"/>
-              </a:rPr>
-              <a:t>·</a:t>
-            </a:r>
-            <a:endParaRPr lang="en-US" sz="1600" dirty="0"/>
-          </a:p>
-        </p:txBody>
-      </p:sp>
-      <p:sp>
-        <p:nvSpPr>
-          <p:cNvPr id="34" name="Shape 32"/>
-          <p:cNvSpPr/>
-          <p:nvPr/>
-        </p:nvSpPr>
-        <p:spPr>
-          <a:xfrm>
-            <a:off x="6428232" y="3364992"/>
-            <a:ext cx="1645920" cy="475488"/>
-          </a:xfrm>
-          <a:prstGeom prst="rect">
-            <a:avLst>
-              <a:gd name="adj" fmla="val 9615"/>
-            </a:avLst>
-          </a:prstGeom>
-          <a:solidFill>
-            <a:srgbClr val="FFFFFF"/>
-          </a:solidFill>
-          <a:ln w="12700">
-            <a:solidFill>
-              <a:srgbClr val="0D9488"/>
-            </a:solidFill>
-            <a:prstDash val="solid"/>
-          </a:ln>
-        </p:spPr>
-      </p:sp>
-      <p:sp>
-        <p:nvSpPr>
-          <p:cNvPr id="35" name="Text 33"/>
-          <p:cNvSpPr/>
-          <p:nvPr/>
-        </p:nvSpPr>
-        <p:spPr>
-          <a:xfrm>
-            <a:off x="6428232" y="3364992"/>
-            <a:ext cx="1645920" cy="475488"/>
-          </a:xfrm>
-          <a:prstGeom prst="rect">
-            <a:avLst/>
-          </a:prstGeom>
-          <a:noFill/>
-          <a:ln/>
-        </p:spPr>
-        <p:txBody>
-          <a:bodyPr wrap="square" lIns="0" tIns="0" rIns="0" bIns="0" rtlCol="0" anchor="ctr"/>
-          <a:lstStyle/>
-          <a:p>
-            <a:pPr algn="ctr" indent="0" marL="0">
-              <a:buNone/>
-            </a:pPr>
-            <a:r>
-              <a:rPr lang="en-US" sz="1400" b="1" dirty="0">
-                <a:solidFill>
-                  <a:srgbClr val="0D9488"/>
-                </a:solidFill>
-                <a:latin typeface="Trebuchet MS" pitchFamily="34" charset="0"/>
-                <a:ea typeface="Trebuchet MS" pitchFamily="34" charset="-122"/>
-                <a:cs typeface="Trebuchet MS" pitchFamily="34" charset="-120"/>
-              </a:rPr>
-              <a:t>priced</a:t>
-            </a:r>
-            <a:endParaRPr lang="en-US" sz="1400" dirty="0"/>
-          </a:p>
-        </p:txBody>
-      </p:sp>
-      <p:sp>
-        <p:nvSpPr>
-          <p:cNvPr id="36" name="Shape 34"/>
-          <p:cNvSpPr/>
-          <p:nvPr/>
-        </p:nvSpPr>
-        <p:spPr>
-          <a:xfrm>
-            <a:off x="365760" y="4096512"/>
-            <a:ext cx="1371600" cy="804672"/>
+              <a:t>Phonemes</a:t>
+            </a:r>
+            <a:endParaRPr lang="en-US" sz="1100" dirty="0"/>
+          </a:p>
+        </p:txBody>
+      </p:sp>
+      <p:sp>
+        <p:nvSpPr>
+          <p:cNvPr id="33" name="Shape 31"/>
+          <p:cNvSpPr/>
+          <p:nvPr/>
+        </p:nvSpPr>
+        <p:spPr>
+          <a:xfrm>
+            <a:off x="1874520" y="4096512"/>
+            <a:ext cx="6903720" cy="804672"/>
           </a:xfrm>
           <a:prstGeom prst="rect">
             <a:avLst>
@@ -31667,85 +32526,19 @@
             </a:avLst>
           </a:prstGeom>
           <a:solidFill>
-            <a:srgbClr val="E2E8F0"/>
+            <a:srgbClr val="F8FAFC"/>
           </a:solidFill>
           <a:ln w="12700">
             <a:solidFill>
               <a:srgbClr val="E2E8F0"/>
             </a:solidFill>
-            <a:prstDash val="solid"/>
-          </a:ln>
-        </p:spPr>
-      </p:sp>
-      <p:sp>
-        <p:nvSpPr>
-          <p:cNvPr id="37" name="Text 35"/>
-          <p:cNvSpPr/>
-          <p:nvPr/>
-        </p:nvSpPr>
-        <p:spPr>
-          <a:xfrm>
-            <a:off x="365760" y="4096512"/>
-            <a:ext cx="1371600" cy="804672"/>
-          </a:xfrm>
-          <a:prstGeom prst="rect">
-            <a:avLst/>
-          </a:prstGeom>
-          <a:noFill/>
-          <a:ln/>
-        </p:spPr>
-        <p:txBody>
-          <a:bodyPr wrap="square" lIns="0" tIns="0" rIns="0" bIns="0" rtlCol="0" anchor="ctr"/>
-          <a:lstStyle/>
-          <a:p>
-            <a:pPr algn="ctr" indent="0" marL="0">
-              <a:buNone/>
-            </a:pPr>
-            <a:r>
-              <a:rPr lang="en-US" sz="1100" b="1" dirty="0">
-                <a:solidFill>
-                  <a:srgbClr val="475569"/>
-                </a:solidFill>
-                <a:latin typeface="Trebuchet MS" pitchFamily="34" charset="0"/>
-                <a:ea typeface="Trebuchet MS" pitchFamily="34" charset="-122"/>
-                <a:cs typeface="Trebuchet MS" pitchFamily="34" charset="-120"/>
-              </a:rPr>
-              <a:t>Phonemes</a:t>
-            </a:r>
-            <a:endParaRPr lang="en-US" sz="1100" dirty="0"/>
-          </a:p>
-        </p:txBody>
-      </p:sp>
-      <p:sp>
-        <p:nvSpPr>
-          <p:cNvPr id="38" name="Shape 36"/>
-          <p:cNvSpPr/>
-          <p:nvPr/>
-        </p:nvSpPr>
-        <p:spPr>
-          <a:xfrm>
-            <a:off x="1874520" y="4096512"/>
-            <a:ext cx="6903720" cy="804672"/>
-          </a:xfrm>
-          <a:prstGeom prst="rect">
-            <a:avLst>
-              <a:gd name="adj" fmla="val 6818"/>
-            </a:avLst>
-          </a:prstGeom>
-          <a:solidFill>
-            <a:srgbClr val="F8FAFC"/>
-          </a:solidFill>
-          <a:ln w="12700">
-            <a:solidFill>
-              <a:srgbClr val="E2E8F0"/>
-            </a:solidFill>
             <a:prstDash val="dash"/>
           </a:ln>
         </p:spPr>
       </p:sp>
       <p:sp>
         <p:nvSpPr>
-          <p:cNvPr id="39" name="Text 37"/>
+          <p:cNvPr id="34" name="Text 32"/>
           <p:cNvSpPr/>
           <p:nvPr/>
         </p:nvSpPr>
@@ -32207,7 +33000,7 @@
                 <a:ea typeface="Trebuchet MS" pitchFamily="34" charset="-122"/>
                 <a:cs typeface="Trebuchet MS" pitchFamily="34" charset="-120"/>
               </a:rPr>
-              <a:t>underpriced</a:t>
+              <a:t>pricing</a:t>
             </a:r>
             <a:endParaRPr lang="en-US" sz="2800" dirty="0"/>
           </a:p>
@@ -32287,7 +33080,7 @@
         </p:nvSpPr>
         <p:spPr>
           <a:xfrm>
-            <a:off x="2221992" y="2258568"/>
+            <a:off x="2938272" y="2258568"/>
             <a:ext cx="1828800" cy="292608"/>
           </a:xfrm>
           <a:prstGeom prst="rect">
@@ -32296,11 +33089,11 @@
             </a:avLst>
           </a:prstGeom>
           <a:solidFill>
-            <a:srgbClr val="DDD6FE"/>
+            <a:srgbClr val="CCFBF1"/>
           </a:solidFill>
           <a:ln w="19050">
             <a:solidFill>
-              <a:srgbClr val="7C3AED"/>
+              <a:srgbClr val="0D9488"/>
             </a:solidFill>
             <a:prstDash val="solid"/>
           </a:ln>
@@ -32321,7 +33114,7 @@
         </p:nvSpPr>
         <p:spPr>
           <a:xfrm>
-            <a:off x="2221992" y="2258568"/>
+            <a:off x="2938272" y="2258568"/>
             <a:ext cx="1828800" cy="292608"/>
           </a:xfrm>
           <a:prstGeom prst="rect">
@@ -32340,13 +33133,13 @@
             <a:r>
               <a:rPr lang="en-US" sz="1300" b="1" dirty="0">
                 <a:solidFill>
-                  <a:srgbClr val="4C1D95"/>
+                  <a:srgbClr val="0F766E"/>
                 </a:solidFill>
                 <a:latin typeface="Trebuchet MS" pitchFamily="34" charset="0"/>
                 <a:ea typeface="Trebuchet MS" pitchFamily="34" charset="-122"/>
                 <a:cs typeface="Trebuchet MS" pitchFamily="34" charset="-120"/>
               </a:rPr>
-              <a:t>under</a:t>
+              <a:t>price</a:t>
             </a:r>
             <a:endParaRPr lang="en-US" sz="1300" dirty="0"/>
           </a:p>
@@ -32360,7 +33153,7 @@
         </p:nvSpPr>
         <p:spPr>
           <a:xfrm>
-            <a:off x="2221992" y="2569464"/>
+            <a:off x="2938272" y="2569464"/>
             <a:ext cx="1828800" cy="201168"/>
           </a:xfrm>
           <a:prstGeom prst="rect">
@@ -32385,7 +33178,7 @@
                 <a:ea typeface="Calibri" pitchFamily="34" charset="-122"/>
                 <a:cs typeface="Calibri" pitchFamily="34" charset="-120"/>
               </a:rPr>
-              <a:t>below / too little</a:t>
+              <a:t>value or cost</a:t>
             </a:r>
             <a:endParaRPr lang="en-US" sz="850" dirty="0"/>
           </a:p>
@@ -32399,7 +33192,7 @@
         </p:nvSpPr>
         <p:spPr>
           <a:xfrm>
-            <a:off x="4370832" y="2258568"/>
+            <a:off x="5803392" y="2258568"/>
             <a:ext cx="1828800" cy="292608"/>
           </a:xfrm>
           <a:prstGeom prst="rect">
@@ -32408,11 +33201,11 @@
             </a:avLst>
           </a:prstGeom>
           <a:solidFill>
-            <a:srgbClr val="CCFBF1"/>
+            <a:srgbClr val="FCE7F3"/>
           </a:solidFill>
           <a:ln w="19050">
             <a:solidFill>
-              <a:srgbClr val="0D9488"/>
+              <a:srgbClr val="DB2777"/>
             </a:solidFill>
             <a:prstDash val="solid"/>
           </a:ln>
@@ -32433,7 +33226,7 @@
         </p:nvSpPr>
         <p:spPr>
           <a:xfrm>
-            <a:off x="4370832" y="2258568"/>
+            <a:off x="5803392" y="2258568"/>
             <a:ext cx="1828800" cy="292608"/>
           </a:xfrm>
           <a:prstGeom prst="rect">
@@ -32452,13 +33245,13 @@
             <a:r>
               <a:rPr lang="en-US" sz="1300" b="1" dirty="0">
                 <a:solidFill>
-                  <a:srgbClr val="0F766E"/>
+                  <a:srgbClr val="9D174D"/>
                 </a:solidFill>
                 <a:latin typeface="Trebuchet MS" pitchFamily="34" charset="0"/>
                 <a:ea typeface="Trebuchet MS" pitchFamily="34" charset="-122"/>
                 <a:cs typeface="Trebuchet MS" pitchFamily="34" charset="-120"/>
               </a:rPr>
-              <a:t>price</a:t>
+              <a:t>ing</a:t>
             </a:r>
             <a:endParaRPr lang="en-US" sz="1300" dirty="0"/>
           </a:p>
@@ -32472,7 +33265,7 @@
         </p:nvSpPr>
         <p:spPr>
           <a:xfrm>
-            <a:off x="4370832" y="2569464"/>
+            <a:off x="5803392" y="2569464"/>
             <a:ext cx="1828800" cy="201168"/>
           </a:xfrm>
           <a:prstGeom prst="rect">
@@ -32497,7 +33290,7 @@
                 <a:ea typeface="Calibri" pitchFamily="34" charset="-122"/>
                 <a:cs typeface="Calibri" pitchFamily="34" charset="-120"/>
               </a:rPr>
-              <a:t>value or cost</a:t>
+              <a:t>ongoing action</a:t>
             </a:r>
             <a:endParaRPr lang="en-US" sz="850" dirty="0"/>
           </a:p>
@@ -32505,48 +33298,80 @@
       </p:sp>
       <p:sp>
         <p:nvSpPr>
-          <p:cNvPr id="22" name="Shape 20"/>
-          <p:cNvSpPr/>
-          <p:nvPr/>
-        </p:nvSpPr>
-        <p:spPr>
-          <a:xfrm>
-            <a:off x="6519672" y="2258568"/>
-            <a:ext cx="1828800" cy="292608"/>
+          <p:cNvPr id="22" name="Text 20"/>
+          <p:cNvSpPr/>
+          <p:nvPr/>
+        </p:nvSpPr>
+        <p:spPr>
+          <a:xfrm>
+            <a:off x="5803392" y="2752344"/>
+            <a:ext cx="1828800" cy="182880"/>
+          </a:xfrm>
+          <a:prstGeom prst="rect">
+            <a:avLst/>
+          </a:prstGeom>
+          <a:noFill/>
+          <a:ln/>
+        </p:spPr>
+        <p:txBody>
+          <a:bodyPr wrap="square" lIns="0" tIns="0" rIns="0" bIns="0" rtlCol="0" anchor="t"/>
+          <a:lstStyle/>
+          <a:p>
+            <a:pPr algn="ctr" indent="0" marL="0">
+              <a:buNone/>
+            </a:pPr>
+            <a:r>
+              <a:rPr lang="en-US" sz="700" i="1" dirty="0">
+                <a:solidFill>
+                  <a:srgbClr val="94A3B8"/>
+                </a:solidFill>
+                <a:latin typeface="Calibri" pitchFamily="34" charset="0"/>
+                <a:ea typeface="Calibri" pitchFamily="34" charset="-122"/>
+                <a:cs typeface="Calibri" pitchFamily="34" charset="-120"/>
+              </a:rPr>
+              <a:t>'e' dropped before vowel suffix</a:t>
+            </a:r>
+            <a:endParaRPr lang="en-US" sz="700" dirty="0"/>
+          </a:p>
+        </p:txBody>
+      </p:sp>
+      <p:sp>
+        <p:nvSpPr>
+          <p:cNvPr id="23" name="Shape 21"/>
+          <p:cNvSpPr/>
+          <p:nvPr/>
+        </p:nvSpPr>
+        <p:spPr>
+          <a:xfrm>
+            <a:off x="365760" y="3273552"/>
+            <a:ext cx="1371600" cy="658368"/>
           </a:xfrm>
           <a:prstGeom prst="rect">
             <a:avLst>
-              <a:gd name="adj" fmla="val 25000"/>
+              <a:gd name="adj" fmla="val 8333"/>
             </a:avLst>
           </a:prstGeom>
           <a:solidFill>
-            <a:srgbClr val="FCE7F3"/>
-          </a:solidFill>
-          <a:ln w="19050">
-            <a:solidFill>
-              <a:srgbClr val="DB2777"/>
-            </a:solidFill>
-            <a:prstDash val="solid"/>
-          </a:ln>
-          <a:effectLst>
-            <a:outerShdw sx="100000" sy="100000" kx="0" ky="0" algn="bl" rotWithShape="0" blurRad="101600" dist="38100" dir="8100000">
-              <a:srgbClr val="000000">
-                <a:alpha val="12000"/>
-              </a:srgbClr>
-            </a:outerShdw>
-          </a:effectLst>
-        </p:spPr>
-      </p:sp>
-      <p:sp>
-        <p:nvSpPr>
-          <p:cNvPr id="23" name="Text 21"/>
-          <p:cNvSpPr/>
-          <p:nvPr/>
-        </p:nvSpPr>
-        <p:spPr>
-          <a:xfrm>
-            <a:off x="6519672" y="2258568"/>
-            <a:ext cx="1828800" cy="292608"/>
+            <a:srgbClr val="E2E8F0"/>
+          </a:solidFill>
+          <a:ln w="12700">
+            <a:solidFill>
+              <a:srgbClr val="E2E8F0"/>
+            </a:solidFill>
+            <a:prstDash val="solid"/>
+          </a:ln>
+        </p:spPr>
+      </p:sp>
+      <p:sp>
+        <p:nvSpPr>
+          <p:cNvPr id="24" name="Text 22"/>
+          <p:cNvSpPr/>
+          <p:nvPr/>
+        </p:nvSpPr>
+        <p:spPr>
+          <a:xfrm>
+            <a:off x="365760" y="3273552"/>
+            <a:ext cx="1371600" cy="658368"/>
           </a:xfrm>
           <a:prstGeom prst="rect">
             <a:avLst/>
@@ -32562,30 +33387,585 @@
               <a:buNone/>
             </a:pPr>
             <a:r>
-              <a:rPr lang="en-US" sz="1300" b="1" dirty="0">
-                <a:solidFill>
-                  <a:srgbClr val="9D174D"/>
+              <a:rPr lang="en-US" sz="1100" b="1" dirty="0">
+                <a:solidFill>
+                  <a:srgbClr val="475569"/>
                 </a:solidFill>
                 <a:latin typeface="Trebuchet MS" pitchFamily="34" charset="0"/>
                 <a:ea typeface="Trebuchet MS" pitchFamily="34" charset="-122"/>
                 <a:cs typeface="Trebuchet MS" pitchFamily="34" charset="-120"/>
               </a:rPr>
-              <a:t>ed</a:t>
-            </a:r>
-            <a:endParaRPr lang="en-US" sz="1300" dirty="0"/>
-          </a:p>
-        </p:txBody>
-      </p:sp>
-      <p:sp>
-        <p:nvSpPr>
-          <p:cNvPr id="24" name="Text 22"/>
-          <p:cNvSpPr/>
-          <p:nvPr/>
-        </p:nvSpPr>
-        <p:spPr>
-          <a:xfrm>
-            <a:off x="6519672" y="2569464"/>
-            <a:ext cx="1828800" cy="201168"/>
+              <a:t>Syllables</a:t>
+            </a:r>
+            <a:endParaRPr lang="en-US" sz="1100" dirty="0"/>
+          </a:p>
+        </p:txBody>
+      </p:sp>
+      <p:sp>
+        <p:nvSpPr>
+          <p:cNvPr id="25" name="Shape 23"/>
+          <p:cNvSpPr/>
+          <p:nvPr/>
+        </p:nvSpPr>
+        <p:spPr>
+          <a:xfrm>
+            <a:off x="1874520" y="3273552"/>
+            <a:ext cx="6903720" cy="658368"/>
+          </a:xfrm>
+          <a:prstGeom prst="rect">
+            <a:avLst>
+              <a:gd name="adj" fmla="val 8333"/>
+            </a:avLst>
+          </a:prstGeom>
+          <a:solidFill>
+            <a:srgbClr val="CCFBF1"/>
+          </a:solidFill>
+          <a:ln w="12700">
+            <a:solidFill>
+              <a:srgbClr val="0D9488"/>
+            </a:solidFill>
+            <a:prstDash val="solid"/>
+          </a:ln>
+        </p:spPr>
+      </p:sp>
+      <p:sp>
+        <p:nvSpPr>
+          <p:cNvPr id="26" name="Shape 24"/>
+          <p:cNvSpPr/>
+          <p:nvPr/>
+        </p:nvSpPr>
+        <p:spPr>
+          <a:xfrm>
+            <a:off x="2999232" y="3364992"/>
+            <a:ext cx="1645920" cy="475488"/>
+          </a:xfrm>
+          <a:prstGeom prst="rect">
+            <a:avLst>
+              <a:gd name="adj" fmla="val 9615"/>
+            </a:avLst>
+          </a:prstGeom>
+          <a:solidFill>
+            <a:srgbClr val="FFFFFF"/>
+          </a:solidFill>
+          <a:ln w="12700">
+            <a:solidFill>
+              <a:srgbClr val="0D9488"/>
+            </a:solidFill>
+            <a:prstDash val="solid"/>
+          </a:ln>
+        </p:spPr>
+      </p:sp>
+      <p:sp>
+        <p:nvSpPr>
+          <p:cNvPr id="27" name="Text 25"/>
+          <p:cNvSpPr/>
+          <p:nvPr/>
+        </p:nvSpPr>
+        <p:spPr>
+          <a:xfrm>
+            <a:off x="2999232" y="3364992"/>
+            <a:ext cx="1645920" cy="475488"/>
+          </a:xfrm>
+          <a:prstGeom prst="rect">
+            <a:avLst/>
+          </a:prstGeom>
+          <a:noFill/>
+          <a:ln/>
+        </p:spPr>
+        <p:txBody>
+          <a:bodyPr wrap="square" lIns="0" tIns="0" rIns="0" bIns="0" rtlCol="0" anchor="ctr"/>
+          <a:lstStyle/>
+          <a:p>
+            <a:pPr algn="ctr" indent="0" marL="0">
+              <a:buNone/>
+            </a:pPr>
+            <a:r>
+              <a:rPr lang="en-US" sz="1400" b="1" dirty="0">
+                <a:solidFill>
+                  <a:srgbClr val="0D9488"/>
+                </a:solidFill>
+                <a:latin typeface="Trebuchet MS" pitchFamily="34" charset="0"/>
+                <a:ea typeface="Trebuchet MS" pitchFamily="34" charset="-122"/>
+                <a:cs typeface="Trebuchet MS" pitchFamily="34" charset="-120"/>
+              </a:rPr>
+              <a:t>pri</a:t>
+            </a:r>
+            <a:endParaRPr lang="en-US" sz="1400" dirty="0"/>
+          </a:p>
+        </p:txBody>
+      </p:sp>
+      <p:sp>
+        <p:nvSpPr>
+          <p:cNvPr id="28" name="Text 26"/>
+          <p:cNvSpPr/>
+          <p:nvPr/>
+        </p:nvSpPr>
+        <p:spPr>
+          <a:xfrm>
+            <a:off x="4645152" y="3364992"/>
+            <a:ext cx="1097280" cy="475488"/>
+          </a:xfrm>
+          <a:prstGeom prst="rect">
+            <a:avLst/>
+          </a:prstGeom>
+          <a:noFill/>
+          <a:ln/>
+        </p:spPr>
+        <p:txBody>
+          <a:bodyPr wrap="square" lIns="0" tIns="0" rIns="0" bIns="0" rtlCol="0" anchor="ctr"/>
+          <a:lstStyle/>
+          <a:p>
+            <a:pPr algn="ctr" indent="0" marL="0">
+              <a:buNone/>
+            </a:pPr>
+            <a:r>
+              <a:rPr lang="en-US" sz="1600" b="1" dirty="0">
+                <a:solidFill>
+                  <a:srgbClr val="0D9488"/>
+                </a:solidFill>
+                <a:latin typeface="Trebuchet MS" pitchFamily="34" charset="0"/>
+                <a:ea typeface="Trebuchet MS" pitchFamily="34" charset="-122"/>
+                <a:cs typeface="Trebuchet MS" pitchFamily="34" charset="-120"/>
+              </a:rPr>
+              <a:t>·</a:t>
+            </a:r>
+            <a:endParaRPr lang="en-US" sz="1600" dirty="0"/>
+          </a:p>
+        </p:txBody>
+      </p:sp>
+      <p:sp>
+        <p:nvSpPr>
+          <p:cNvPr id="29" name="Shape 27"/>
+          <p:cNvSpPr/>
+          <p:nvPr/>
+        </p:nvSpPr>
+        <p:spPr>
+          <a:xfrm>
+            <a:off x="5742432" y="3364992"/>
+            <a:ext cx="1645920" cy="475488"/>
+          </a:xfrm>
+          <a:prstGeom prst="rect">
+            <a:avLst>
+              <a:gd name="adj" fmla="val 9615"/>
+            </a:avLst>
+          </a:prstGeom>
+          <a:solidFill>
+            <a:srgbClr val="FFFFFF"/>
+          </a:solidFill>
+          <a:ln w="12700">
+            <a:solidFill>
+              <a:srgbClr val="0D9488"/>
+            </a:solidFill>
+            <a:prstDash val="solid"/>
+          </a:ln>
+        </p:spPr>
+      </p:sp>
+      <p:sp>
+        <p:nvSpPr>
+          <p:cNvPr id="30" name="Text 28"/>
+          <p:cNvSpPr/>
+          <p:nvPr/>
+        </p:nvSpPr>
+        <p:spPr>
+          <a:xfrm>
+            <a:off x="5742432" y="3364992"/>
+            <a:ext cx="1645920" cy="475488"/>
+          </a:xfrm>
+          <a:prstGeom prst="rect">
+            <a:avLst/>
+          </a:prstGeom>
+          <a:noFill/>
+          <a:ln/>
+        </p:spPr>
+        <p:txBody>
+          <a:bodyPr wrap="square" lIns="0" tIns="0" rIns="0" bIns="0" rtlCol="0" anchor="ctr"/>
+          <a:lstStyle/>
+          <a:p>
+            <a:pPr algn="ctr" indent="0" marL="0">
+              <a:buNone/>
+            </a:pPr>
+            <a:r>
+              <a:rPr lang="en-US" sz="1400" b="1" dirty="0">
+                <a:solidFill>
+                  <a:srgbClr val="0D9488"/>
+                </a:solidFill>
+                <a:latin typeface="Trebuchet MS" pitchFamily="34" charset="0"/>
+                <a:ea typeface="Trebuchet MS" pitchFamily="34" charset="-122"/>
+                <a:cs typeface="Trebuchet MS" pitchFamily="34" charset="-120"/>
+              </a:rPr>
+              <a:t>cing</a:t>
+            </a:r>
+            <a:endParaRPr lang="en-US" sz="1400" dirty="0"/>
+          </a:p>
+        </p:txBody>
+      </p:sp>
+      <p:sp>
+        <p:nvSpPr>
+          <p:cNvPr id="31" name="Shape 29"/>
+          <p:cNvSpPr/>
+          <p:nvPr/>
+        </p:nvSpPr>
+        <p:spPr>
+          <a:xfrm>
+            <a:off x="365760" y="4096512"/>
+            <a:ext cx="1371600" cy="804672"/>
+          </a:xfrm>
+          <a:prstGeom prst="rect">
+            <a:avLst>
+              <a:gd name="adj" fmla="val 6818"/>
+            </a:avLst>
+          </a:prstGeom>
+          <a:solidFill>
+            <a:srgbClr val="E2E8F0"/>
+          </a:solidFill>
+          <a:ln w="12700">
+            <a:solidFill>
+              <a:srgbClr val="E2E8F0"/>
+            </a:solidFill>
+            <a:prstDash val="solid"/>
+          </a:ln>
+        </p:spPr>
+      </p:sp>
+      <p:sp>
+        <p:nvSpPr>
+          <p:cNvPr id="32" name="Text 30"/>
+          <p:cNvSpPr/>
+          <p:nvPr/>
+        </p:nvSpPr>
+        <p:spPr>
+          <a:xfrm>
+            <a:off x="365760" y="4096512"/>
+            <a:ext cx="1371600" cy="804672"/>
+          </a:xfrm>
+          <a:prstGeom prst="rect">
+            <a:avLst/>
+          </a:prstGeom>
+          <a:noFill/>
+          <a:ln/>
+        </p:spPr>
+        <p:txBody>
+          <a:bodyPr wrap="square" lIns="0" tIns="0" rIns="0" bIns="0" rtlCol="0" anchor="ctr"/>
+          <a:lstStyle/>
+          <a:p>
+            <a:pPr algn="ctr" indent="0" marL="0">
+              <a:buNone/>
+            </a:pPr>
+            <a:r>
+              <a:rPr lang="en-US" sz="1100" b="1" dirty="0">
+                <a:solidFill>
+                  <a:srgbClr val="475569"/>
+                </a:solidFill>
+                <a:latin typeface="Trebuchet MS" pitchFamily="34" charset="0"/>
+                <a:ea typeface="Trebuchet MS" pitchFamily="34" charset="-122"/>
+                <a:cs typeface="Trebuchet MS" pitchFamily="34" charset="-120"/>
+              </a:rPr>
+              <a:t>Phonemes</a:t>
+            </a:r>
+            <a:endParaRPr lang="en-US" sz="1100" dirty="0"/>
+          </a:p>
+        </p:txBody>
+      </p:sp>
+      <p:sp>
+        <p:nvSpPr>
+          <p:cNvPr id="33" name="Shape 31"/>
+          <p:cNvSpPr/>
+          <p:nvPr/>
+        </p:nvSpPr>
+        <p:spPr>
+          <a:xfrm>
+            <a:off x="1874520" y="4096512"/>
+            <a:ext cx="6903720" cy="804672"/>
+          </a:xfrm>
+          <a:prstGeom prst="rect">
+            <a:avLst>
+              <a:gd name="adj" fmla="val 6818"/>
+            </a:avLst>
+          </a:prstGeom>
+          <a:solidFill>
+            <a:srgbClr val="FCE7F3"/>
+          </a:solidFill>
+          <a:ln w="12700">
+            <a:solidFill>
+              <a:srgbClr val="DB2777"/>
+            </a:solidFill>
+            <a:prstDash val="solid"/>
+          </a:ln>
+        </p:spPr>
+      </p:sp>
+      <p:sp>
+        <p:nvSpPr>
+          <p:cNvPr id="34" name="Shape 32"/>
+          <p:cNvSpPr/>
+          <p:nvPr/>
+        </p:nvSpPr>
+        <p:spPr>
+          <a:xfrm>
+            <a:off x="2254649" y="4169664"/>
+            <a:ext cx="685800" cy="384048"/>
+          </a:xfrm>
+          <a:prstGeom prst="rect">
+            <a:avLst>
+              <a:gd name="adj" fmla="val 9524"/>
+            </a:avLst>
+          </a:prstGeom>
+          <a:solidFill>
+            <a:srgbClr val="FFFFFF"/>
+          </a:solidFill>
+          <a:ln w="12700">
+            <a:solidFill>
+              <a:srgbClr val="DB2777"/>
+            </a:solidFill>
+            <a:prstDash val="solid"/>
+          </a:ln>
+        </p:spPr>
+      </p:sp>
+      <p:sp>
+        <p:nvSpPr>
+          <p:cNvPr id="35" name="Text 33"/>
+          <p:cNvSpPr/>
+          <p:nvPr/>
+        </p:nvSpPr>
+        <p:spPr>
+          <a:xfrm>
+            <a:off x="2254649" y="4169664"/>
+            <a:ext cx="685800" cy="384048"/>
+          </a:xfrm>
+          <a:prstGeom prst="rect">
+            <a:avLst/>
+          </a:prstGeom>
+          <a:noFill/>
+          <a:ln/>
+        </p:spPr>
+        <p:txBody>
+          <a:bodyPr wrap="square" lIns="0" tIns="0" rIns="0" bIns="0" rtlCol="0" anchor="ctr"/>
+          <a:lstStyle/>
+          <a:p>
+            <a:pPr algn="ctr" indent="0" marL="0">
+              <a:buNone/>
+            </a:pPr>
+            <a:r>
+              <a:rPr lang="en-US" sz="900" b="1" dirty="0">
+                <a:solidFill>
+                  <a:srgbClr val="9D174D"/>
+                </a:solidFill>
+                <a:latin typeface="Trebuchet MS" pitchFamily="34" charset="0"/>
+                <a:ea typeface="Trebuchet MS" pitchFamily="34" charset="-122"/>
+                <a:cs typeface="Trebuchet MS" pitchFamily="34" charset="-120"/>
+              </a:rPr>
+              <a:t>p</a:t>
+            </a:r>
+            <a:endParaRPr lang="en-US" sz="900" dirty="0"/>
+          </a:p>
+        </p:txBody>
+      </p:sp>
+      <p:sp>
+        <p:nvSpPr>
+          <p:cNvPr id="36" name="Shape 34"/>
+          <p:cNvSpPr/>
+          <p:nvPr/>
+        </p:nvSpPr>
+        <p:spPr>
+          <a:xfrm>
+            <a:off x="3293146" y="4169664"/>
+            <a:ext cx="685800" cy="384048"/>
+          </a:xfrm>
+          <a:prstGeom prst="rect">
+            <a:avLst>
+              <a:gd name="adj" fmla="val 9524"/>
+            </a:avLst>
+          </a:prstGeom>
+          <a:solidFill>
+            <a:srgbClr val="FFFFFF"/>
+          </a:solidFill>
+          <a:ln w="12700">
+            <a:solidFill>
+              <a:srgbClr val="DB2777"/>
+            </a:solidFill>
+            <a:prstDash val="solid"/>
+          </a:ln>
+        </p:spPr>
+      </p:sp>
+      <p:sp>
+        <p:nvSpPr>
+          <p:cNvPr id="37" name="Text 35"/>
+          <p:cNvSpPr/>
+          <p:nvPr/>
+        </p:nvSpPr>
+        <p:spPr>
+          <a:xfrm>
+            <a:off x="3293146" y="4169664"/>
+            <a:ext cx="685800" cy="384048"/>
+          </a:xfrm>
+          <a:prstGeom prst="rect">
+            <a:avLst/>
+          </a:prstGeom>
+          <a:noFill/>
+          <a:ln/>
+        </p:spPr>
+        <p:txBody>
+          <a:bodyPr wrap="square" lIns="0" tIns="0" rIns="0" bIns="0" rtlCol="0" anchor="ctr"/>
+          <a:lstStyle/>
+          <a:p>
+            <a:pPr algn="ctr" indent="0" marL="0">
+              <a:buNone/>
+            </a:pPr>
+            <a:r>
+              <a:rPr lang="en-US" sz="900" b="1" dirty="0">
+                <a:solidFill>
+                  <a:srgbClr val="9D174D"/>
+                </a:solidFill>
+                <a:latin typeface="Trebuchet MS" pitchFamily="34" charset="0"/>
+                <a:ea typeface="Trebuchet MS" pitchFamily="34" charset="-122"/>
+                <a:cs typeface="Trebuchet MS" pitchFamily="34" charset="-120"/>
+              </a:rPr>
+              <a:t>r</a:t>
+            </a:r>
+            <a:endParaRPr lang="en-US" sz="900" dirty="0"/>
+          </a:p>
+        </p:txBody>
+      </p:sp>
+      <p:sp>
+        <p:nvSpPr>
+          <p:cNvPr id="38" name="Shape 36"/>
+          <p:cNvSpPr/>
+          <p:nvPr/>
+        </p:nvSpPr>
+        <p:spPr>
+          <a:xfrm>
+            <a:off x="4331643" y="4169664"/>
+            <a:ext cx="685800" cy="384048"/>
+          </a:xfrm>
+          <a:prstGeom prst="rect">
+            <a:avLst>
+              <a:gd name="adj" fmla="val 9524"/>
+            </a:avLst>
+          </a:prstGeom>
+          <a:solidFill>
+            <a:srgbClr val="FFFFFF"/>
+          </a:solidFill>
+          <a:ln w="12700">
+            <a:solidFill>
+              <a:srgbClr val="DB2777"/>
+            </a:solidFill>
+            <a:prstDash val="solid"/>
+          </a:ln>
+        </p:spPr>
+      </p:sp>
+      <p:sp>
+        <p:nvSpPr>
+          <p:cNvPr id="39" name="Text 37"/>
+          <p:cNvSpPr/>
+          <p:nvPr/>
+        </p:nvSpPr>
+        <p:spPr>
+          <a:xfrm>
+            <a:off x="4331643" y="4169664"/>
+            <a:ext cx="685800" cy="384048"/>
+          </a:xfrm>
+          <a:prstGeom prst="rect">
+            <a:avLst/>
+          </a:prstGeom>
+          <a:noFill/>
+          <a:ln/>
+        </p:spPr>
+        <p:txBody>
+          <a:bodyPr wrap="square" lIns="0" tIns="0" rIns="0" bIns="0" rtlCol="0" anchor="ctr"/>
+          <a:lstStyle/>
+          <a:p>
+            <a:pPr algn="ctr" indent="0" marL="0">
+              <a:buNone/>
+            </a:pPr>
+            <a:r>
+              <a:rPr lang="en-US" sz="900" b="1" dirty="0">
+                <a:solidFill>
+                  <a:srgbClr val="9D174D"/>
+                </a:solidFill>
+                <a:latin typeface="Trebuchet MS" pitchFamily="34" charset="0"/>
+                <a:ea typeface="Trebuchet MS" pitchFamily="34" charset="-122"/>
+                <a:cs typeface="Trebuchet MS" pitchFamily="34" charset="-120"/>
+              </a:rPr>
+              <a:t>i</a:t>
+            </a:r>
+            <a:endParaRPr lang="en-US" sz="900" dirty="0"/>
+          </a:p>
+        </p:txBody>
+      </p:sp>
+      <p:sp>
+        <p:nvSpPr>
+          <p:cNvPr id="40" name="Shape 38"/>
+          <p:cNvSpPr/>
+          <p:nvPr/>
+        </p:nvSpPr>
+        <p:spPr>
+          <a:xfrm>
+            <a:off x="5370141" y="4169664"/>
+            <a:ext cx="685800" cy="384048"/>
+          </a:xfrm>
+          <a:prstGeom prst="rect">
+            <a:avLst>
+              <a:gd name="adj" fmla="val 9524"/>
+            </a:avLst>
+          </a:prstGeom>
+          <a:solidFill>
+            <a:srgbClr val="FFFFFF"/>
+          </a:solidFill>
+          <a:ln w="12700">
+            <a:solidFill>
+              <a:srgbClr val="DB2777"/>
+            </a:solidFill>
+            <a:prstDash val="solid"/>
+          </a:ln>
+        </p:spPr>
+      </p:sp>
+      <p:sp>
+        <p:nvSpPr>
+          <p:cNvPr id="41" name="Text 39"/>
+          <p:cNvSpPr/>
+          <p:nvPr/>
+        </p:nvSpPr>
+        <p:spPr>
+          <a:xfrm>
+            <a:off x="5370141" y="4169664"/>
+            <a:ext cx="685800" cy="384048"/>
+          </a:xfrm>
+          <a:prstGeom prst="rect">
+            <a:avLst/>
+          </a:prstGeom>
+          <a:noFill/>
+          <a:ln/>
+        </p:spPr>
+        <p:txBody>
+          <a:bodyPr wrap="square" lIns="0" tIns="0" rIns="0" bIns="0" rtlCol="0" anchor="ctr"/>
+          <a:lstStyle/>
+          <a:p>
+            <a:pPr algn="ctr" indent="0" marL="0">
+              <a:buNone/>
+            </a:pPr>
+            <a:r>
+              <a:rPr lang="en-US" sz="900" b="1" dirty="0">
+                <a:solidFill>
+                  <a:srgbClr val="9D174D"/>
+                </a:solidFill>
+                <a:latin typeface="Trebuchet MS" pitchFamily="34" charset="0"/>
+                <a:ea typeface="Trebuchet MS" pitchFamily="34" charset="-122"/>
+                <a:cs typeface="Trebuchet MS" pitchFamily="34" charset="-120"/>
+              </a:rPr>
+              <a:t>c</a:t>
+            </a:r>
+            <a:endParaRPr lang="en-US" sz="900" dirty="0"/>
+          </a:p>
+        </p:txBody>
+      </p:sp>
+      <p:sp>
+        <p:nvSpPr>
+          <p:cNvPr id="42" name="Text 40"/>
+          <p:cNvSpPr/>
+          <p:nvPr/>
+        </p:nvSpPr>
+        <p:spPr>
+          <a:xfrm>
+            <a:off x="5370141" y="4572000"/>
+            <a:ext cx="685800" cy="219456"/>
           </a:xfrm>
           <a:prstGeom prst="rect">
             <a:avLst/>
@@ -32601,57 +33981,57 @@
               <a:buNone/>
             </a:pPr>
             <a:r>
-              <a:rPr lang="en-US" sz="850" dirty="0">
-                <a:solidFill>
-                  <a:srgbClr val="475569"/>
+              <a:rPr lang="en-US" sz="750" i="1" dirty="0">
+                <a:solidFill>
+                  <a:srgbClr val="94A3B8"/>
                 </a:solidFill>
                 <a:latin typeface="Calibri" pitchFamily="34" charset="0"/>
                 <a:ea typeface="Calibri" pitchFamily="34" charset="-122"/>
                 <a:cs typeface="Calibri" pitchFamily="34" charset="-120"/>
               </a:rPr>
-              <a:t>past tense / having been done</a:t>
-            </a:r>
-            <a:endParaRPr lang="en-US" sz="850" dirty="0"/>
-          </a:p>
-        </p:txBody>
-      </p:sp>
-      <p:sp>
-        <p:nvSpPr>
-          <p:cNvPr id="25" name="Shape 23"/>
-          <p:cNvSpPr/>
-          <p:nvPr/>
-        </p:nvSpPr>
-        <p:spPr>
-          <a:xfrm>
-            <a:off x="365760" y="3273552"/>
-            <a:ext cx="1371600" cy="658368"/>
+              <a:t>/s/</a:t>
+            </a:r>
+            <a:endParaRPr lang="en-US" sz="750" dirty="0"/>
+          </a:p>
+        </p:txBody>
+      </p:sp>
+      <p:sp>
+        <p:nvSpPr>
+          <p:cNvPr id="43" name="Shape 41"/>
+          <p:cNvSpPr/>
+          <p:nvPr/>
+        </p:nvSpPr>
+        <p:spPr>
+          <a:xfrm>
+            <a:off x="6408638" y="4169664"/>
+            <a:ext cx="685800" cy="384048"/>
           </a:xfrm>
           <a:prstGeom prst="rect">
             <a:avLst>
-              <a:gd name="adj" fmla="val 8333"/>
+              <a:gd name="adj" fmla="val 9524"/>
             </a:avLst>
           </a:prstGeom>
           <a:solidFill>
-            <a:srgbClr val="E2E8F0"/>
-          </a:solidFill>
-          <a:ln w="12700">
-            <a:solidFill>
-              <a:srgbClr val="E2E8F0"/>
-            </a:solidFill>
-            <a:prstDash val="solid"/>
-          </a:ln>
-        </p:spPr>
-      </p:sp>
-      <p:sp>
-        <p:nvSpPr>
-          <p:cNvPr id="26" name="Text 24"/>
-          <p:cNvSpPr/>
-          <p:nvPr/>
-        </p:nvSpPr>
-        <p:spPr>
-          <a:xfrm>
-            <a:off x="365760" y="3273552"/>
-            <a:ext cx="1371600" cy="658368"/>
+            <a:srgbClr val="FFFFFF"/>
+          </a:solidFill>
+          <a:ln w="12700">
+            <a:solidFill>
+              <a:srgbClr val="DB2777"/>
+            </a:solidFill>
+            <a:prstDash val="solid"/>
+          </a:ln>
+        </p:spPr>
+      </p:sp>
+      <p:sp>
+        <p:nvSpPr>
+          <p:cNvPr id="44" name="Text 42"/>
+          <p:cNvSpPr/>
+          <p:nvPr/>
+        </p:nvSpPr>
+        <p:spPr>
+          <a:xfrm>
+            <a:off x="6408638" y="4169664"/>
+            <a:ext cx="685800" cy="384048"/>
           </a:xfrm>
           <a:prstGeom prst="rect">
             <a:avLst/>
@@ -32667,84 +34047,57 @@
               <a:buNone/>
             </a:pPr>
             <a:r>
-              <a:rPr lang="en-US" sz="1100" b="1" dirty="0">
-                <a:solidFill>
-                  <a:srgbClr val="475569"/>
+              <a:rPr lang="en-US" sz="900" b="1" dirty="0">
+                <a:solidFill>
+                  <a:srgbClr val="9D174D"/>
                 </a:solidFill>
                 <a:latin typeface="Trebuchet MS" pitchFamily="34" charset="0"/>
                 <a:ea typeface="Trebuchet MS" pitchFamily="34" charset="-122"/>
                 <a:cs typeface="Trebuchet MS" pitchFamily="34" charset="-120"/>
               </a:rPr>
-              <a:t>Syllables</a:t>
-            </a:r>
-            <a:endParaRPr lang="en-US" sz="1100" dirty="0"/>
-          </a:p>
-        </p:txBody>
-      </p:sp>
-      <p:sp>
-        <p:nvSpPr>
-          <p:cNvPr id="27" name="Shape 25"/>
-          <p:cNvSpPr/>
-          <p:nvPr/>
-        </p:nvSpPr>
-        <p:spPr>
-          <a:xfrm>
-            <a:off x="1874520" y="3273552"/>
-            <a:ext cx="6903720" cy="658368"/>
+              <a:t>i</a:t>
+            </a:r>
+            <a:endParaRPr lang="en-US" sz="900" dirty="0"/>
+          </a:p>
+        </p:txBody>
+      </p:sp>
+      <p:sp>
+        <p:nvSpPr>
+          <p:cNvPr id="45" name="Shape 43"/>
+          <p:cNvSpPr/>
+          <p:nvPr/>
+        </p:nvSpPr>
+        <p:spPr>
+          <a:xfrm>
+            <a:off x="7447135" y="4169664"/>
+            <a:ext cx="685800" cy="384048"/>
           </a:xfrm>
           <a:prstGeom prst="rect">
             <a:avLst>
-              <a:gd name="adj" fmla="val 8333"/>
+              <a:gd name="adj" fmla="val 9524"/>
             </a:avLst>
           </a:prstGeom>
           <a:solidFill>
-            <a:srgbClr val="CCFBF1"/>
-          </a:solidFill>
-          <a:ln w="12700">
-            <a:solidFill>
-              <a:srgbClr val="0D9488"/>
-            </a:solidFill>
-            <a:prstDash val="solid"/>
-          </a:ln>
-        </p:spPr>
-      </p:sp>
-      <p:sp>
-        <p:nvSpPr>
-          <p:cNvPr id="28" name="Shape 26"/>
-          <p:cNvSpPr/>
-          <p:nvPr/>
-        </p:nvSpPr>
-        <p:spPr>
-          <a:xfrm>
-            <a:off x="2313432" y="3364992"/>
-            <a:ext cx="1645920" cy="475488"/>
-          </a:xfrm>
-          <a:prstGeom prst="rect">
-            <a:avLst>
-              <a:gd name="adj" fmla="val 9615"/>
-            </a:avLst>
-          </a:prstGeom>
-          <a:solidFill>
             <a:srgbClr val="FFFFFF"/>
           </a:solidFill>
           <a:ln w="12700">
             <a:solidFill>
-              <a:srgbClr val="0D9488"/>
-            </a:solidFill>
-            <a:prstDash val="solid"/>
-          </a:ln>
-        </p:spPr>
-      </p:sp>
-      <p:sp>
-        <p:nvSpPr>
-          <p:cNvPr id="29" name="Text 27"/>
-          <p:cNvSpPr/>
-          <p:nvPr/>
-        </p:nvSpPr>
-        <p:spPr>
-          <a:xfrm>
-            <a:off x="2313432" y="3364992"/>
-            <a:ext cx="1645920" cy="475488"/>
+              <a:srgbClr val="DB2777"/>
+            </a:solidFill>
+            <a:prstDash val="solid"/>
+          </a:ln>
+        </p:spPr>
+      </p:sp>
+      <p:sp>
+        <p:nvSpPr>
+          <p:cNvPr id="46" name="Text 44"/>
+          <p:cNvSpPr/>
+          <p:nvPr/>
+        </p:nvSpPr>
+        <p:spPr>
+          <a:xfrm>
+            <a:off x="7447135" y="4169664"/>
+            <a:ext cx="685800" cy="384048"/>
           </a:xfrm>
           <a:prstGeom prst="rect">
             <a:avLst/>
@@ -32760,951 +34113,15 @@
               <a:buNone/>
             </a:pPr>
             <a:r>
-              <a:rPr lang="en-US" sz="1400" b="1" dirty="0">
-                <a:solidFill>
-                  <a:srgbClr val="0D9488"/>
+              <a:rPr lang="en-US" sz="900" b="1" dirty="0">
+                <a:solidFill>
+                  <a:srgbClr val="9D174D"/>
                 </a:solidFill>
                 <a:latin typeface="Trebuchet MS" pitchFamily="34" charset="0"/>
                 <a:ea typeface="Trebuchet MS" pitchFamily="34" charset="-122"/>
                 <a:cs typeface="Trebuchet MS" pitchFamily="34" charset="-120"/>
               </a:rPr>
-              <a:t>un</a:t>
-            </a:r>
-            <a:endParaRPr lang="en-US" sz="1400" dirty="0"/>
-          </a:p>
-        </p:txBody>
-      </p:sp>
-      <p:sp>
-        <p:nvSpPr>
-          <p:cNvPr id="30" name="Text 28"/>
-          <p:cNvSpPr/>
-          <p:nvPr/>
-        </p:nvSpPr>
-        <p:spPr>
-          <a:xfrm>
-            <a:off x="3959352" y="3364992"/>
-            <a:ext cx="411480" cy="475488"/>
-          </a:xfrm>
-          <a:prstGeom prst="rect">
-            <a:avLst/>
-          </a:prstGeom>
-          <a:noFill/>
-          <a:ln/>
-        </p:spPr>
-        <p:txBody>
-          <a:bodyPr wrap="square" lIns="0" tIns="0" rIns="0" bIns="0" rtlCol="0" anchor="ctr"/>
-          <a:lstStyle/>
-          <a:p>
-            <a:pPr algn="ctr" indent="0" marL="0">
-              <a:buNone/>
-            </a:pPr>
-            <a:r>
-              <a:rPr lang="en-US" sz="1600" b="1" dirty="0">
-                <a:solidFill>
-                  <a:srgbClr val="0D9488"/>
-                </a:solidFill>
-                <a:latin typeface="Trebuchet MS" pitchFamily="34" charset="0"/>
-                <a:ea typeface="Trebuchet MS" pitchFamily="34" charset="-122"/>
-                <a:cs typeface="Trebuchet MS" pitchFamily="34" charset="-120"/>
-              </a:rPr>
-              <a:t>·</a:t>
-            </a:r>
-            <a:endParaRPr lang="en-US" sz="1600" dirty="0"/>
-          </a:p>
-        </p:txBody>
-      </p:sp>
-      <p:sp>
-        <p:nvSpPr>
-          <p:cNvPr id="31" name="Shape 29"/>
-          <p:cNvSpPr/>
-          <p:nvPr/>
-        </p:nvSpPr>
-        <p:spPr>
-          <a:xfrm>
-            <a:off x="4370832" y="3364992"/>
-            <a:ext cx="1645920" cy="475488"/>
-          </a:xfrm>
-          <a:prstGeom prst="rect">
-            <a:avLst>
-              <a:gd name="adj" fmla="val 9615"/>
-            </a:avLst>
-          </a:prstGeom>
-          <a:solidFill>
-            <a:srgbClr val="FFFFFF"/>
-          </a:solidFill>
-          <a:ln w="12700">
-            <a:solidFill>
-              <a:srgbClr val="0D9488"/>
-            </a:solidFill>
-            <a:prstDash val="solid"/>
-          </a:ln>
-        </p:spPr>
-      </p:sp>
-      <p:sp>
-        <p:nvSpPr>
-          <p:cNvPr id="32" name="Text 30"/>
-          <p:cNvSpPr/>
-          <p:nvPr/>
-        </p:nvSpPr>
-        <p:spPr>
-          <a:xfrm>
-            <a:off x="4370832" y="3364992"/>
-            <a:ext cx="1645920" cy="475488"/>
-          </a:xfrm>
-          <a:prstGeom prst="rect">
-            <a:avLst/>
-          </a:prstGeom>
-          <a:noFill/>
-          <a:ln/>
-        </p:spPr>
-        <p:txBody>
-          <a:bodyPr wrap="square" lIns="0" tIns="0" rIns="0" bIns="0" rtlCol="0" anchor="ctr"/>
-          <a:lstStyle/>
-          <a:p>
-            <a:pPr algn="ctr" indent="0" marL="0">
-              <a:buNone/>
-            </a:pPr>
-            <a:r>
-              <a:rPr lang="en-US" sz="1400" b="1" dirty="0">
-                <a:solidFill>
-                  <a:srgbClr val="0D9488"/>
-                </a:solidFill>
-                <a:latin typeface="Trebuchet MS" pitchFamily="34" charset="0"/>
-                <a:ea typeface="Trebuchet MS" pitchFamily="34" charset="-122"/>
-                <a:cs typeface="Trebuchet MS" pitchFamily="34" charset="-120"/>
-              </a:rPr>
-              <a:t>der</a:t>
-            </a:r>
-            <a:endParaRPr lang="en-US" sz="1400" dirty="0"/>
-          </a:p>
-        </p:txBody>
-      </p:sp>
-      <p:sp>
-        <p:nvSpPr>
-          <p:cNvPr id="33" name="Text 31"/>
-          <p:cNvSpPr/>
-          <p:nvPr/>
-        </p:nvSpPr>
-        <p:spPr>
-          <a:xfrm>
-            <a:off x="6016752" y="3364992"/>
-            <a:ext cx="411480" cy="475488"/>
-          </a:xfrm>
-          <a:prstGeom prst="rect">
-            <a:avLst/>
-          </a:prstGeom>
-          <a:noFill/>
-          <a:ln/>
-        </p:spPr>
-        <p:txBody>
-          <a:bodyPr wrap="square" lIns="0" tIns="0" rIns="0" bIns="0" rtlCol="0" anchor="ctr"/>
-          <a:lstStyle/>
-          <a:p>
-            <a:pPr algn="ctr" indent="0" marL="0">
-              <a:buNone/>
-            </a:pPr>
-            <a:r>
-              <a:rPr lang="en-US" sz="1600" b="1" dirty="0">
-                <a:solidFill>
-                  <a:srgbClr val="0D9488"/>
-                </a:solidFill>
-                <a:latin typeface="Trebuchet MS" pitchFamily="34" charset="0"/>
-                <a:ea typeface="Trebuchet MS" pitchFamily="34" charset="-122"/>
-                <a:cs typeface="Trebuchet MS" pitchFamily="34" charset="-120"/>
-              </a:rPr>
-              <a:t>·</a:t>
-            </a:r>
-            <a:endParaRPr lang="en-US" sz="1600" dirty="0"/>
-          </a:p>
-        </p:txBody>
-      </p:sp>
-      <p:sp>
-        <p:nvSpPr>
-          <p:cNvPr id="34" name="Shape 32"/>
-          <p:cNvSpPr/>
-          <p:nvPr/>
-        </p:nvSpPr>
-        <p:spPr>
-          <a:xfrm>
-            <a:off x="6428232" y="3364992"/>
-            <a:ext cx="1645920" cy="475488"/>
-          </a:xfrm>
-          <a:prstGeom prst="rect">
-            <a:avLst>
-              <a:gd name="adj" fmla="val 9615"/>
-            </a:avLst>
-          </a:prstGeom>
-          <a:solidFill>
-            <a:srgbClr val="FFFFFF"/>
-          </a:solidFill>
-          <a:ln w="12700">
-            <a:solidFill>
-              <a:srgbClr val="0D9488"/>
-            </a:solidFill>
-            <a:prstDash val="solid"/>
-          </a:ln>
-        </p:spPr>
-      </p:sp>
-      <p:sp>
-        <p:nvSpPr>
-          <p:cNvPr id="35" name="Text 33"/>
-          <p:cNvSpPr/>
-          <p:nvPr/>
-        </p:nvSpPr>
-        <p:spPr>
-          <a:xfrm>
-            <a:off x="6428232" y="3364992"/>
-            <a:ext cx="1645920" cy="475488"/>
-          </a:xfrm>
-          <a:prstGeom prst="rect">
-            <a:avLst/>
-          </a:prstGeom>
-          <a:noFill/>
-          <a:ln/>
-        </p:spPr>
-        <p:txBody>
-          <a:bodyPr wrap="square" lIns="0" tIns="0" rIns="0" bIns="0" rtlCol="0" anchor="ctr"/>
-          <a:lstStyle/>
-          <a:p>
-            <a:pPr algn="ctr" indent="0" marL="0">
-              <a:buNone/>
-            </a:pPr>
-            <a:r>
-              <a:rPr lang="en-US" sz="1400" b="1" dirty="0">
-                <a:solidFill>
-                  <a:srgbClr val="0D9488"/>
-                </a:solidFill>
-                <a:latin typeface="Trebuchet MS" pitchFamily="34" charset="0"/>
-                <a:ea typeface="Trebuchet MS" pitchFamily="34" charset="-122"/>
-                <a:cs typeface="Trebuchet MS" pitchFamily="34" charset="-120"/>
-              </a:rPr>
-              <a:t>priced</a:t>
-            </a:r>
-            <a:endParaRPr lang="en-US" sz="1400" dirty="0"/>
-          </a:p>
-        </p:txBody>
-      </p:sp>
-      <p:sp>
-        <p:nvSpPr>
-          <p:cNvPr id="36" name="Shape 34"/>
-          <p:cNvSpPr/>
-          <p:nvPr/>
-        </p:nvSpPr>
-        <p:spPr>
-          <a:xfrm>
-            <a:off x="365760" y="4096512"/>
-            <a:ext cx="1371600" cy="804672"/>
-          </a:xfrm>
-          <a:prstGeom prst="rect">
-            <a:avLst>
-              <a:gd name="adj" fmla="val 6818"/>
-            </a:avLst>
-          </a:prstGeom>
-          <a:solidFill>
-            <a:srgbClr val="E2E8F0"/>
-          </a:solidFill>
-          <a:ln w="12700">
-            <a:solidFill>
-              <a:srgbClr val="E2E8F0"/>
-            </a:solidFill>
-            <a:prstDash val="solid"/>
-          </a:ln>
-        </p:spPr>
-      </p:sp>
-      <p:sp>
-        <p:nvSpPr>
-          <p:cNvPr id="37" name="Text 35"/>
-          <p:cNvSpPr/>
-          <p:nvPr/>
-        </p:nvSpPr>
-        <p:spPr>
-          <a:xfrm>
-            <a:off x="365760" y="4096512"/>
-            <a:ext cx="1371600" cy="804672"/>
-          </a:xfrm>
-          <a:prstGeom prst="rect">
-            <a:avLst/>
-          </a:prstGeom>
-          <a:noFill/>
-          <a:ln/>
-        </p:spPr>
-        <p:txBody>
-          <a:bodyPr wrap="square" lIns="0" tIns="0" rIns="0" bIns="0" rtlCol="0" anchor="ctr"/>
-          <a:lstStyle/>
-          <a:p>
-            <a:pPr algn="ctr" indent="0" marL="0">
-              <a:buNone/>
-            </a:pPr>
-            <a:r>
-              <a:rPr lang="en-US" sz="1100" b="1" dirty="0">
-                <a:solidFill>
-                  <a:srgbClr val="475569"/>
-                </a:solidFill>
-                <a:latin typeface="Trebuchet MS" pitchFamily="34" charset="0"/>
-                <a:ea typeface="Trebuchet MS" pitchFamily="34" charset="-122"/>
-                <a:cs typeface="Trebuchet MS" pitchFamily="34" charset="-120"/>
-              </a:rPr>
-              <a:t>Phonemes</a:t>
-            </a:r>
-            <a:endParaRPr lang="en-US" sz="1100" dirty="0"/>
-          </a:p>
-        </p:txBody>
-      </p:sp>
-      <p:sp>
-        <p:nvSpPr>
-          <p:cNvPr id="38" name="Shape 36"/>
-          <p:cNvSpPr/>
-          <p:nvPr/>
-        </p:nvSpPr>
-        <p:spPr>
-          <a:xfrm>
-            <a:off x="1874520" y="4096512"/>
-            <a:ext cx="6903720" cy="804672"/>
-          </a:xfrm>
-          <a:prstGeom prst="rect">
-            <a:avLst>
-              <a:gd name="adj" fmla="val 6818"/>
-            </a:avLst>
-          </a:prstGeom>
-          <a:solidFill>
-            <a:srgbClr val="FCE7F3"/>
-          </a:solidFill>
-          <a:ln w="12700">
-            <a:solidFill>
-              <a:srgbClr val="DB2777"/>
-            </a:solidFill>
-            <a:prstDash val="solid"/>
-          </a:ln>
-        </p:spPr>
-      </p:sp>
-      <p:sp>
-        <p:nvSpPr>
-          <p:cNvPr id="39" name="Shape 37"/>
-          <p:cNvSpPr/>
-          <p:nvPr/>
-        </p:nvSpPr>
-        <p:spPr>
-          <a:xfrm>
-            <a:off x="1951330" y="4169664"/>
-            <a:ext cx="676656" cy="384048"/>
-          </a:xfrm>
-          <a:prstGeom prst="rect">
-            <a:avLst>
-              <a:gd name="adj" fmla="val 9524"/>
-            </a:avLst>
-          </a:prstGeom>
-          <a:solidFill>
-            <a:srgbClr val="FFFFFF"/>
-          </a:solidFill>
-          <a:ln w="12700">
-            <a:solidFill>
-              <a:srgbClr val="DB2777"/>
-            </a:solidFill>
-            <a:prstDash val="solid"/>
-          </a:ln>
-        </p:spPr>
-      </p:sp>
-      <p:sp>
-        <p:nvSpPr>
-          <p:cNvPr id="40" name="Text 38"/>
-          <p:cNvSpPr/>
-          <p:nvPr/>
-        </p:nvSpPr>
-        <p:spPr>
-          <a:xfrm>
-            <a:off x="1951330" y="4169664"/>
-            <a:ext cx="676656" cy="384048"/>
-          </a:xfrm>
-          <a:prstGeom prst="rect">
-            <a:avLst/>
-          </a:prstGeom>
-          <a:noFill/>
-          <a:ln/>
-        </p:spPr>
-        <p:txBody>
-          <a:bodyPr wrap="square" lIns="0" tIns="0" rIns="0" bIns="0" rtlCol="0" anchor="ctr"/>
-          <a:lstStyle/>
-          <a:p>
-            <a:pPr algn="ctr" indent="0" marL="0">
-              <a:buNone/>
-            </a:pPr>
-            <a:r>
-              <a:rPr lang="en-US" sz="900" b="1" dirty="0">
-                <a:solidFill>
-                  <a:srgbClr val="9D174D"/>
-                </a:solidFill>
-                <a:latin typeface="Trebuchet MS" pitchFamily="34" charset="0"/>
-                <a:ea typeface="Trebuchet MS" pitchFamily="34" charset="-122"/>
-                <a:cs typeface="Trebuchet MS" pitchFamily="34" charset="-120"/>
-              </a:rPr>
-              <a:t>u</a:t>
-            </a:r>
-            <a:endParaRPr lang="en-US" sz="900" dirty="0"/>
-          </a:p>
-        </p:txBody>
-      </p:sp>
-      <p:sp>
-        <p:nvSpPr>
-          <p:cNvPr id="41" name="Shape 39"/>
-          <p:cNvSpPr/>
-          <p:nvPr/>
-        </p:nvSpPr>
-        <p:spPr>
-          <a:xfrm>
-            <a:off x="2677363" y="4169664"/>
-            <a:ext cx="676656" cy="384048"/>
-          </a:xfrm>
-          <a:prstGeom prst="rect">
-            <a:avLst>
-              <a:gd name="adj" fmla="val 9524"/>
-            </a:avLst>
-          </a:prstGeom>
-          <a:solidFill>
-            <a:srgbClr val="FFFFFF"/>
-          </a:solidFill>
-          <a:ln w="12700">
-            <a:solidFill>
-              <a:srgbClr val="DB2777"/>
-            </a:solidFill>
-            <a:prstDash val="solid"/>
-          </a:ln>
-        </p:spPr>
-      </p:sp>
-      <p:sp>
-        <p:nvSpPr>
-          <p:cNvPr id="42" name="Text 40"/>
-          <p:cNvSpPr/>
-          <p:nvPr/>
-        </p:nvSpPr>
-        <p:spPr>
-          <a:xfrm>
-            <a:off x="2677363" y="4169664"/>
-            <a:ext cx="676656" cy="384048"/>
-          </a:xfrm>
-          <a:prstGeom prst="rect">
-            <a:avLst/>
-          </a:prstGeom>
-          <a:noFill/>
-          <a:ln/>
-        </p:spPr>
-        <p:txBody>
-          <a:bodyPr wrap="square" lIns="0" tIns="0" rIns="0" bIns="0" rtlCol="0" anchor="ctr"/>
-          <a:lstStyle/>
-          <a:p>
-            <a:pPr algn="ctr" indent="0" marL="0">
-              <a:buNone/>
-            </a:pPr>
-            <a:r>
-              <a:rPr lang="en-US" sz="900" b="1" dirty="0">
-                <a:solidFill>
-                  <a:srgbClr val="9D174D"/>
-                </a:solidFill>
-                <a:latin typeface="Trebuchet MS" pitchFamily="34" charset="0"/>
-                <a:ea typeface="Trebuchet MS" pitchFamily="34" charset="-122"/>
-                <a:cs typeface="Trebuchet MS" pitchFamily="34" charset="-120"/>
-              </a:rPr>
-              <a:t>n</a:t>
-            </a:r>
-            <a:endParaRPr lang="en-US" sz="900" dirty="0"/>
-          </a:p>
-        </p:txBody>
-      </p:sp>
-      <p:sp>
-        <p:nvSpPr>
-          <p:cNvPr id="43" name="Shape 41"/>
-          <p:cNvSpPr/>
-          <p:nvPr/>
-        </p:nvSpPr>
-        <p:spPr>
-          <a:xfrm>
-            <a:off x="3403397" y="4169664"/>
-            <a:ext cx="676656" cy="384048"/>
-          </a:xfrm>
-          <a:prstGeom prst="rect">
-            <a:avLst>
-              <a:gd name="adj" fmla="val 9524"/>
-            </a:avLst>
-          </a:prstGeom>
-          <a:solidFill>
-            <a:srgbClr val="FFFFFF"/>
-          </a:solidFill>
-          <a:ln w="12700">
-            <a:solidFill>
-              <a:srgbClr val="DB2777"/>
-            </a:solidFill>
-            <a:prstDash val="solid"/>
-          </a:ln>
-        </p:spPr>
-      </p:sp>
-      <p:sp>
-        <p:nvSpPr>
-          <p:cNvPr id="44" name="Text 42"/>
-          <p:cNvSpPr/>
-          <p:nvPr/>
-        </p:nvSpPr>
-        <p:spPr>
-          <a:xfrm>
-            <a:off x="3403397" y="4169664"/>
-            <a:ext cx="676656" cy="384048"/>
-          </a:xfrm>
-          <a:prstGeom prst="rect">
-            <a:avLst/>
-          </a:prstGeom>
-          <a:noFill/>
-          <a:ln/>
-        </p:spPr>
-        <p:txBody>
-          <a:bodyPr wrap="square" lIns="0" tIns="0" rIns="0" bIns="0" rtlCol="0" anchor="ctr"/>
-          <a:lstStyle/>
-          <a:p>
-            <a:pPr algn="ctr" indent="0" marL="0">
-              <a:buNone/>
-            </a:pPr>
-            <a:r>
-              <a:rPr lang="en-US" sz="900" b="1" dirty="0">
-                <a:solidFill>
-                  <a:srgbClr val="9D174D"/>
-                </a:solidFill>
-                <a:latin typeface="Trebuchet MS" pitchFamily="34" charset="0"/>
-                <a:ea typeface="Trebuchet MS" pitchFamily="34" charset="-122"/>
-                <a:cs typeface="Trebuchet MS" pitchFamily="34" charset="-120"/>
-              </a:rPr>
-              <a:t>d</a:t>
-            </a:r>
-            <a:endParaRPr lang="en-US" sz="900" dirty="0"/>
-          </a:p>
-        </p:txBody>
-      </p:sp>
-      <p:sp>
-        <p:nvSpPr>
-          <p:cNvPr id="45" name="Shape 43"/>
-          <p:cNvSpPr/>
-          <p:nvPr/>
-        </p:nvSpPr>
-        <p:spPr>
-          <a:xfrm>
-            <a:off x="4129430" y="4169664"/>
-            <a:ext cx="676656" cy="384048"/>
-          </a:xfrm>
-          <a:prstGeom prst="rect">
-            <a:avLst>
-              <a:gd name="adj" fmla="val 9524"/>
-            </a:avLst>
-          </a:prstGeom>
-          <a:solidFill>
-            <a:srgbClr val="FFFFFF"/>
-          </a:solidFill>
-          <a:ln w="12700">
-            <a:solidFill>
-              <a:srgbClr val="DB2777"/>
-            </a:solidFill>
-            <a:prstDash val="solid"/>
-          </a:ln>
-        </p:spPr>
-      </p:sp>
-      <p:sp>
-        <p:nvSpPr>
-          <p:cNvPr id="46" name="Text 44"/>
-          <p:cNvSpPr/>
-          <p:nvPr/>
-        </p:nvSpPr>
-        <p:spPr>
-          <a:xfrm>
-            <a:off x="4129430" y="4169664"/>
-            <a:ext cx="676656" cy="384048"/>
-          </a:xfrm>
-          <a:prstGeom prst="rect">
-            <a:avLst/>
-          </a:prstGeom>
-          <a:noFill/>
-          <a:ln/>
-        </p:spPr>
-        <p:txBody>
-          <a:bodyPr wrap="square" lIns="0" tIns="0" rIns="0" bIns="0" rtlCol="0" anchor="ctr"/>
-          <a:lstStyle/>
-          <a:p>
-            <a:pPr algn="ctr" indent="0" marL="0">
-              <a:buNone/>
-            </a:pPr>
-            <a:r>
-              <a:rPr lang="en-US" sz="900" b="1" dirty="0">
-                <a:solidFill>
-                  <a:srgbClr val="9D174D"/>
-                </a:solidFill>
-                <a:latin typeface="Trebuchet MS" pitchFamily="34" charset="0"/>
-                <a:ea typeface="Trebuchet MS" pitchFamily="34" charset="-122"/>
-                <a:cs typeface="Trebuchet MS" pitchFamily="34" charset="-120"/>
-              </a:rPr>
-              <a:t>er</a:t>
-            </a:r>
-            <a:endParaRPr lang="en-US" sz="900" dirty="0"/>
-          </a:p>
-        </p:txBody>
-      </p:sp>
-      <p:sp>
-        <p:nvSpPr>
-          <p:cNvPr id="47" name="Shape 45"/>
-          <p:cNvSpPr/>
-          <p:nvPr/>
-        </p:nvSpPr>
-        <p:spPr>
-          <a:xfrm>
-            <a:off x="4855464" y="4169664"/>
-            <a:ext cx="676656" cy="384048"/>
-          </a:xfrm>
-          <a:prstGeom prst="rect">
-            <a:avLst>
-              <a:gd name="adj" fmla="val 9524"/>
-            </a:avLst>
-          </a:prstGeom>
-          <a:solidFill>
-            <a:srgbClr val="FFFFFF"/>
-          </a:solidFill>
-          <a:ln w="12700">
-            <a:solidFill>
-              <a:srgbClr val="DB2777"/>
-            </a:solidFill>
-            <a:prstDash val="solid"/>
-          </a:ln>
-        </p:spPr>
-      </p:sp>
-      <p:sp>
-        <p:nvSpPr>
-          <p:cNvPr id="48" name="Text 46"/>
-          <p:cNvSpPr/>
-          <p:nvPr/>
-        </p:nvSpPr>
-        <p:spPr>
-          <a:xfrm>
-            <a:off x="4855464" y="4169664"/>
-            <a:ext cx="676656" cy="384048"/>
-          </a:xfrm>
-          <a:prstGeom prst="rect">
-            <a:avLst/>
-          </a:prstGeom>
-          <a:noFill/>
-          <a:ln/>
-        </p:spPr>
-        <p:txBody>
-          <a:bodyPr wrap="square" lIns="0" tIns="0" rIns="0" bIns="0" rtlCol="0" anchor="ctr"/>
-          <a:lstStyle/>
-          <a:p>
-            <a:pPr algn="ctr" indent="0" marL="0">
-              <a:buNone/>
-            </a:pPr>
-            <a:r>
-              <a:rPr lang="en-US" sz="900" b="1" dirty="0">
-                <a:solidFill>
-                  <a:srgbClr val="9D174D"/>
-                </a:solidFill>
-                <a:latin typeface="Trebuchet MS" pitchFamily="34" charset="0"/>
-                <a:ea typeface="Trebuchet MS" pitchFamily="34" charset="-122"/>
-                <a:cs typeface="Trebuchet MS" pitchFamily="34" charset="-120"/>
-              </a:rPr>
-              <a:t>p</a:t>
-            </a:r>
-            <a:endParaRPr lang="en-US" sz="900" dirty="0"/>
-          </a:p>
-        </p:txBody>
-      </p:sp>
-      <p:sp>
-        <p:nvSpPr>
-          <p:cNvPr id="49" name="Shape 47"/>
-          <p:cNvSpPr/>
-          <p:nvPr/>
-        </p:nvSpPr>
-        <p:spPr>
-          <a:xfrm>
-            <a:off x="5581498" y="4169664"/>
-            <a:ext cx="676656" cy="384048"/>
-          </a:xfrm>
-          <a:prstGeom prst="rect">
-            <a:avLst>
-              <a:gd name="adj" fmla="val 9524"/>
-            </a:avLst>
-          </a:prstGeom>
-          <a:solidFill>
-            <a:srgbClr val="FFFFFF"/>
-          </a:solidFill>
-          <a:ln w="12700">
-            <a:solidFill>
-              <a:srgbClr val="DB2777"/>
-            </a:solidFill>
-            <a:prstDash val="solid"/>
-          </a:ln>
-        </p:spPr>
-      </p:sp>
-      <p:sp>
-        <p:nvSpPr>
-          <p:cNvPr id="50" name="Text 48"/>
-          <p:cNvSpPr/>
-          <p:nvPr/>
-        </p:nvSpPr>
-        <p:spPr>
-          <a:xfrm>
-            <a:off x="5581498" y="4169664"/>
-            <a:ext cx="676656" cy="384048"/>
-          </a:xfrm>
-          <a:prstGeom prst="rect">
-            <a:avLst/>
-          </a:prstGeom>
-          <a:noFill/>
-          <a:ln/>
-        </p:spPr>
-        <p:txBody>
-          <a:bodyPr wrap="square" lIns="0" tIns="0" rIns="0" bIns="0" rtlCol="0" anchor="ctr"/>
-          <a:lstStyle/>
-          <a:p>
-            <a:pPr algn="ctr" indent="0" marL="0">
-              <a:buNone/>
-            </a:pPr>
-            <a:r>
-              <a:rPr lang="en-US" sz="900" b="1" dirty="0">
-                <a:solidFill>
-                  <a:srgbClr val="9D174D"/>
-                </a:solidFill>
-                <a:latin typeface="Trebuchet MS" pitchFamily="34" charset="0"/>
-                <a:ea typeface="Trebuchet MS" pitchFamily="34" charset="-122"/>
-                <a:cs typeface="Trebuchet MS" pitchFamily="34" charset="-120"/>
-              </a:rPr>
-              <a:t>r</a:t>
-            </a:r>
-            <a:endParaRPr lang="en-US" sz="900" dirty="0"/>
-          </a:p>
-        </p:txBody>
-      </p:sp>
-      <p:sp>
-        <p:nvSpPr>
-          <p:cNvPr id="51" name="Shape 49"/>
-          <p:cNvSpPr/>
-          <p:nvPr/>
-        </p:nvSpPr>
-        <p:spPr>
-          <a:xfrm>
-            <a:off x="6307531" y="4169664"/>
-            <a:ext cx="676656" cy="384048"/>
-          </a:xfrm>
-          <a:prstGeom prst="rect">
-            <a:avLst>
-              <a:gd name="adj" fmla="val 9524"/>
-            </a:avLst>
-          </a:prstGeom>
-          <a:solidFill>
-            <a:srgbClr val="FFFFFF"/>
-          </a:solidFill>
-          <a:ln w="12700">
-            <a:solidFill>
-              <a:srgbClr val="DB2777"/>
-            </a:solidFill>
-            <a:prstDash val="solid"/>
-          </a:ln>
-        </p:spPr>
-      </p:sp>
-      <p:sp>
-        <p:nvSpPr>
-          <p:cNvPr id="52" name="Text 50"/>
-          <p:cNvSpPr/>
-          <p:nvPr/>
-        </p:nvSpPr>
-        <p:spPr>
-          <a:xfrm>
-            <a:off x="6307531" y="4169664"/>
-            <a:ext cx="676656" cy="384048"/>
-          </a:xfrm>
-          <a:prstGeom prst="rect">
-            <a:avLst/>
-          </a:prstGeom>
-          <a:noFill/>
-          <a:ln/>
-        </p:spPr>
-        <p:txBody>
-          <a:bodyPr wrap="square" lIns="0" tIns="0" rIns="0" bIns="0" rtlCol="0" anchor="ctr"/>
-          <a:lstStyle/>
-          <a:p>
-            <a:pPr algn="ctr" indent="0" marL="0">
-              <a:buNone/>
-            </a:pPr>
-            <a:r>
-              <a:rPr lang="en-US" sz="900" b="1" dirty="0">
-                <a:solidFill>
-                  <a:srgbClr val="9D174D"/>
-                </a:solidFill>
-                <a:latin typeface="Trebuchet MS" pitchFamily="34" charset="0"/>
-                <a:ea typeface="Trebuchet MS" pitchFamily="34" charset="-122"/>
-                <a:cs typeface="Trebuchet MS" pitchFamily="34" charset="-120"/>
-              </a:rPr>
-              <a:t>i</a:t>
-            </a:r>
-            <a:endParaRPr lang="en-US" sz="900" dirty="0"/>
-          </a:p>
-        </p:txBody>
-      </p:sp>
-      <p:sp>
-        <p:nvSpPr>
-          <p:cNvPr id="53" name="Shape 51"/>
-          <p:cNvSpPr/>
-          <p:nvPr/>
-        </p:nvSpPr>
-        <p:spPr>
-          <a:xfrm>
-            <a:off x="7033565" y="4169664"/>
-            <a:ext cx="676656" cy="384048"/>
-          </a:xfrm>
-          <a:prstGeom prst="rect">
-            <a:avLst>
-              <a:gd name="adj" fmla="val 9524"/>
-            </a:avLst>
-          </a:prstGeom>
-          <a:solidFill>
-            <a:srgbClr val="FFFFFF"/>
-          </a:solidFill>
-          <a:ln w="12700">
-            <a:solidFill>
-              <a:srgbClr val="DB2777"/>
-            </a:solidFill>
-            <a:prstDash val="solid"/>
-          </a:ln>
-        </p:spPr>
-      </p:sp>
-      <p:sp>
-        <p:nvSpPr>
-          <p:cNvPr id="54" name="Text 52"/>
-          <p:cNvSpPr/>
-          <p:nvPr/>
-        </p:nvSpPr>
-        <p:spPr>
-          <a:xfrm>
-            <a:off x="7033565" y="4169664"/>
-            <a:ext cx="676656" cy="384048"/>
-          </a:xfrm>
-          <a:prstGeom prst="rect">
-            <a:avLst/>
-          </a:prstGeom>
-          <a:noFill/>
-          <a:ln/>
-        </p:spPr>
-        <p:txBody>
-          <a:bodyPr wrap="square" lIns="0" tIns="0" rIns="0" bIns="0" rtlCol="0" anchor="ctr"/>
-          <a:lstStyle/>
-          <a:p>
-            <a:pPr algn="ctr" indent="0" marL="0">
-              <a:buNone/>
-            </a:pPr>
-            <a:r>
-              <a:rPr lang="en-US" sz="900" b="1" dirty="0">
-                <a:solidFill>
-                  <a:srgbClr val="9D174D"/>
-                </a:solidFill>
-                <a:latin typeface="Trebuchet MS" pitchFamily="34" charset="0"/>
-                <a:ea typeface="Trebuchet MS" pitchFamily="34" charset="-122"/>
-                <a:cs typeface="Trebuchet MS" pitchFamily="34" charset="-120"/>
-              </a:rPr>
-              <a:t>ce</a:t>
-            </a:r>
-            <a:endParaRPr lang="en-US" sz="900" dirty="0"/>
-          </a:p>
-        </p:txBody>
-      </p:sp>
-      <p:sp>
-        <p:nvSpPr>
-          <p:cNvPr id="55" name="Text 53"/>
-          <p:cNvSpPr/>
-          <p:nvPr/>
-        </p:nvSpPr>
-        <p:spPr>
-          <a:xfrm>
-            <a:off x="7033565" y="4572000"/>
-            <a:ext cx="676656" cy="219456"/>
-          </a:xfrm>
-          <a:prstGeom prst="rect">
-            <a:avLst/>
-          </a:prstGeom>
-          <a:noFill/>
-          <a:ln/>
-        </p:spPr>
-        <p:txBody>
-          <a:bodyPr wrap="square" lIns="0" tIns="0" rIns="0" bIns="0" rtlCol="0" anchor="t"/>
-          <a:lstStyle/>
-          <a:p>
-            <a:pPr algn="ctr" indent="0" marL="0">
-              <a:buNone/>
-            </a:pPr>
-            <a:r>
-              <a:rPr lang="en-US" sz="750" i="1" dirty="0">
-                <a:solidFill>
-                  <a:srgbClr val="94A3B8"/>
-                </a:solidFill>
-                <a:latin typeface="Calibri" pitchFamily="34" charset="0"/>
-                <a:ea typeface="Calibri" pitchFamily="34" charset="-122"/>
-                <a:cs typeface="Calibri" pitchFamily="34" charset="-120"/>
-              </a:rPr>
-              <a:t>/s/</a:t>
-            </a:r>
-            <a:endParaRPr lang="en-US" sz="750" dirty="0"/>
-          </a:p>
-        </p:txBody>
-      </p:sp>
-      <p:sp>
-        <p:nvSpPr>
-          <p:cNvPr id="56" name="Shape 54"/>
-          <p:cNvSpPr/>
-          <p:nvPr/>
-        </p:nvSpPr>
-        <p:spPr>
-          <a:xfrm>
-            <a:off x="7759598" y="4169664"/>
-            <a:ext cx="676656" cy="384048"/>
-          </a:xfrm>
-          <a:prstGeom prst="rect">
-            <a:avLst>
-              <a:gd name="adj" fmla="val 9524"/>
-            </a:avLst>
-          </a:prstGeom>
-          <a:solidFill>
-            <a:srgbClr val="FFFFFF"/>
-          </a:solidFill>
-          <a:ln w="12700">
-            <a:solidFill>
-              <a:srgbClr val="DB2777"/>
-            </a:solidFill>
-            <a:prstDash val="solid"/>
-          </a:ln>
-        </p:spPr>
-      </p:sp>
-      <p:sp>
-        <p:nvSpPr>
-          <p:cNvPr id="57" name="Text 55"/>
-          <p:cNvSpPr/>
-          <p:nvPr/>
-        </p:nvSpPr>
-        <p:spPr>
-          <a:xfrm>
-            <a:off x="7759598" y="4169664"/>
-            <a:ext cx="676656" cy="384048"/>
-          </a:xfrm>
-          <a:prstGeom prst="rect">
-            <a:avLst/>
-          </a:prstGeom>
-          <a:noFill/>
-          <a:ln/>
-        </p:spPr>
-        <p:txBody>
-          <a:bodyPr wrap="square" lIns="0" tIns="0" rIns="0" bIns="0" rtlCol="0" anchor="ctr"/>
-          <a:lstStyle/>
-          <a:p>
-            <a:pPr algn="ctr" indent="0" marL="0">
-              <a:buNone/>
-            </a:pPr>
-            <a:r>
-              <a:rPr lang="en-US" sz="900" b="1" dirty="0">
-                <a:solidFill>
-                  <a:srgbClr val="9D174D"/>
-                </a:solidFill>
-                <a:latin typeface="Trebuchet MS" pitchFamily="34" charset="0"/>
-                <a:ea typeface="Trebuchet MS" pitchFamily="34" charset="-122"/>
-                <a:cs typeface="Trebuchet MS" pitchFamily="34" charset="-120"/>
-              </a:rPr>
-              <a:t>d</a:t>
+              <a:t>ng</a:t>
             </a:r>
             <a:endParaRPr lang="en-US" sz="900" dirty="0"/>
           </a:p>
@@ -36311,7 +36728,7 @@
                 <a:ea typeface="Trebuchet MS" pitchFamily="34" charset="-122"/>
                 <a:cs typeface="Trebuchet MS" pitchFamily="34" charset="-120"/>
               </a:rPr>
-              <a:t>price</a:t>
+              <a:t>priced</a:t>
             </a:r>
             <a:endParaRPr lang="en-US" sz="1200" dirty="0"/>
           </a:p>
@@ -36377,7 +36794,7 @@
                 <a:ea typeface="Trebuchet MS" pitchFamily="34" charset="-122"/>
                 <a:cs typeface="Trebuchet MS" pitchFamily="34" charset="-120"/>
               </a:rPr>
-              <a:t>priced</a:t>
+              <a:t>pricing</a:t>
             </a:r>
             <a:endParaRPr lang="en-US" sz="1200" dirty="0"/>
           </a:p>
@@ -36443,7 +36860,7 @@
                 <a:ea typeface="Trebuchet MS" pitchFamily="34" charset="-122"/>
                 <a:cs typeface="Trebuchet MS" pitchFamily="34" charset="-120"/>
               </a:rPr>
-              <a:t>pricing</a:t>
+              <a:t>priceless</a:t>
             </a:r>
             <a:endParaRPr lang="en-US" sz="1200" dirty="0"/>
           </a:p>
@@ -36509,7 +36926,7 @@
                 <a:ea typeface="Trebuchet MS" pitchFamily="34" charset="-122"/>
                 <a:cs typeface="Trebuchet MS" pitchFamily="34" charset="-120"/>
               </a:rPr>
-              <a:t>priceless</a:t>
+              <a:t>pricey</a:t>
             </a:r>
             <a:endParaRPr lang="en-US" sz="1200" dirty="0"/>
           </a:p>
@@ -36575,7 +36992,7 @@
                 <a:ea typeface="Trebuchet MS" pitchFamily="34" charset="-122"/>
                 <a:cs typeface="Trebuchet MS" pitchFamily="34" charset="-120"/>
               </a:rPr>
-              <a:t>pricey</a:t>
+              <a:t>overpriced</a:t>
             </a:r>
             <a:endParaRPr lang="en-US" sz="1200" dirty="0"/>
           </a:p>
@@ -36641,7 +37058,7 @@
                 <a:ea typeface="Trebuchet MS" pitchFamily="34" charset="-122"/>
                 <a:cs typeface="Trebuchet MS" pitchFamily="34" charset="-120"/>
               </a:rPr>
-              <a:t>overpriced</a:t>
+              <a:t>underpriced</a:t>
             </a:r>
             <a:endParaRPr lang="en-US" sz="1200" dirty="0"/>
           </a:p>
@@ -36707,7 +37124,7 @@
                 <a:ea typeface="Trebuchet MS" pitchFamily="34" charset="-122"/>
                 <a:cs typeface="Trebuchet MS" pitchFamily="34" charset="-120"/>
               </a:rPr>
-              <a:t>underpriced</a:t>
+              <a:t>unpriced</a:t>
             </a:r>
             <a:endParaRPr lang="en-US" sz="1200" dirty="0"/>
           </a:p>
@@ -37961,7 +38378,7 @@
                 <a:ea typeface="Calibri" pitchFamily="34" charset="-122"/>
                 <a:cs typeface="Calibri" pitchFamily="34" charset="-120"/>
               </a:rPr>
-              <a:t>1.  The root 'price' comes from the Latin word 'pretium', meaning value or worth.</a:t>
+              <a:t>1.  The word 'priceless' means something so valuable it cannot be priced.</a:t>
             </a:r>
             <a:endParaRPr lang="en-US" sz="1300" dirty="0"/>
           </a:p>
@@ -38100,7 +38517,7 @@
                 <a:ea typeface="Calibri" pitchFamily="34" charset="-122"/>
                 <a:cs typeface="Calibri" pitchFamily="34" charset="-120"/>
               </a:rPr>
-              <a:t>2.  The word 'priceless' means something that is very cheap and easy to buy.</a:t>
+              <a:t>2.  The prefix 'over-' in 'overpriced' means something costs too much.</a:t>
             </a:r>
             <a:endParaRPr lang="en-US" sz="1300" dirty="0"/>
           </a:p>
@@ -38123,11 +38540,11 @@
             </a:avLst>
           </a:prstGeom>
           <a:solidFill>
-            <a:srgbClr val="FEE2E2"/>
-          </a:solidFill>
-          <a:ln w="12700">
-            <a:solidFill>
-              <a:srgbClr val="DC2626"/>
+            <a:srgbClr val="DCFCE7"/>
+          </a:solidFill>
+          <a:ln w="12700">
+            <a:solidFill>
+              <a:srgbClr val="16A34A"/>
             </a:solidFill>
             <a:prstDash val="solid"/>
           </a:ln>
@@ -38160,13 +38577,13 @@
             <a:r>
               <a:rPr lang="en-US" sz="1100" b="1" dirty="0">
                 <a:solidFill>
-                  <a:srgbClr val="DC2626"/>
+                  <a:srgbClr val="16A34A"/>
                 </a:solidFill>
                 <a:latin typeface="Trebuchet MS" pitchFamily="34" charset="0"/>
                 <a:ea typeface="Trebuchet MS" pitchFamily="34" charset="-122"/>
                 <a:cs typeface="Trebuchet MS" pitchFamily="34" charset="-120"/>
               </a:rPr>
-              <a:t>FALSE</a:t>
+              <a:t>TRUE</a:t>
             </a:r>
             <a:endParaRPr lang="en-US" sz="1100" dirty="0"/>
           </a:p>
@@ -38239,7 +38656,7 @@
                 <a:ea typeface="Calibri" pitchFamily="34" charset="-122"/>
                 <a:cs typeface="Calibri" pitchFamily="34" charset="-120"/>
               </a:rPr>
-              <a:t>3.  The word 'overpriced' contains the prefix 'over', meaning too much.</a:t>
+              <a:t>3.  Adding the suffix '-ed' to 'price' makes the word 'priced'.</a:t>
             </a:r>
             <a:endParaRPr lang="en-US" sz="1300" dirty="0"/>
           </a:p>
@@ -38378,7 +38795,7 @@
                 <a:ea typeface="Calibri" pitchFamily="34" charset="-122"/>
                 <a:cs typeface="Calibri" pitchFamily="34" charset="-120"/>
               </a:rPr>
-              <a:t>4.  Adding the suffix '-less' to 'price' creates a word meaning without a price or value.</a:t>
+              <a:t>4.  The root 'price' comes from a Greek word.</a:t>
             </a:r>
             <a:endParaRPr lang="en-US" sz="1300" dirty="0"/>
           </a:p>
@@ -38401,11 +38818,11 @@
             </a:avLst>
           </a:prstGeom>
           <a:solidFill>
-            <a:srgbClr val="DCFCE7"/>
-          </a:solidFill>
-          <a:ln w="12700">
-            <a:solidFill>
-              <a:srgbClr val="16A34A"/>
+            <a:srgbClr val="FEE2E2"/>
+          </a:solidFill>
+          <a:ln w="12700">
+            <a:solidFill>
+              <a:srgbClr val="DC2626"/>
             </a:solidFill>
             <a:prstDash val="solid"/>
           </a:ln>
@@ -38438,13 +38855,13 @@
             <a:r>
               <a:rPr lang="en-US" sz="1100" b="1" dirty="0">
                 <a:solidFill>
-                  <a:srgbClr val="16A34A"/>
+                  <a:srgbClr val="DC2626"/>
                 </a:solidFill>
                 <a:latin typeface="Trebuchet MS" pitchFamily="34" charset="0"/>
                 <a:ea typeface="Trebuchet MS" pitchFamily="34" charset="-122"/>
                 <a:cs typeface="Trebuchet MS" pitchFamily="34" charset="-120"/>
               </a:rPr>
-              <a:t>TRUE</a:t>
+              <a:t>FALSE</a:t>
             </a:r>
             <a:endParaRPr lang="en-US" sz="1100" dirty="0"/>
           </a:p>
@@ -38517,7 +38934,7 @@
                 <a:ea typeface="Calibri" pitchFamily="34" charset="-122"/>
                 <a:cs typeface="Calibri" pitchFamily="34" charset="-120"/>
               </a:rPr>
-              <a:t>5.  The prefix 'under' in 'underpriced' means the same thing as the prefix 'over'.</a:t>
+              <a:t>5.  'Underpriced' means something costs more than it should.</a:t>
             </a:r>
             <a:endParaRPr lang="en-US" sz="1300" dirty="0"/>
           </a:p>
@@ -39156,7 +39573,7 @@
                 <a:ea typeface="Trebuchet MS" pitchFamily="34" charset="-122"/>
                 <a:cs typeface="Trebuchet MS" pitchFamily="34" charset="-120"/>
               </a:rPr>
-              <a:t>price</a:t>
+              <a:t>priced</a:t>
             </a:r>
             <a:endParaRPr lang="en-US" sz="1300" dirty="0"/>
           </a:p>
@@ -39222,7 +39639,7 @@
                 <a:ea typeface="Trebuchet MS" pitchFamily="34" charset="-122"/>
                 <a:cs typeface="Trebuchet MS" pitchFamily="34" charset="-120"/>
               </a:rPr>
-              <a:t>priced</a:t>
+              <a:t>pricing</a:t>
             </a:r>
             <a:endParaRPr lang="en-US" sz="1300" dirty="0"/>
           </a:p>
@@ -39288,7 +39705,7 @@
                 <a:ea typeface="Trebuchet MS" pitchFamily="34" charset="-122"/>
                 <a:cs typeface="Trebuchet MS" pitchFamily="34" charset="-120"/>
               </a:rPr>
-              <a:t>pricing</a:t>
+              <a:t>priceless</a:t>
             </a:r>
             <a:endParaRPr lang="en-US" sz="1300" dirty="0"/>
           </a:p>
@@ -39354,7 +39771,7 @@
                 <a:ea typeface="Trebuchet MS" pitchFamily="34" charset="-122"/>
                 <a:cs typeface="Trebuchet MS" pitchFamily="34" charset="-120"/>
               </a:rPr>
-              <a:t>priceless</a:t>
+              <a:t>pricey</a:t>
             </a:r>
             <a:endParaRPr lang="en-US" sz="1300" dirty="0"/>
           </a:p>
@@ -39420,7 +39837,7 @@
                 <a:ea typeface="Trebuchet MS" pitchFamily="34" charset="-122"/>
                 <a:cs typeface="Trebuchet MS" pitchFamily="34" charset="-120"/>
               </a:rPr>
-              <a:t>pricey</a:t>
+              <a:t>overpriced</a:t>
             </a:r>
             <a:endParaRPr lang="en-US" sz="1300" dirty="0"/>
           </a:p>
@@ -39486,7 +39903,7 @@
                 <a:ea typeface="Trebuchet MS" pitchFamily="34" charset="-122"/>
                 <a:cs typeface="Trebuchet MS" pitchFamily="34" charset="-120"/>
               </a:rPr>
-              <a:t>overpriced</a:t>
+              <a:t>underpriced</a:t>
             </a:r>
             <a:endParaRPr lang="en-US" sz="1300" dirty="0"/>
           </a:p>
@@ -39552,7 +39969,7 @@
                 <a:ea typeface="Trebuchet MS" pitchFamily="34" charset="-122"/>
                 <a:cs typeface="Trebuchet MS" pitchFamily="34" charset="-120"/>
               </a:rPr>
-              <a:t>underpriced</a:t>
+              <a:t>unpriced</a:t>
             </a:r>
             <a:endParaRPr lang="en-US" sz="1300" dirty="0"/>
           </a:p>
@@ -41326,7 +41743,7 @@
                 <a:ea typeface="Trebuchet MS" pitchFamily="34" charset="-122"/>
                 <a:cs typeface="Trebuchet MS" pitchFamily="34" charset="-120"/>
               </a:rPr>
-              <a:t>price</a:t>
+              <a:t>priced</a:t>
             </a:r>
             <a:endParaRPr lang="en-US" sz="1400" dirty="0"/>
           </a:p>
@@ -41730,7 +42147,7 @@
                 <a:ea typeface="Trebuchet MS" pitchFamily="34" charset="-122"/>
                 <a:cs typeface="Trebuchet MS" pitchFamily="34" charset="-120"/>
               </a:rPr>
-              <a:t>price</a:t>
+              <a:t>priced</a:t>
             </a:r>
             <a:endParaRPr lang="en-US" sz="1200" dirty="0"/>
           </a:p>
@@ -41796,7 +42213,7 @@
                 <a:ea typeface="Calibri" pitchFamily="34" charset="-122"/>
                 <a:cs typeface="Calibri" pitchFamily="34" charset="-120"/>
               </a:rPr>
-              <a:t>The act of deciding how much something costs.</a:t>
+              <a:t>Something so valuable it cannot be given a price — it is worth too much to measure.</a:t>
             </a:r>
             <a:endParaRPr lang="en-US" sz="1200" dirty="0"/>
           </a:p>
@@ -41869,7 +42286,7 @@
                 <a:ea typeface="Trebuchet MS" pitchFamily="34" charset="-122"/>
                 <a:cs typeface="Trebuchet MS" pitchFamily="34" charset="-120"/>
               </a:rPr>
-              <a:t>priced</a:t>
+              <a:t>pricing</a:t>
             </a:r>
             <a:endParaRPr lang="en-US" sz="1200" dirty="0"/>
           </a:p>
@@ -41935,7 +42352,7 @@
                 <a:ea typeface="Calibri" pitchFamily="34" charset="-122"/>
                 <a:cs typeface="Calibri" pitchFamily="34" charset="-120"/>
               </a:rPr>
-              <a:t>When something costs a lot of money; expensive.</a:t>
+              <a:t>When something costs more money than it is really worth.</a:t>
             </a:r>
             <a:endParaRPr lang="en-US" sz="1200" dirty="0"/>
           </a:p>
@@ -42008,7 +42425,7 @@
                 <a:ea typeface="Trebuchet MS" pitchFamily="34" charset="-122"/>
                 <a:cs typeface="Trebuchet MS" pitchFamily="34" charset="-120"/>
               </a:rPr>
-              <a:t>pricing</a:t>
+              <a:t>priceless</a:t>
             </a:r>
             <a:endParaRPr lang="en-US" sz="1200" dirty="0"/>
           </a:p>
@@ -42074,7 +42491,7 @@
                 <a:ea typeface="Calibri" pitchFamily="34" charset="-122"/>
                 <a:cs typeface="Calibri" pitchFamily="34" charset="-120"/>
               </a:rPr>
-              <a:t>The amount of money you pay to buy something.</a:t>
+              <a:t>When something has been given a price tag showing how much it costs.</a:t>
             </a:r>
             <a:endParaRPr lang="en-US" sz="1200" dirty="0"/>
           </a:p>
@@ -42147,7 +42564,7 @@
                 <a:ea typeface="Trebuchet MS" pitchFamily="34" charset="-122"/>
                 <a:cs typeface="Trebuchet MS" pitchFamily="34" charset="-120"/>
               </a:rPr>
-              <a:t>priceless</a:t>
+              <a:t>pricey</a:t>
             </a:r>
             <a:endParaRPr lang="en-US" sz="1200" dirty="0"/>
           </a:p>
@@ -42213,7 +42630,7 @@
                 <a:ea typeface="Calibri" pitchFamily="34" charset="-122"/>
                 <a:cs typeface="Calibri" pitchFamily="34" charset="-120"/>
               </a:rPr>
-              <a:t>When something costs more money than it is really worth.</a:t>
+              <a:t>When something costs less money than it is actually worth.</a:t>
             </a:r>
             <a:endParaRPr lang="en-US" sz="1200" dirty="0"/>
           </a:p>
@@ -42286,7 +42703,7 @@
                 <a:ea typeface="Trebuchet MS" pitchFamily="34" charset="-122"/>
                 <a:cs typeface="Trebuchet MS" pitchFamily="34" charset="-120"/>
               </a:rPr>
-              <a:t>pricey</a:t>
+              <a:t>overpriced</a:t>
             </a:r>
             <a:endParaRPr lang="en-US" sz="1200" dirty="0"/>
           </a:p>
@@ -42352,7 +42769,7 @@
                 <a:ea typeface="Calibri" pitchFamily="34" charset="-122"/>
                 <a:cs typeface="Calibri" pitchFamily="34" charset="-120"/>
               </a:rPr>
-              <a:t>When something costs less money than it is really worth.</a:t>
+              <a:t>When an item does not have a price label on it yet.</a:t>
             </a:r>
             <a:endParaRPr lang="en-US" sz="1200" dirty="0"/>
           </a:p>
@@ -42425,7 +42842,7 @@
                 <a:ea typeface="Trebuchet MS" pitchFamily="34" charset="-122"/>
                 <a:cs typeface="Trebuchet MS" pitchFamily="34" charset="-120"/>
               </a:rPr>
-              <a:t>overpriced</a:t>
+              <a:t>underpriced</a:t>
             </a:r>
             <a:endParaRPr lang="en-US" sz="1200" dirty="0"/>
           </a:p>
@@ -42491,7 +42908,7 @@
                 <a:ea typeface="Calibri" pitchFamily="34" charset="-122"/>
                 <a:cs typeface="Calibri" pitchFamily="34" charset="-120"/>
               </a:rPr>
-              <a:t>So valuable that you cannot put a price on it.</a:t>
+              <a:t>Something that costs a lot of money; expensive.</a:t>
             </a:r>
             <a:endParaRPr lang="en-US" sz="1200" dirty="0"/>
           </a:p>
@@ -42564,7 +42981,7 @@
                 <a:ea typeface="Trebuchet MS" pitchFamily="34" charset="-122"/>
                 <a:cs typeface="Trebuchet MS" pitchFamily="34" charset="-120"/>
               </a:rPr>
-              <a:t>underpriced</a:t>
+              <a:t>unpriced</a:t>
             </a:r>
             <a:endParaRPr lang="en-US" sz="1200" dirty="0"/>
           </a:p>
@@ -42630,7 +43047,7 @@
                 <a:ea typeface="Calibri" pitchFamily="34" charset="-122"/>
                 <a:cs typeface="Calibri" pitchFamily="34" charset="-120"/>
               </a:rPr>
-              <a:t>When something has been given a cost or value.</a:t>
+              <a:t>The act of deciding how much something should cost.</a:t>
             </a:r>
             <a:endParaRPr lang="en-US" sz="1200" dirty="0"/>
           </a:p>
@@ -43125,7 +43542,7 @@
                 <a:ea typeface="Calibri" pitchFamily="34" charset="-122"/>
                 <a:cs typeface="Calibri" pitchFamily="34" charset="-120"/>
               </a:rPr>
-              <a:t>The price of the new book was written on a sticker on the front cover.</a:t>
+              <a:t>The shopkeeper checked that every item on the shelf was priced correctly before opening time.</a:t>
             </a:r>
             <a:endParaRPr lang="en-US" sz="1500" dirty="0"/>
           </a:p>
@@ -43289,7 +43706,7 @@
                 <a:ea typeface="Calibri" pitchFamily="34" charset="-122"/>
                 <a:cs typeface="Calibri" pitchFamily="34" charset="-120"/>
               </a:rPr>
-              <a:t>Mum thought the toy was overpriced, so she decided not to buy it.</a:t>
+              <a:t>Mum thought the new sneakers were overpriced, so she waited for a sale.</a:t>
             </a:r>
             <a:endParaRPr lang="en-US" sz="1500" dirty="0"/>
           </a:p>
